--- a/applications/auda-srh/documents/auda-srh_ppt.pptx
+++ b/applications/auda-srh/documents/auda-srh_ppt.pptx
@@ -13,8 +13,6 @@
     <p:sldId id="261" r:id="rId12"/>
     <p:sldId id="262" r:id="rId13"/>
     <p:sldId id="263" r:id="rId14"/>
-    <p:sldId id="264" r:id="rId15"/>
-    <p:sldId id="265" r:id="rId16"/>
   </p:sldIdLst>
   <p:sldSz cx="12191695" cy="6858000" type="screen4x3"/>
   <p:notesSz cx="6858000" cy="9144000"/>
@@ -3107,7 +3105,6 @@
         </p:nvPicPr>
         <p:blipFill>
           <a:blip r:embed="rId2"/>
-          <a:srcRect l="33" r="33"/>
           <a:stretch>
             <a:fillRect/>
           </a:stretch>
@@ -3130,8 +3127,8 @@
         </p:nvSpPr>
         <p:spPr>
           <a:xfrm>
-            <a:off x="0" y="3474720"/>
-            <a:ext cx="12191695" cy="3383280"/>
+            <a:off x="0" y="3749040"/>
+            <a:ext cx="12191695" cy="3108960"/>
           </a:xfrm>
           <a:prstGeom prst="rect">
             <a:avLst/>
@@ -3142,7 +3139,6 @@
           <a:ln>
             <a:noFill/>
           </a:ln>
-          <a:effectLst/>
         </p:spPr>
         <p:style>
           <a:lnRef idx="1">
@@ -3174,7 +3170,7 @@
         </p:nvSpPr>
         <p:spPr>
           <a:xfrm>
-            <a:off x="594360" y="3749040"/>
+            <a:off x="548640" y="4023360"/>
             <a:ext cx="10972800" cy="320040"/>
           </a:xfrm>
           <a:prstGeom prst="rect">
@@ -3183,16 +3179,12 @@
           <a:noFill/>
         </p:spPr>
         <p:txBody>
-          <a:bodyPr wrap="square" anchor="t">
+          <a:bodyPr wrap="square">
             <a:spAutoFit/>
           </a:bodyPr>
           <a:lstStyle/>
           <a:p>
-            <a:pPr algn="l">
-              <a:spcAft>
-                <a:spcPts val="0"/>
-              </a:spcAft>
-            </a:pPr>
+            <a:pPr algn="l"/>
             <a:r>
               <a:rPr sz="1300" b="1" i="0">
                 <a:solidFill>
@@ -3213,8 +3205,8 @@
         </p:nvSpPr>
         <p:spPr>
           <a:xfrm>
-            <a:off x="594360" y="4206240"/>
-            <a:ext cx="10972800" cy="640080"/>
+            <a:off x="548640" y="4434840"/>
+            <a:ext cx="10972800" cy="548640"/>
           </a:xfrm>
           <a:prstGeom prst="rect">
             <a:avLst/>
@@ -3222,24 +3214,20 @@
           <a:noFill/>
         </p:spPr>
         <p:txBody>
-          <a:bodyPr wrap="square" anchor="t">
+          <a:bodyPr wrap="square">
             <a:spAutoFit/>
           </a:bodyPr>
           <a:lstStyle/>
           <a:p>
-            <a:pPr algn="l">
-              <a:spcAft>
-                <a:spcPts val="0"/>
-              </a:spcAft>
-            </a:pPr>
-            <a:r>
-              <a:rPr sz="2600" b="1" i="0">
+            <a:pPr algn="l"/>
+            <a:r>
+              <a:rPr sz="2400" b="1" i="0">
                 <a:solidFill>
                   <a:srgbClr val="FFFFFF"/>
                 </a:solidFill>
                 <a:latin typeface="Calibri"/>
               </a:rPr>
-              <a:t>Youth SRH Ambassadors for Community Health Intelligence</a:t>
+              <a:t>Ambassador Nomination — Advocacy &amp; Community Mobilisation</a:t>
             </a:r>
           </a:p>
         </p:txBody>
@@ -3252,8 +3240,8 @@
         </p:nvSpPr>
         <p:spPr>
           <a:xfrm>
-            <a:off x="594360" y="4983481"/>
-            <a:ext cx="10972800" cy="365760"/>
+            <a:off x="548640" y="5257800"/>
+            <a:ext cx="10972800" cy="320040"/>
           </a:xfrm>
           <a:prstGeom prst="rect">
             <a:avLst/>
@@ -3261,337 +3249,12 @@
           <a:noFill/>
         </p:spPr>
         <p:txBody>
-          <a:bodyPr wrap="square" anchor="t">
+          <a:bodyPr wrap="square">
             <a:spAutoFit/>
           </a:bodyPr>
           <a:lstStyle/>
           <a:p>
-            <a:pPr algn="l">
-              <a:spcAft>
-                <a:spcPts val="0"/>
-              </a:spcAft>
-            </a:pPr>
-            <a:r>
-              <a:rPr sz="1500" b="0" i="1">
-                <a:solidFill>
-                  <a:srgbClr val="F2C79B"/>
-                </a:solidFill>
-                <a:latin typeface="Calibri"/>
-              </a:rPr>
-              <a:t>Advocacy and mobilisation powered by FairBanks community reach</a:t>
-            </a:r>
-          </a:p>
-        </p:txBody>
-      </p:sp>
-      <p:sp>
-        <p:nvSpPr>
-          <p:cNvPr id="7" name="TextBox 6"/>
-          <p:cNvSpPr txBox="1"/>
-          <p:nvPr/>
-        </p:nvSpPr>
-        <p:spPr>
-          <a:xfrm>
-            <a:off x="594360" y="5532120"/>
-            <a:ext cx="10972800" cy="274320"/>
-          </a:xfrm>
-          <a:prstGeom prst="rect">
-            <a:avLst/>
-          </a:prstGeom>
-          <a:noFill/>
-        </p:spPr>
-        <p:txBody>
-          <a:bodyPr wrap="square" anchor="t">
-            <a:spAutoFit/>
-          </a:bodyPr>
-          <a:lstStyle/>
-          <a:p>
-            <a:pPr algn="l">
-              <a:spcAft>
-                <a:spcPts val="0"/>
-              </a:spcAft>
-            </a:pPr>
-            <a:r>
-              <a:rPr sz="1300" b="1" i="0">
-                <a:solidFill>
-                  <a:srgbClr val="FFFFFF"/>
-                </a:solidFill>
-                <a:latin typeface="Calibri"/>
-              </a:rPr>
-              <a:t>Your health, our mission.</a:t>
-            </a:r>
-          </a:p>
-        </p:txBody>
-      </p:sp>
-      <p:sp>
-        <p:nvSpPr>
-          <p:cNvPr id="8" name="TextBox 7"/>
-          <p:cNvSpPr txBox="1"/>
-          <p:nvPr/>
-        </p:nvSpPr>
-        <p:spPr>
-          <a:xfrm>
-            <a:off x="594360" y="5989320"/>
-            <a:ext cx="10972800" cy="365760"/>
-          </a:xfrm>
-          <a:prstGeom prst="rect">
-            <a:avLst/>
-          </a:prstGeom>
-          <a:noFill/>
-        </p:spPr>
-        <p:txBody>
-          <a:bodyPr wrap="square" anchor="t">
-            <a:spAutoFit/>
-          </a:bodyPr>
-          <a:lstStyle/>
-          <a:p>
-            <a:pPr algn="l">
-              <a:spcAft>
-                <a:spcPts val="0"/>
-              </a:spcAft>
-            </a:pPr>
-            <a:r>
-              <a:rPr sz="1200" b="0" i="0">
-                <a:solidFill>
-                  <a:srgbClr val="D0E8E8"/>
-                </a:solidFill>
-                <a:latin typeface="Calibri"/>
-              </a:rPr>
-              <a:t>Appoint FairBanks youth as AUDA-NEPAD Youth SRH Ambassadors.</a:t>
-            </a:r>
-          </a:p>
-        </p:txBody>
-      </p:sp>
-    </p:spTree>
-  </p:cSld>
-  <p:clrMapOvr>
-    <a:masterClrMapping/>
-  </p:clrMapOvr>
-</p:sld>
-</file>
-
-<file path=ppt/slides/slide10.xml><?xml version="1.0" encoding="utf-8"?>
-<p:sld xmlns:a="http://schemas.openxmlformats.org/drawingml/2006/main" xmlns:p="http://schemas.openxmlformats.org/presentationml/2006/main" xmlns:r="http://schemas.openxmlformats.org/officeDocument/2006/relationships">
-  <p:cSld>
-    <p:spTree>
-      <p:nvGrpSpPr>
-        <p:cNvPr id="1" name=""/>
-        <p:cNvGrpSpPr/>
-        <p:nvPr/>
-      </p:nvGrpSpPr>
-      <p:grpSpPr/>
-      <p:pic>
-        <p:nvPicPr>
-          <p:cNvPr id="2" name="Picture 1" descr="outreach_audience_full_group_01_opt.jpg"/>
-          <p:cNvPicPr>
-            <a:picLocks noChangeAspect="1"/>
-          </p:cNvPicPr>
-          <p:nvPr/>
-        </p:nvPicPr>
-        <p:blipFill>
-          <a:blip r:embed="rId2"/>
-          <a:srcRect t="7796" b="7796"/>
-          <a:stretch>
-            <a:fillRect/>
-          </a:stretch>
-        </p:blipFill>
-        <p:spPr>
-          <a:xfrm>
-            <a:off x="0" y="0"/>
-            <a:ext cx="12191695" cy="6858000"/>
-          </a:xfrm>
-          <a:prstGeom prst="rect">
-            <a:avLst/>
-          </a:prstGeom>
-        </p:spPr>
-      </p:pic>
-      <p:sp>
-        <p:nvSpPr>
-          <p:cNvPr id="3" name="Rectangle 2"/>
-          <p:cNvSpPr/>
-          <p:nvPr/>
-        </p:nvSpPr>
-        <p:spPr>
-          <a:xfrm>
-            <a:off x="0" y="3657600"/>
-            <a:ext cx="12191695" cy="3200400"/>
-          </a:xfrm>
-          <a:prstGeom prst="rect">
-            <a:avLst/>
-          </a:prstGeom>
-          <a:solidFill>
-            <a:srgbClr val="0A1F2E"/>
-          </a:solidFill>
-          <a:ln>
-            <a:noFill/>
-          </a:ln>
-          <a:effectLst/>
-        </p:spPr>
-        <p:style>
-          <a:lnRef idx="1">
-            <a:schemeClr val="accent1"/>
-          </a:lnRef>
-          <a:fillRef idx="3">
-            <a:schemeClr val="accent1"/>
-          </a:fillRef>
-          <a:effectRef idx="2">
-            <a:schemeClr val="accent1"/>
-          </a:effectRef>
-          <a:fontRef idx="minor">
-            <a:schemeClr val="lt1"/>
-          </a:fontRef>
-        </p:style>
-        <p:txBody>
-          <a:bodyPr rtlCol="0" anchor="ctr"/>
-          <a:lstStyle/>
-          <a:p>
-            <a:pPr algn="ctr"/>
-          </a:p>
-        </p:txBody>
-      </p:sp>
-      <p:sp>
-        <p:nvSpPr>
-          <p:cNvPr id="4" name="TextBox 3"/>
-          <p:cNvSpPr txBox="1"/>
-          <p:nvPr/>
-        </p:nvSpPr>
-        <p:spPr>
-          <a:xfrm>
-            <a:off x="594360" y="3931920"/>
-            <a:ext cx="10972800" cy="274320"/>
-          </a:xfrm>
-          <a:prstGeom prst="rect">
-            <a:avLst/>
-          </a:prstGeom>
-          <a:noFill/>
-        </p:spPr>
-        <p:txBody>
-          <a:bodyPr wrap="square" anchor="t">
-            <a:spAutoFit/>
-          </a:bodyPr>
-          <a:lstStyle/>
-          <a:p>
-            <a:pPr algn="l">
-              <a:spcAft>
-                <a:spcPts val="0"/>
-              </a:spcAft>
-            </a:pPr>
-            <a:r>
-              <a:rPr sz="1300" b="1" i="0">
-                <a:solidFill>
-                  <a:srgbClr val="14A3A3"/>
-                </a:solidFill>
-                <a:latin typeface="Calibri"/>
-              </a:rPr>
-              <a:t>The ask</a:t>
-            </a:r>
-          </a:p>
-        </p:txBody>
-      </p:sp>
-      <p:sp>
-        <p:nvSpPr>
-          <p:cNvPr id="5" name="TextBox 4"/>
-          <p:cNvSpPr txBox="1"/>
-          <p:nvPr/>
-        </p:nvSpPr>
-        <p:spPr>
-          <a:xfrm>
-            <a:off x="594360" y="4389120"/>
-            <a:ext cx="10972800" cy="822960"/>
-          </a:xfrm>
-          <a:prstGeom prst="rect">
-            <a:avLst/>
-          </a:prstGeom>
-          <a:noFill/>
-        </p:spPr>
-        <p:txBody>
-          <a:bodyPr wrap="square" anchor="t">
-            <a:spAutoFit/>
-          </a:bodyPr>
-          <a:lstStyle/>
-          <a:p>
-            <a:pPr algn="l">
-              <a:spcAft>
-                <a:spcPts val="0"/>
-              </a:spcAft>
-            </a:pPr>
-            <a:r>
-              <a:rPr sz="2200" b="1" i="0">
-                <a:solidFill>
-                  <a:srgbClr val="FFFFFF"/>
-                </a:solidFill>
-                <a:latin typeface="Calibri"/>
-              </a:rPr>
-              <a:t>Appoint FairBanks youth as AUDA-NEPAD Youth SRH Ambassadors.</a:t>
-            </a:r>
-          </a:p>
-        </p:txBody>
-      </p:sp>
-      <p:sp>
-        <p:nvSpPr>
-          <p:cNvPr id="6" name="TextBox 5"/>
-          <p:cNvSpPr txBox="1"/>
-          <p:nvPr/>
-        </p:nvSpPr>
-        <p:spPr>
-          <a:xfrm>
-            <a:off x="594360" y="5394960"/>
-            <a:ext cx="10972800" cy="365760"/>
-          </a:xfrm>
-          <a:prstGeom prst="rect">
-            <a:avLst/>
-          </a:prstGeom>
-          <a:noFill/>
-        </p:spPr>
-        <p:txBody>
-          <a:bodyPr wrap="square" anchor="t">
-            <a:spAutoFit/>
-          </a:bodyPr>
-          <a:lstStyle/>
-          <a:p>
-            <a:pPr algn="l">
-              <a:spcAft>
-                <a:spcPts val="0"/>
-              </a:spcAft>
-            </a:pPr>
-            <a:r>
-              <a:rPr sz="1400" b="0" i="1">
-                <a:solidFill>
-                  <a:srgbClr val="F2C79B"/>
-                </a:solidFill>
-                <a:latin typeface="Calibri"/>
-              </a:rPr>
-              <a:t>Advocacy and mobilisation powered by FairBanks community reach</a:t>
-            </a:r>
-          </a:p>
-        </p:txBody>
-      </p:sp>
-      <p:sp>
-        <p:nvSpPr>
-          <p:cNvPr id="7" name="TextBox 6"/>
-          <p:cNvSpPr txBox="1"/>
-          <p:nvPr/>
-        </p:nvSpPr>
-        <p:spPr>
-          <a:xfrm>
-            <a:off x="594360" y="5943600"/>
-            <a:ext cx="10972800" cy="320040"/>
-          </a:xfrm>
-          <a:prstGeom prst="rect">
-            <a:avLst/>
-          </a:prstGeom>
-          <a:noFill/>
-        </p:spPr>
-        <p:txBody>
-          <a:bodyPr wrap="square" anchor="t">
-            <a:spAutoFit/>
-          </a:bodyPr>
-          <a:lstStyle/>
-          <a:p>
-            <a:pPr algn="l">
-              <a:spcAft>
-                <a:spcPts val="0"/>
-              </a:spcAft>
-            </a:pPr>
+            <a:pPr algn="l"/>
             <a:r>
               <a:rPr sz="1400" b="1" i="0">
                 <a:solidFill>
@@ -3600,6 +3263,41 @@
                 <a:latin typeface="Calibri"/>
               </a:rPr>
               <a:t>Your health, our mission.</a:t>
+            </a:r>
+          </a:p>
+        </p:txBody>
+      </p:sp>
+      <p:sp>
+        <p:nvSpPr>
+          <p:cNvPr id="7" name="TextBox 6"/>
+          <p:cNvSpPr txBox="1"/>
+          <p:nvPr/>
+        </p:nvSpPr>
+        <p:spPr>
+          <a:xfrm>
+            <a:off x="548640" y="5806440"/>
+            <a:ext cx="10972800" cy="320040"/>
+          </a:xfrm>
+          <a:prstGeom prst="rect">
+            <a:avLst/>
+          </a:prstGeom>
+          <a:noFill/>
+        </p:spPr>
+        <p:txBody>
+          <a:bodyPr wrap="square">
+            <a:spAutoFit/>
+          </a:bodyPr>
+          <a:lstStyle/>
+          <a:p>
+            <a:pPr algn="l"/>
+            <a:r>
+              <a:rPr sz="1200" b="1" i="0">
+                <a:solidFill>
+                  <a:srgbClr val="F2C79B"/>
+                </a:solidFill>
+                <a:latin typeface="Calibri"/>
+              </a:rPr>
+              <a:t>Application deadline: 17 July 2026</a:t>
             </a:r>
           </a:p>
         </p:txBody>
@@ -3631,7 +3329,7 @@
         <p:spPr>
           <a:xfrm>
             <a:off x="0" y="0"/>
-            <a:ext cx="12191695" cy="960120"/>
+            <a:ext cx="12191695" cy="914400"/>
           </a:xfrm>
           <a:prstGeom prst="rect">
             <a:avLst/>
@@ -3642,7 +3340,6 @@
           <a:ln>
             <a:noFill/>
           </a:ln>
-          <a:effectLst/>
         </p:spPr>
         <p:style>
           <a:lnRef idx="1">
@@ -3675,7 +3372,7 @@
         <p:spPr>
           <a:xfrm>
             <a:off x="0" y="0"/>
-            <a:ext cx="164592" cy="960120"/>
+            <a:ext cx="137160" cy="914400"/>
           </a:xfrm>
           <a:prstGeom prst="rect">
             <a:avLst/>
@@ -3686,7 +3383,6 @@
           <a:ln>
             <a:noFill/>
           </a:ln>
-          <a:effectLst/>
         </p:spPr>
         <p:style>
           <a:lnRef idx="1">
@@ -3718,8 +3414,8 @@
         </p:nvSpPr>
         <p:spPr>
           <a:xfrm>
-            <a:off x="457200" y="109728"/>
-            <a:ext cx="10972800" cy="256032"/>
+            <a:off x="411480" y="91440"/>
+            <a:ext cx="10972800" cy="274320"/>
           </a:xfrm>
           <a:prstGeom prst="rect">
             <a:avLst/>
@@ -3727,16 +3423,12 @@
           <a:noFill/>
         </p:spPr>
         <p:txBody>
-          <a:bodyPr wrap="square" anchor="t">
+          <a:bodyPr wrap="square">
             <a:spAutoFit/>
           </a:bodyPr>
           <a:lstStyle/>
           <a:p>
-            <a:pPr algn="l">
-              <a:spcAft>
-                <a:spcPts val="0"/>
-              </a:spcAft>
-            </a:pPr>
+            <a:pPr algn="l"/>
             <a:r>
               <a:rPr sz="1100" b="1" i="0">
                 <a:solidFill>
@@ -3744,7 +3436,7 @@
                 </a:solidFill>
                 <a:latin typeface="Calibri"/>
               </a:rPr>
-              <a:t>WIN-WIN</a:t>
+              <a:t>NOMINATION</a:t>
             </a:r>
           </a:p>
         </p:txBody>
@@ -3757,8 +3449,8 @@
         </p:nvSpPr>
         <p:spPr>
           <a:xfrm>
-            <a:off x="457200" y="384048"/>
-            <a:ext cx="11247120" cy="475488"/>
+            <a:off x="411480" y="384048"/>
+            <a:ext cx="10972800" cy="457200"/>
           </a:xfrm>
           <a:prstGeom prst="rect">
             <a:avLst/>
@@ -3766,24 +3458,20 @@
           <a:noFill/>
         </p:spPr>
         <p:txBody>
-          <a:bodyPr wrap="square" anchor="t">
+          <a:bodyPr wrap="square">
             <a:spAutoFit/>
           </a:bodyPr>
           <a:lstStyle/>
           <a:p>
-            <a:pPr algn="l">
-              <a:spcAft>
-                <a:spcPts val="0"/>
-              </a:spcAft>
-            </a:pPr>
-            <a:r>
-              <a:rPr sz="2200" b="1" i="0">
+            <a:pPr algn="l"/>
+            <a:r>
+              <a:rPr sz="2400" b="1" i="0">
                 <a:solidFill>
                   <a:srgbClr val="0A1F2E"/>
                 </a:solidFill>
                 <a:latin typeface="Calibri"/>
               </a:rPr>
-              <a:t>Mutual value for FairBanks and the programme</a:t>
+              <a:t>Grassroots mobiliser → continental SRH voice</a:t>
             </a:r>
           </a:p>
         </p:txBody>
@@ -3796,47 +3484,8 @@
         </p:nvSpPr>
         <p:spPr>
           <a:xfrm>
-            <a:off x="457200" y="1143000"/>
-            <a:ext cx="5486400" cy="320040"/>
-          </a:xfrm>
-          <a:prstGeom prst="rect">
-            <a:avLst/>
-          </a:prstGeom>
-          <a:noFill/>
-        </p:spPr>
-        <p:txBody>
-          <a:bodyPr wrap="square" anchor="t">
-            <a:spAutoFit/>
-          </a:bodyPr>
-          <a:lstStyle/>
-          <a:p>
-            <a:pPr algn="l">
-              <a:spcAft>
-                <a:spcPts val="0"/>
-              </a:spcAft>
-            </a:pPr>
-            <a:r>
-              <a:rPr sz="1600" b="1" i="0">
-                <a:solidFill>
-                  <a:srgbClr val="0D6E6E"/>
-                </a:solidFill>
-                <a:latin typeface="Calibri"/>
-              </a:rPr>
-              <a:t>What we gain</a:t>
-            </a:r>
-          </a:p>
-        </p:txBody>
-      </p:sp>
-      <p:sp>
-        <p:nvSpPr>
-          <p:cNvPr id="7" name="TextBox 6"/>
-          <p:cNvSpPr txBox="1"/>
-          <p:nvPr/>
-        </p:nvSpPr>
-        <p:spPr>
-          <a:xfrm>
-            <a:off x="457200" y="1508760"/>
-            <a:ext cx="5486400" cy="4800600"/>
+            <a:off x="457200" y="1097280"/>
+            <a:ext cx="10972800" cy="5029200"/>
           </a:xfrm>
           <a:prstGeom prst="rect">
             <a:avLst/>
@@ -3849,207 +3498,31 @@
           </a:bodyPr>
           <a:lstStyle/>
           <a:p>
-            <a:pPr>
-              <a:spcAft>
-                <a:spcPts val="800"/>
-              </a:spcAft>
-            </a:pPr>
-            <a:r>
-              <a:rPr sz="1300">
+            <a:pPr algn="l"/>
+            <a:r>
+              <a:rPr sz="1800" b="0" i="0">
                 <a:solidFill>
                   <a:srgbClr val="1E2F38"/>
                 </a:solidFill>
                 <a:latin typeface="Calibri"/>
               </a:rPr>
-              <a:t>•  Continental recognition and mentorship for FairBanks youth</a:t>
-            </a:r>
-          </a:p>
-          <a:p>
-            <a:pPr>
-              <a:spcAft>
-                <a:spcPts val="800"/>
-              </a:spcAft>
-            </a:pPr>
-            <a:r>
-              <a:rPr sz="1300">
-                <a:solidFill>
-                  <a:srgbClr val="1E2F38"/>
-                </a:solidFill>
-                <a:latin typeface="Calibri"/>
-              </a:rPr>
-              <a:t>•  Training that strengthens our adolescent and maternal health messaging</a:t>
-            </a:r>
-          </a:p>
-          <a:p>
-            <a:pPr>
-              <a:spcAft>
-                <a:spcPts val="800"/>
-              </a:spcAft>
-            </a:pPr>
-            <a:r>
-              <a:rPr sz="1300">
-                <a:solidFill>
-                  <a:srgbClr val="1E2F38"/>
-                </a:solidFill>
-                <a:latin typeface="Calibri"/>
-              </a:rPr>
-              <a:t>•  Network access across African Union youth health spaces</a:t>
-            </a:r>
-          </a:p>
-          <a:p>
-            <a:pPr>
-              <a:spcAft>
-                <a:spcPts val="800"/>
-              </a:spcAft>
-            </a:pPr>
-            <a:r>
-              <a:rPr sz="1300">
-                <a:solidFill>
-                  <a:srgbClr val="1E2F38"/>
-                </a:solidFill>
-                <a:latin typeface="Calibri"/>
-              </a:rPr>
-              <a:t>•  Sponsored participation opportunities in selected events</a:t>
-            </a:r>
-          </a:p>
-        </p:txBody>
-      </p:sp>
-      <p:sp>
-        <p:nvSpPr>
-          <p:cNvPr id="8" name="TextBox 7"/>
-          <p:cNvSpPr txBox="1"/>
-          <p:nvPr/>
-        </p:nvSpPr>
-        <p:spPr>
-          <a:xfrm>
-            <a:off x="6309360" y="1143000"/>
-            <a:ext cx="5486400" cy="320040"/>
-          </a:xfrm>
-          <a:prstGeom prst="rect">
-            <a:avLst/>
-          </a:prstGeom>
-          <a:noFill/>
-        </p:spPr>
-        <p:txBody>
-          <a:bodyPr wrap="square" anchor="t">
-            <a:spAutoFit/>
-          </a:bodyPr>
-          <a:lstStyle/>
-          <a:p>
-            <a:pPr algn="l">
-              <a:spcAft>
-                <a:spcPts val="0"/>
-              </a:spcAft>
-            </a:pPr>
-            <a:r>
-              <a:rPr sz="1600" b="1" i="0">
-                <a:solidFill>
-                  <a:srgbClr val="0D6E6E"/>
-                </a:solidFill>
-                <a:latin typeface="Calibri"/>
-              </a:rPr>
-              <a:t>What they gain</a:t>
-            </a:r>
-          </a:p>
-        </p:txBody>
-      </p:sp>
-      <p:sp>
-        <p:nvSpPr>
-          <p:cNvPr id="9" name="TextBox 8"/>
-          <p:cNvSpPr txBox="1"/>
-          <p:nvPr/>
-        </p:nvSpPr>
-        <p:spPr>
-          <a:xfrm>
-            <a:off x="6309360" y="1508760"/>
-            <a:ext cx="5394960" cy="4800600"/>
-          </a:xfrm>
-          <a:prstGeom prst="rect">
-            <a:avLst/>
-          </a:prstGeom>
-          <a:noFill/>
-        </p:spPr>
-        <p:txBody>
-          <a:bodyPr wrap="square">
-            <a:spAutoFit/>
-          </a:bodyPr>
-          <a:lstStyle/>
-          <a:p>
-            <a:pPr>
-              <a:spcAft>
-                <a:spcPts val="800"/>
-              </a:spcAft>
-            </a:pPr>
-            <a:r>
-              <a:rPr sz="1300">
-                <a:solidFill>
-                  <a:srgbClr val="1E2F38"/>
-                </a:solidFill>
-                <a:latin typeface="Calibri"/>
-              </a:rPr>
-              <a:t>•  Ambassadors embedded in a live community health organisation</a:t>
-            </a:r>
-          </a:p>
-          <a:p>
-            <a:pPr>
-              <a:spcAft>
-                <a:spcPts val="800"/>
-              </a:spcAft>
-            </a:pPr>
-            <a:r>
-              <a:rPr sz="1300">
-                <a:solidFill>
-                  <a:srgbClr val="1E2F38"/>
-                </a:solidFill>
-                <a:latin typeface="Calibri"/>
-              </a:rPr>
-              <a:t>•  Channels to CHWs, schools, and outreach events in Kampala communities</a:t>
-            </a:r>
-          </a:p>
-          <a:p>
-            <a:pPr>
-              <a:spcAft>
-                <a:spcPts val="800"/>
-              </a:spcAft>
-            </a:pPr>
-            <a:r>
-              <a:rPr sz="1300">
-                <a:solidFill>
-                  <a:srgbClr val="1E2F38"/>
-                </a:solidFill>
-                <a:latin typeface="Calibri"/>
-              </a:rPr>
-              <a:t>•  Digital storytelling grounded in real SRH service pathways</a:t>
-            </a:r>
-          </a:p>
-          <a:p>
-            <a:pPr>
-              <a:spcAft>
-                <a:spcPts val="800"/>
-              </a:spcAft>
-            </a:pPr>
-            <a:r>
-              <a:rPr sz="1300">
-                <a:solidFill>
-                  <a:srgbClr val="1E2F38"/>
-                </a:solidFill>
-                <a:latin typeface="Calibri"/>
-              </a:rPr>
-              <a:t>•  Diverse regional representation from East Africa / Uganda</a:t>
-            </a:r>
-          </a:p>
-        </p:txBody>
-      </p:sp>
-      <p:sp>
-        <p:nvSpPr>
-          <p:cNvPr id="10" name="Rectangle 9"/>
+              <a:t>FairBanks Community Reach runs maternal &amp; adolescent programmes with CHWs/VHTs.
+Ambassadors must connect field truth to policy — that is already my work.
+FCHIP adds evidence on where SRH gaps cluster.</a:t>
+            </a:r>
+          </a:p>
+        </p:txBody>
+      </p:sp>
+      <p:sp>
+        <p:nvSpPr>
+          <p:cNvPr id="7" name="Rectangle 6"/>
           <p:cNvSpPr/>
           <p:nvPr/>
         </p:nvSpPr>
         <p:spPr>
           <a:xfrm>
-            <a:off x="0" y="6565392"/>
-            <a:ext cx="12191695" cy="292608"/>
+            <a:off x="0" y="6583680"/>
+            <a:ext cx="12191695" cy="274320"/>
           </a:xfrm>
           <a:prstGeom prst="rect">
             <a:avLst/>
@@ -4060,7 +3533,6 @@
           <a:ln>
             <a:noFill/>
           </a:ln>
-          <a:effectLst/>
         </p:spPr>
         <p:style>
           <a:lnRef idx="1">
@@ -4086,14 +3558,14 @@
       </p:sp>
       <p:sp>
         <p:nvSpPr>
-          <p:cNvPr id="11" name="TextBox 10"/>
+          <p:cNvPr id="8" name="TextBox 7"/>
           <p:cNvSpPr txBox="1"/>
           <p:nvPr/>
         </p:nvSpPr>
         <p:spPr>
           <a:xfrm>
-            <a:off x="365760" y="6574536"/>
-            <a:ext cx="9144000" cy="274320"/>
+            <a:off x="365760" y="6592824"/>
+            <a:ext cx="9144000" cy="256032"/>
           </a:xfrm>
           <a:prstGeom prst="rect">
             <a:avLst/>
@@ -4101,16 +3573,12 @@
           <a:noFill/>
         </p:spPr>
         <p:txBody>
-          <a:bodyPr wrap="square" anchor="ctr">
+          <a:bodyPr wrap="square">
             <a:spAutoFit/>
           </a:bodyPr>
           <a:lstStyle/>
           <a:p>
-            <a:pPr algn="l">
-              <a:spcAft>
-                <a:spcPts val="0"/>
-              </a:spcAft>
-            </a:pPr>
+            <a:pPr algn="l"/>
             <a:r>
               <a:rPr sz="900" b="0" i="0">
                 <a:solidFill>
@@ -4118,21 +3586,21 @@
                 </a:solidFill>
                 <a:latin typeface="Calibri"/>
               </a:rPr>
-              <a:t>FairBanks FCHIP  |  AUDA-NEPAD Youth SRH Ambassadors Initiat  |  Your health, our mission.</a:t>
-            </a:r>
-          </a:p>
-        </p:txBody>
-      </p:sp>
-      <p:sp>
-        <p:nvSpPr>
-          <p:cNvPr id="12" name="TextBox 11"/>
+              <a:t>FairBanks | AUDA-NEPAD Youth SRH Ambassador | Your health, our mission.</a:t>
+            </a:r>
+          </a:p>
+        </p:txBody>
+      </p:sp>
+      <p:sp>
+        <p:nvSpPr>
+          <p:cNvPr id="9" name="TextBox 8"/>
           <p:cNvSpPr txBox="1"/>
           <p:nvPr/>
         </p:nvSpPr>
         <p:spPr>
           <a:xfrm>
-            <a:off x="11094415" y="6574536"/>
-            <a:ext cx="731520" cy="274320"/>
+            <a:off x="11460175" y="6592824"/>
+            <a:ext cx="457200" cy="256032"/>
           </a:xfrm>
           <a:prstGeom prst="rect">
             <a:avLst/>
@@ -4140,16 +3608,12 @@
           <a:noFill/>
         </p:spPr>
         <p:txBody>
-          <a:bodyPr wrap="square" anchor="ctr">
+          <a:bodyPr wrap="square">
             <a:spAutoFit/>
           </a:bodyPr>
           <a:lstStyle/>
           <a:p>
-            <a:pPr algn="r">
-              <a:spcAft>
-                <a:spcPts val="0"/>
-              </a:spcAft>
-            </a:pPr>
+            <a:pPr algn="r"/>
             <a:r>
               <a:rPr sz="900" b="0" i="0">
                 <a:solidFill>
@@ -4189,7 +3653,7 @@
         <p:spPr>
           <a:xfrm>
             <a:off x="0" y="0"/>
-            <a:ext cx="12191695" cy="960120"/>
+            <a:ext cx="12191695" cy="914400"/>
           </a:xfrm>
           <a:prstGeom prst="rect">
             <a:avLst/>
@@ -4200,7 +3664,6 @@
           <a:ln>
             <a:noFill/>
           </a:ln>
-          <a:effectLst/>
         </p:spPr>
         <p:style>
           <a:lnRef idx="1">
@@ -4233,7 +3696,7 @@
         <p:spPr>
           <a:xfrm>
             <a:off x="0" y="0"/>
-            <a:ext cx="164592" cy="960120"/>
+            <a:ext cx="137160" cy="914400"/>
           </a:xfrm>
           <a:prstGeom prst="rect">
             <a:avLst/>
@@ -4244,7 +3707,6 @@
           <a:ln>
             <a:noFill/>
           </a:ln>
-          <a:effectLst/>
         </p:spPr>
         <p:style>
           <a:lnRef idx="1">
@@ -4276,8 +3738,8 @@
         </p:nvSpPr>
         <p:spPr>
           <a:xfrm>
-            <a:off x="457200" y="109728"/>
-            <a:ext cx="10972800" cy="256032"/>
+            <a:off x="411480" y="91440"/>
+            <a:ext cx="10972800" cy="274320"/>
           </a:xfrm>
           <a:prstGeom prst="rect">
             <a:avLst/>
@@ -4285,16 +3747,12 @@
           <a:noFill/>
         </p:spPr>
         <p:txBody>
-          <a:bodyPr wrap="square" anchor="t">
+          <a:bodyPr wrap="square">
             <a:spAutoFit/>
           </a:bodyPr>
           <a:lstStyle/>
           <a:p>
-            <a:pPr algn="l">
-              <a:spcAft>
-                <a:spcPts val="0"/>
-              </a:spcAft>
-            </a:pPr>
+            <a:pPr algn="l"/>
             <a:r>
               <a:rPr sz="1100" b="1" i="0">
                 <a:solidFill>
@@ -4302,7 +3760,7 @@
                 </a:solidFill>
                 <a:latin typeface="Calibri"/>
               </a:rPr>
-              <a:t>THE PROBLEM</a:t>
+              <a:t>ADVOCACY</a:t>
             </a:r>
           </a:p>
         </p:txBody>
@@ -4315,8 +3773,8 @@
         </p:nvSpPr>
         <p:spPr>
           <a:xfrm>
-            <a:off x="457200" y="384048"/>
-            <a:ext cx="11247120" cy="475488"/>
+            <a:off x="411480" y="384048"/>
+            <a:ext cx="10972800" cy="457200"/>
           </a:xfrm>
           <a:prstGeom prst="rect">
             <a:avLst/>
@@ -4324,31 +3782,27 @@
           <a:noFill/>
         </p:spPr>
         <p:txBody>
-          <a:bodyPr wrap="square" anchor="t">
+          <a:bodyPr wrap="square">
             <a:spAutoFit/>
           </a:bodyPr>
           <a:lstStyle/>
           <a:p>
-            <a:pPr algn="l">
-              <a:spcAft>
-                <a:spcPts val="0"/>
-              </a:spcAft>
-            </a:pPr>
-            <a:r>
-              <a:rPr sz="2200" b="1" i="0">
+            <a:pPr algn="l"/>
+            <a:r>
+              <a:rPr sz="2400" b="1" i="0">
                 <a:solidFill>
                   <a:srgbClr val="0A1F2E"/>
                 </a:solidFill>
                 <a:latin typeface="Calibri"/>
               </a:rPr>
-              <a:t>Health systems react too late</a:t>
+              <a:t>SRH through FairBanks outreach</a:t>
             </a:r>
           </a:p>
         </p:txBody>
       </p:sp>
       <p:pic>
         <p:nvPicPr>
-          <p:cNvPr id="6" name="Picture 5" descr="reactive_clinic_opt.jpg"/>
+          <p:cNvPr id="6" name="Picture 5" descr="outreach_facilitator_canopy_01_opt.jpg"/>
           <p:cNvPicPr>
             <a:picLocks noChangeAspect="1"/>
           </p:cNvPicPr>
@@ -4362,7 +3816,7 @@
         </p:blipFill>
         <p:spPr>
           <a:xfrm>
-            <a:off x="411480" y="2004691"/>
+            <a:off x="411480" y="1844671"/>
             <a:ext cx="5303520" cy="3534417"/>
           </a:xfrm>
           <a:prstGeom prst="rect">
@@ -4378,8 +3832,8 @@
         </p:nvSpPr>
         <p:spPr>
           <a:xfrm>
-            <a:off x="6035040" y="1234440"/>
-            <a:ext cx="5669280" cy="5074920"/>
+            <a:off x="5943600" y="1097280"/>
+            <a:ext cx="5760720" cy="5029200"/>
           </a:xfrm>
           <a:prstGeom prst="rect">
             <a:avLst/>
@@ -4392,83 +3846,18 @@
           </a:bodyPr>
           <a:lstStyle/>
           <a:p>
-            <a:pPr>
-              <a:spcAft>
-                <a:spcPts val="800"/>
-              </a:spcAft>
-            </a:pPr>
-            <a:r>
-              <a:rPr sz="1400">
+            <a:pPr algn="l"/>
+            <a:r>
+              <a:rPr sz="1500" b="0" i="0">
                 <a:solidFill>
                   <a:srgbClr val="1E2F38"/>
                 </a:solidFill>
                 <a:latin typeface="Calibri"/>
               </a:rPr>
-              <a:t>•  Care often starts only after people fall sick</a:t>
-            </a:r>
-          </a:p>
-          <a:p>
-            <a:pPr>
-              <a:spcAft>
-                <a:spcPts val="800"/>
-              </a:spcAft>
-            </a:pPr>
-            <a:r>
-              <a:rPr sz="1400">
-                <a:solidFill>
-                  <a:srgbClr val="1E2F38"/>
-                </a:solidFill>
-                <a:latin typeface="Calibri"/>
-              </a:rPr>
-              <a:t>•  Community health data sits in paper registers and silos</a:t>
-            </a:r>
-          </a:p>
-          <a:p>
-            <a:pPr>
-              <a:spcAft>
-                <a:spcPts val="800"/>
-              </a:spcAft>
-            </a:pPr>
-            <a:r>
-              <a:rPr sz="1400">
-                <a:solidFill>
-                  <a:srgbClr val="1E2F38"/>
-                </a:solidFill>
-                <a:latin typeface="Calibri"/>
-              </a:rPr>
-              <a:t>•  High-risk pregnancies and NCDs are found too late</a:t>
-            </a:r>
-          </a:p>
-          <a:p>
-            <a:pPr>
-              <a:spcAft>
-                <a:spcPts val="800"/>
-              </a:spcAft>
-            </a:pPr>
-            <a:r>
-              <a:rPr sz="1400">
-                <a:solidFill>
-                  <a:srgbClr val="1E2F38"/>
-                </a:solidFill>
-                <a:latin typeface="Calibri"/>
-              </a:rPr>
-              <a:t>•  Medicine stock-outs hit hard during disease surges</a:t>
-            </a:r>
-          </a:p>
-          <a:p>
-            <a:pPr>
-              <a:spcAft>
-                <a:spcPts val="800"/>
-              </a:spcAft>
-            </a:pPr>
-            <a:r>
-              <a:rPr sz="1400">
-                <a:solidFill>
-                  <a:srgbClr val="1E2F38"/>
-                </a:solidFill>
-                <a:latin typeface="Calibri"/>
-              </a:rPr>
-              <a:t>•  Health shocks push poor families deeper into hardship</a:t>
+              <a:t>• School and community dialogues on adolescent SRH through FairBanks outreach
+• Maternal health education linking ANC uptake, safe pregnancy, and partner involvement
+• Digital content that meets young people where they are — without shame or jargon
+• Peer mobilisation through CHWs/VHTs who already hold community trust</a:t>
             </a:r>
           </a:p>
         </p:txBody>
@@ -4481,8 +3870,8 @@
         </p:nvSpPr>
         <p:spPr>
           <a:xfrm>
-            <a:off x="0" y="6565392"/>
-            <a:ext cx="12191695" cy="292608"/>
+            <a:off x="0" y="6583680"/>
+            <a:ext cx="12191695" cy="274320"/>
           </a:xfrm>
           <a:prstGeom prst="rect">
             <a:avLst/>
@@ -4493,7 +3882,6 @@
           <a:ln>
             <a:noFill/>
           </a:ln>
-          <a:effectLst/>
         </p:spPr>
         <p:style>
           <a:lnRef idx="1">
@@ -4525,8 +3913,8 @@
         </p:nvSpPr>
         <p:spPr>
           <a:xfrm>
-            <a:off x="365760" y="6574536"/>
-            <a:ext cx="9144000" cy="274320"/>
+            <a:off x="365760" y="6592824"/>
+            <a:ext cx="9144000" cy="256032"/>
           </a:xfrm>
           <a:prstGeom prst="rect">
             <a:avLst/>
@@ -4534,16 +3922,12 @@
           <a:noFill/>
         </p:spPr>
         <p:txBody>
-          <a:bodyPr wrap="square" anchor="ctr">
+          <a:bodyPr wrap="square">
             <a:spAutoFit/>
           </a:bodyPr>
           <a:lstStyle/>
           <a:p>
-            <a:pPr algn="l">
-              <a:spcAft>
-                <a:spcPts val="0"/>
-              </a:spcAft>
-            </a:pPr>
+            <a:pPr algn="l"/>
             <a:r>
               <a:rPr sz="900" b="0" i="0">
                 <a:solidFill>
@@ -4551,7 +3935,7 @@
                 </a:solidFill>
                 <a:latin typeface="Calibri"/>
               </a:rPr>
-              <a:t>FairBanks FCHIP  |  AUDA-NEPAD Youth SRH Ambassadors Initiat  |  Your health, our mission.</a:t>
+              <a:t>FairBanks | AUDA-NEPAD Youth SRH Ambassador | Your health, our mission.</a:t>
             </a:r>
           </a:p>
         </p:txBody>
@@ -4564,8 +3948,8 @@
         </p:nvSpPr>
         <p:spPr>
           <a:xfrm>
-            <a:off x="11094415" y="6574536"/>
-            <a:ext cx="731520" cy="274320"/>
+            <a:off x="11460175" y="6592824"/>
+            <a:ext cx="457200" cy="256032"/>
           </a:xfrm>
           <a:prstGeom prst="rect">
             <a:avLst/>
@@ -4573,16 +3957,12 @@
           <a:noFill/>
         </p:spPr>
         <p:txBody>
-          <a:bodyPr wrap="square" anchor="ctr">
+          <a:bodyPr wrap="square">
             <a:spAutoFit/>
           </a:bodyPr>
           <a:lstStyle/>
           <a:p>
-            <a:pPr algn="r">
-              <a:spcAft>
-                <a:spcPts val="0"/>
-              </a:spcAft>
-            </a:pPr>
+            <a:pPr algn="r"/>
             <a:r>
               <a:rPr sz="900" b="0" i="0">
                 <a:solidFill>
@@ -4622,7 +4002,7 @@
         <p:spPr>
           <a:xfrm>
             <a:off x="0" y="0"/>
-            <a:ext cx="12191695" cy="960120"/>
+            <a:ext cx="12191695" cy="914400"/>
           </a:xfrm>
           <a:prstGeom prst="rect">
             <a:avLst/>
@@ -4633,7 +4013,6 @@
           <a:ln>
             <a:noFill/>
           </a:ln>
-          <a:effectLst/>
         </p:spPr>
         <p:style>
           <a:lnRef idx="1">
@@ -4666,7 +4045,7 @@
         <p:spPr>
           <a:xfrm>
             <a:off x="0" y="0"/>
-            <a:ext cx="164592" cy="960120"/>
+            <a:ext cx="137160" cy="914400"/>
           </a:xfrm>
           <a:prstGeom prst="rect">
             <a:avLst/>
@@ -4677,7 +4056,6 @@
           <a:ln>
             <a:noFill/>
           </a:ln>
-          <a:effectLst/>
         </p:spPr>
         <p:style>
           <a:lnRef idx="1">
@@ -4709,8 +4087,8 @@
         </p:nvSpPr>
         <p:spPr>
           <a:xfrm>
-            <a:off x="457200" y="109728"/>
-            <a:ext cx="10972800" cy="256032"/>
+            <a:off x="411480" y="91440"/>
+            <a:ext cx="10972800" cy="274320"/>
           </a:xfrm>
           <a:prstGeom prst="rect">
             <a:avLst/>
@@ -4718,16 +4096,12 @@
           <a:noFill/>
         </p:spPr>
         <p:txBody>
-          <a:bodyPr wrap="square" anchor="t">
+          <a:bodyPr wrap="square">
             <a:spAutoFit/>
           </a:bodyPr>
           <a:lstStyle/>
           <a:p>
-            <a:pPr algn="l">
-              <a:spcAft>
-                <a:spcPts val="0"/>
-              </a:spcAft>
-            </a:pPr>
+            <a:pPr algn="l"/>
             <a:r>
               <a:rPr sz="1100" b="1" i="0">
                 <a:solidFill>
@@ -4735,7 +4109,7 @@
                 </a:solidFill>
                 <a:latin typeface="Calibri"/>
               </a:rPr>
-              <a:t>THE SOLUTION</a:t>
+              <a:t>MOBILISATION</a:t>
             </a:r>
           </a:p>
         </p:txBody>
@@ -4748,8 +4122,8 @@
         </p:nvSpPr>
         <p:spPr>
           <a:xfrm>
-            <a:off x="457200" y="384048"/>
-            <a:ext cx="11247120" cy="475488"/>
+            <a:off x="411480" y="384048"/>
+            <a:ext cx="10972800" cy="457200"/>
           </a:xfrm>
           <a:prstGeom prst="rect">
             <a:avLst/>
@@ -4757,31 +4131,27 @@
           <a:noFill/>
         </p:spPr>
         <p:txBody>
-          <a:bodyPr wrap="square" anchor="t">
+          <a:bodyPr wrap="square">
             <a:spAutoFit/>
           </a:bodyPr>
           <a:lstStyle/>
           <a:p>
-            <a:pPr algn="l">
-              <a:spcAft>
-                <a:spcPts val="0"/>
-              </a:spcAft>
-            </a:pPr>
-            <a:r>
-              <a:rPr sz="2200" b="1" i="0">
+            <a:pPr algn="l"/>
+            <a:r>
+              <a:rPr sz="2400" b="1" i="0">
                 <a:solidFill>
                   <a:srgbClr val="0A1F2E"/>
                 </a:solidFill>
                 <a:latin typeface="Calibri"/>
               </a:rPr>
-              <a:t>FCHIP — community health intelligence</a:t>
+              <a:t>Kampala communities — dialogue first</a:t>
             </a:r>
           </a:p>
         </p:txBody>
       </p:sp>
       <p:pic>
         <p:nvPicPr>
-          <p:cNvPr id="6" name="Picture 5" descr="data_flow_iso_labeled_opt.jpg"/>
+          <p:cNvPr id="6" name="Picture 5" descr="outreach_audience_discussion_01_opt.jpg"/>
           <p:cNvPicPr>
             <a:picLocks noChangeAspect="1"/>
           </p:cNvPicPr>
@@ -4795,8 +4165,8 @@
         </p:blipFill>
         <p:spPr>
           <a:xfrm>
-            <a:off x="365760" y="1639062"/>
-            <a:ext cx="6400800" cy="4265676"/>
+            <a:off x="411480" y="1783080"/>
+            <a:ext cx="5486400" cy="3657600"/>
           </a:xfrm>
           <a:prstGeom prst="rect">
             <a:avLst/>
@@ -4811,8 +4181,8 @@
         </p:nvSpPr>
         <p:spPr>
           <a:xfrm>
-            <a:off x="7040880" y="1234440"/>
-            <a:ext cx="4754880" cy="5074920"/>
+            <a:off x="6217920" y="1097280"/>
+            <a:ext cx="5486400" cy="5029200"/>
           </a:xfrm>
           <a:prstGeom prst="rect">
             <a:avLst/>
@@ -4825,67 +4195,17 @@
           </a:bodyPr>
           <a:lstStyle/>
           <a:p>
-            <a:pPr>
-              <a:spcAft>
-                <a:spcPts val="800"/>
-              </a:spcAft>
-            </a:pPr>
-            <a:r>
-              <a:rPr sz="1400">
+            <a:pPr algn="l"/>
+            <a:r>
+              <a:rPr sz="1600" b="0" i="0">
                 <a:solidFill>
-                  <a:srgbClr val="1E2F38"/>
+                  <a:srgbClr val="3A4A54"/>
                 </a:solidFill>
                 <a:latin typeface="Calibri"/>
               </a:rPr>
-              <a:t>•  CHWs and VHTs capture structured data at household level</a:t>
-            </a:r>
-          </a:p>
-          <a:p>
-            <a:pPr>
-              <a:spcAft>
-                <a:spcPts val="800"/>
-              </a:spcAft>
-            </a:pPr>
-            <a:r>
-              <a:rPr sz="1400">
-                <a:solidFill>
-                  <a:srgbClr val="1E2F38"/>
-                </a:solidFill>
-                <a:latin typeface="Calibri"/>
-              </a:rPr>
-              <a:t>•  FCHIP applies AI, ML, and GIS to predict risk early</a:t>
-            </a:r>
-          </a:p>
-          <a:p>
-            <a:pPr>
-              <a:spcAft>
-                <a:spcPts val="800"/>
-              </a:spcAft>
-            </a:pPr>
-            <a:r>
-              <a:rPr sz="1400">
-                <a:solidFill>
-                  <a:srgbClr val="1E2F38"/>
-                </a:solidFill>
-                <a:latin typeface="Calibri"/>
-              </a:rPr>
-              <a:t>•  Alerts reach clinics, districts, and partners in time to act</a:t>
-            </a:r>
-          </a:p>
-          <a:p>
-            <a:pPr>
-              <a:spcAft>
-                <a:spcPts val="800"/>
-              </a:spcAft>
-            </a:pPr>
-            <a:r>
-              <a:rPr sz="1400">
-                <a:solidFill>
-                  <a:srgbClr val="1E2F38"/>
-                </a:solidFill>
-                <a:latin typeface="Calibri"/>
-              </a:rPr>
-              <a:t>•  Built on a live medical centre and community programmes</a:t>
+              <a:t>Bukoto · Kyebando · Kisaasi · Kamwokya · Kikaaya
+CHWs translate SRH into trusted local action
+Digital + in-person — no shame, no jargon</a:t>
             </a:r>
           </a:p>
         </p:txBody>
@@ -4898,8 +4218,8 @@
         </p:nvSpPr>
         <p:spPr>
           <a:xfrm>
-            <a:off x="0" y="6565392"/>
-            <a:ext cx="12191695" cy="292608"/>
+            <a:off x="0" y="6583680"/>
+            <a:ext cx="12191695" cy="274320"/>
           </a:xfrm>
           <a:prstGeom prst="rect">
             <a:avLst/>
@@ -4910,7 +4230,6 @@
           <a:ln>
             <a:noFill/>
           </a:ln>
-          <a:effectLst/>
         </p:spPr>
         <p:style>
           <a:lnRef idx="1">
@@ -4942,8 +4261,8 @@
         </p:nvSpPr>
         <p:spPr>
           <a:xfrm>
-            <a:off x="365760" y="6574536"/>
-            <a:ext cx="9144000" cy="274320"/>
+            <a:off x="365760" y="6592824"/>
+            <a:ext cx="9144000" cy="256032"/>
           </a:xfrm>
           <a:prstGeom prst="rect">
             <a:avLst/>
@@ -4951,16 +4270,12 @@
           <a:noFill/>
         </p:spPr>
         <p:txBody>
-          <a:bodyPr wrap="square" anchor="ctr">
+          <a:bodyPr wrap="square">
             <a:spAutoFit/>
           </a:bodyPr>
           <a:lstStyle/>
           <a:p>
-            <a:pPr algn="l">
-              <a:spcAft>
-                <a:spcPts val="0"/>
-              </a:spcAft>
-            </a:pPr>
+            <a:pPr algn="l"/>
             <a:r>
               <a:rPr sz="900" b="0" i="0">
                 <a:solidFill>
@@ -4968,7 +4283,7 @@
                 </a:solidFill>
                 <a:latin typeface="Calibri"/>
               </a:rPr>
-              <a:t>FairBanks FCHIP  |  AUDA-NEPAD Youth SRH Ambassadors Initiat  |  Your health, our mission.</a:t>
+              <a:t>FairBanks | AUDA-NEPAD Youth SRH Ambassador | Your health, our mission.</a:t>
             </a:r>
           </a:p>
         </p:txBody>
@@ -4981,8 +4296,8 @@
         </p:nvSpPr>
         <p:spPr>
           <a:xfrm>
-            <a:off x="11094415" y="6574536"/>
-            <a:ext cx="731520" cy="274320"/>
+            <a:off x="11460175" y="6592824"/>
+            <a:ext cx="457200" cy="256032"/>
           </a:xfrm>
           <a:prstGeom prst="rect">
             <a:avLst/>
@@ -4990,16 +4305,12 @@
           <a:noFill/>
         </p:spPr>
         <p:txBody>
-          <a:bodyPr wrap="square" anchor="ctr">
+          <a:bodyPr wrap="square">
             <a:spAutoFit/>
           </a:bodyPr>
           <a:lstStyle/>
           <a:p>
-            <a:pPr algn="r">
-              <a:spcAft>
-                <a:spcPts val="0"/>
-              </a:spcAft>
-            </a:pPr>
+            <a:pPr algn="r"/>
             <a:r>
               <a:rPr sz="900" b="0" i="0">
                 <a:solidFill>
@@ -5039,7 +4350,7 @@
         <p:spPr>
           <a:xfrm>
             <a:off x="0" y="0"/>
-            <a:ext cx="12191695" cy="960120"/>
+            <a:ext cx="12191695" cy="914400"/>
           </a:xfrm>
           <a:prstGeom prst="rect">
             <a:avLst/>
@@ -5050,7 +4361,6 @@
           <a:ln>
             <a:noFill/>
           </a:ln>
-          <a:effectLst/>
         </p:spPr>
         <p:style>
           <a:lnRef idx="1">
@@ -5083,7 +4393,7 @@
         <p:spPr>
           <a:xfrm>
             <a:off x="0" y="0"/>
-            <a:ext cx="164592" cy="960120"/>
+            <a:ext cx="137160" cy="914400"/>
           </a:xfrm>
           <a:prstGeom prst="rect">
             <a:avLst/>
@@ -5094,7 +4404,6 @@
           <a:ln>
             <a:noFill/>
           </a:ln>
-          <a:effectLst/>
         </p:spPr>
         <p:style>
           <a:lnRef idx="1">
@@ -5126,8 +4435,8 @@
         </p:nvSpPr>
         <p:spPr>
           <a:xfrm>
-            <a:off x="457200" y="109728"/>
-            <a:ext cx="10972800" cy="256032"/>
+            <a:off x="411480" y="91440"/>
+            <a:ext cx="10972800" cy="274320"/>
           </a:xfrm>
           <a:prstGeom prst="rect">
             <a:avLst/>
@@ -5135,16 +4444,12 @@
           <a:noFill/>
         </p:spPr>
         <p:txBody>
-          <a:bodyPr wrap="square" anchor="t">
+          <a:bodyPr wrap="square">
             <a:spAutoFit/>
           </a:bodyPr>
           <a:lstStyle/>
           <a:p>
-            <a:pPr algn="l">
-              <a:spcAft>
-                <a:spcPts val="0"/>
-              </a:spcAft>
-            </a:pPr>
+            <a:pPr algn="l"/>
             <a:r>
               <a:rPr sz="1100" b="1" i="0">
                 <a:solidFill>
@@ -5152,7 +4457,7 @@
                 </a:solidFill>
                 <a:latin typeface="Calibri"/>
               </a:rPr>
-              <a:t>PROGRAMME FIT</a:t>
+              <a:t>ALIGNMENT</a:t>
             </a:r>
           </a:p>
         </p:txBody>
@@ -5165,8 +4470,8 @@
         </p:nvSpPr>
         <p:spPr>
           <a:xfrm>
-            <a:off x="457200" y="384048"/>
-            <a:ext cx="11247120" cy="475488"/>
+            <a:off x="411480" y="384048"/>
+            <a:ext cx="10972800" cy="457200"/>
           </a:xfrm>
           <a:prstGeom prst="rect">
             <a:avLst/>
@@ -5174,24 +4479,20 @@
           <a:noFill/>
         </p:spPr>
         <p:txBody>
-          <a:bodyPr wrap="square" anchor="t">
+          <a:bodyPr wrap="square">
             <a:spAutoFit/>
           </a:bodyPr>
           <a:lstStyle/>
           <a:p>
-            <a:pPr algn="l">
-              <a:spcAft>
-                <a:spcPts val="0"/>
-              </a:spcAft>
-            </a:pPr>
-            <a:r>
-              <a:rPr sz="2200" b="1" i="0">
+            <a:pPr algn="l"/>
+            <a:r>
+              <a:rPr sz="2400" b="1" i="0">
                 <a:solidFill>
                   <a:srgbClr val="0A1F2E"/>
                 </a:solidFill>
                 <a:latin typeface="Calibri"/>
               </a:rPr>
-              <a:t>Why this call matches FCHIP</a:t>
+              <a:t>Energize Africa · Agenda 2063 Goal 18</a:t>
             </a:r>
           </a:p>
         </p:txBody>
@@ -5204,8 +4505,8 @@
         </p:nvSpPr>
         <p:spPr>
           <a:xfrm>
-            <a:off x="411480" y="1188720"/>
-            <a:ext cx="11338560" cy="1223010"/>
+            <a:off x="457200" y="1143000"/>
+            <a:ext cx="11155680" cy="914400"/>
           </a:xfrm>
           <a:prstGeom prst="rect">
             <a:avLst/>
@@ -5213,12 +4514,11 @@
           <a:solidFill>
             <a:srgbClr val="FFFFFF"/>
           </a:solidFill>
-          <a:ln w="9525">
+          <a:ln>
             <a:solidFill>
               <a:srgbClr val="D0DCDC"/>
             </a:solidFill>
           </a:ln>
-          <a:effectLst/>
         </p:spPr>
         <p:style>
           <a:lnRef idx="1">
@@ -5250,8 +4550,8 @@
         </p:nvSpPr>
         <p:spPr>
           <a:xfrm>
-            <a:off x="594360" y="1252728"/>
-            <a:ext cx="2926080" cy="1085850"/>
+            <a:off x="685800" y="1325880"/>
+            <a:ext cx="10515600" cy="548640"/>
           </a:xfrm>
           <a:prstGeom prst="rect">
             <a:avLst/>
@@ -5259,77 +4559,34 @@
           <a:noFill/>
         </p:spPr>
         <p:txBody>
-          <a:bodyPr wrap="square" anchor="ctr">
+          <a:bodyPr wrap="square">
             <a:spAutoFit/>
           </a:bodyPr>
           <a:lstStyle/>
           <a:p>
-            <a:pPr algn="l">
-              <a:spcAft>
-                <a:spcPts val="0"/>
-              </a:spcAft>
-            </a:pPr>
-            <a:r>
-              <a:rPr sz="1300" b="1" i="0">
+            <a:pPr algn="l"/>
+            <a:r>
+              <a:rPr sz="1500" b="0" i="0">
                 <a:solidFill>
-                  <a:srgbClr val="0D6E6E"/>
+                  <a:srgbClr val="1E2F38"/>
                 </a:solidFill>
                 <a:latin typeface="Calibri"/>
               </a:rPr>
-              <a:t>Ages 18–35, AU citizens</a:t>
-            </a:r>
-          </a:p>
-        </p:txBody>
-      </p:sp>
-      <p:sp>
-        <p:nvSpPr>
-          <p:cNvPr id="8" name="TextBox 7"/>
-          <p:cNvSpPr txBox="1"/>
-          <p:nvPr/>
-        </p:nvSpPr>
-        <p:spPr>
-          <a:xfrm>
-            <a:off x="3657600" y="1252728"/>
-            <a:ext cx="7772400" cy="1085850"/>
-          </a:xfrm>
-          <a:prstGeom prst="rect">
-            <a:avLst/>
-          </a:prstGeom>
-          <a:noFill/>
-        </p:spPr>
-        <p:txBody>
-          <a:bodyPr wrap="square" anchor="ctr">
-            <a:spAutoFit/>
-          </a:bodyPr>
-          <a:lstStyle/>
-          <a:p>
-            <a:pPr algn="l">
-              <a:spcAft>
-                <a:spcPts val="0"/>
-              </a:spcAft>
-            </a:pPr>
-            <a:r>
-              <a:rPr sz="1200" b="0" i="0">
-                <a:solidFill>
-                  <a:srgbClr val="3A4A54"/>
-                </a:solidFill>
-                <a:latin typeface="Calibri"/>
-              </a:rPr>
-              <a:t>Ugandan youth applicants in range</a:t>
-            </a:r>
-          </a:p>
-        </p:txBody>
-      </p:sp>
-      <p:sp>
-        <p:nvSpPr>
-          <p:cNvPr id="9" name="Rectangle 8"/>
+              <a:t>Youth as co-creators — not passive beneficiaries — in SRH programming</a:t>
+            </a:r>
+          </a:p>
+        </p:txBody>
+      </p:sp>
+      <p:sp>
+        <p:nvSpPr>
+          <p:cNvPr id="8" name="Rectangle 7"/>
           <p:cNvSpPr/>
           <p:nvPr/>
         </p:nvSpPr>
         <p:spPr>
           <a:xfrm>
-            <a:off x="411480" y="2503170"/>
-            <a:ext cx="11338560" cy="1223010"/>
+            <a:off x="457200" y="2194560"/>
+            <a:ext cx="11155680" cy="914400"/>
           </a:xfrm>
           <a:prstGeom prst="rect">
             <a:avLst/>
@@ -5337,12 +4594,11 @@
           <a:solidFill>
             <a:srgbClr val="FFFFFF"/>
           </a:solidFill>
-          <a:ln w="9525">
+          <a:ln>
             <a:solidFill>
               <a:srgbClr val="D0DCDC"/>
             </a:solidFill>
           </a:ln>
-          <a:effectLst/>
         </p:spPr>
         <p:style>
           <a:lnRef idx="1">
@@ -5368,14 +4624,14 @@
       </p:sp>
       <p:sp>
         <p:nvSpPr>
-          <p:cNvPr id="10" name="TextBox 9"/>
+          <p:cNvPr id="9" name="TextBox 8"/>
           <p:cNvSpPr txBox="1"/>
           <p:nvPr/>
         </p:nvSpPr>
         <p:spPr>
           <a:xfrm>
-            <a:off x="594360" y="2567178"/>
-            <a:ext cx="2926080" cy="1085850"/>
+            <a:off x="685800" y="2377440"/>
+            <a:ext cx="10515600" cy="548640"/>
           </a:xfrm>
           <a:prstGeom prst="rect">
             <a:avLst/>
@@ -5383,77 +4639,34 @@
           <a:noFill/>
         </p:spPr>
         <p:txBody>
-          <a:bodyPr wrap="square" anchor="ctr">
+          <a:bodyPr wrap="square">
             <a:spAutoFit/>
           </a:bodyPr>
           <a:lstStyle/>
           <a:p>
-            <a:pPr algn="l">
-              <a:spcAft>
-                <a:spcPts val="0"/>
-              </a:spcAft>
-            </a:pPr>
-            <a:r>
-              <a:rPr sz="1300" b="1" i="0">
+            <a:pPr algn="l"/>
+            <a:r>
+              <a:rPr sz="1500" b="0" i="0">
                 <a:solidFill>
-                  <a:srgbClr val="0D6E6E"/>
+                  <a:srgbClr val="1E2F38"/>
                 </a:solidFill>
                 <a:latin typeface="Calibri"/>
               </a:rPr>
-              <a:t>SRH commitment</a:t>
-            </a:r>
-          </a:p>
-        </p:txBody>
-      </p:sp>
-      <p:sp>
-        <p:nvSpPr>
-          <p:cNvPr id="11" name="TextBox 10"/>
-          <p:cNvSpPr txBox="1"/>
-          <p:nvPr/>
-        </p:nvSpPr>
-        <p:spPr>
-          <a:xfrm>
-            <a:off x="3657600" y="2567178"/>
-            <a:ext cx="7772400" cy="1085850"/>
-          </a:xfrm>
-          <a:prstGeom prst="rect">
-            <a:avLst/>
-          </a:prstGeom>
-          <a:noFill/>
-        </p:spPr>
-        <p:txBody>
-          <a:bodyPr wrap="square" anchor="ctr">
-            <a:spAutoFit/>
-          </a:bodyPr>
-          <a:lstStyle/>
-          <a:p>
-            <a:pPr algn="l">
-              <a:spcAft>
-                <a:spcPts val="0"/>
-              </a:spcAft>
-            </a:pPr>
-            <a:r>
-              <a:rPr sz="1200" b="0" i="0">
-                <a:solidFill>
-                  <a:srgbClr val="3A4A54"/>
-                </a:solidFill>
-                <a:latin typeface="Calibri"/>
-              </a:rPr>
-              <a:t>Active in maternal / adolescent community health work</a:t>
-            </a:r>
-          </a:p>
-        </p:txBody>
-      </p:sp>
-      <p:sp>
-        <p:nvSpPr>
-          <p:cNvPr id="12" name="Rectangle 11"/>
+              <a:t>Grassroots realities from Kampala communities informing continental advocacy</a:t>
+            </a:r>
+          </a:p>
+        </p:txBody>
+      </p:sp>
+      <p:sp>
+        <p:nvSpPr>
+          <p:cNvPr id="10" name="Rectangle 9"/>
           <p:cNvSpPr/>
           <p:nvPr/>
         </p:nvSpPr>
         <p:spPr>
           <a:xfrm>
-            <a:off x="411480" y="3817620"/>
-            <a:ext cx="11338560" cy="1223010"/>
+            <a:off x="457200" y="3246120"/>
+            <a:ext cx="11155680" cy="914400"/>
           </a:xfrm>
           <a:prstGeom prst="rect">
             <a:avLst/>
@@ -5461,12 +4674,11 @@
           <a:solidFill>
             <a:srgbClr val="FFFFFF"/>
           </a:solidFill>
-          <a:ln w="9525">
+          <a:ln>
             <a:solidFill>
               <a:srgbClr val="D0DCDC"/>
             </a:solidFill>
           </a:ln>
-          <a:effectLst/>
         </p:spPr>
         <p:style>
           <a:lnRef idx="1">
@@ -5492,14 +4704,14 @@
       </p:sp>
       <p:sp>
         <p:nvSpPr>
-          <p:cNvPr id="13" name="TextBox 12"/>
+          <p:cNvPr id="11" name="TextBox 10"/>
           <p:cNvSpPr txBox="1"/>
           <p:nvPr/>
         </p:nvSpPr>
         <p:spPr>
           <a:xfrm>
-            <a:off x="594360" y="3881628"/>
-            <a:ext cx="2926080" cy="1085850"/>
+            <a:off x="685800" y="3429000"/>
+            <a:ext cx="10515600" cy="548640"/>
           </a:xfrm>
           <a:prstGeom prst="rect">
             <a:avLst/>
@@ -5507,77 +4719,34 @@
           <a:noFill/>
         </p:spPr>
         <p:txBody>
-          <a:bodyPr wrap="square" anchor="ctr">
+          <a:bodyPr wrap="square">
             <a:spAutoFit/>
           </a:bodyPr>
           <a:lstStyle/>
           <a:p>
-            <a:pPr algn="l">
-              <a:spcAft>
-                <a:spcPts val="0"/>
-              </a:spcAft>
-            </a:pPr>
-            <a:r>
-              <a:rPr sz="1300" b="1" i="0">
+            <a:pPr algn="l"/>
+            <a:r>
+              <a:rPr sz="1500" b="0" i="0">
                 <a:solidFill>
-                  <a:srgbClr val="0D6E6E"/>
+                  <a:srgbClr val="1E2F38"/>
                 </a:solidFill>
                 <a:latin typeface="Calibri"/>
               </a:rPr>
-              <a:t>Digital presence</a:t>
-            </a:r>
-          </a:p>
-        </p:txBody>
-      </p:sp>
-      <p:sp>
-        <p:nvSpPr>
-          <p:cNvPr id="14" name="TextBox 13"/>
-          <p:cNvSpPr txBox="1"/>
-          <p:nvPr/>
-        </p:nvSpPr>
-        <p:spPr>
-          <a:xfrm>
-            <a:off x="3657600" y="3881628"/>
-            <a:ext cx="7772400" cy="1085850"/>
-          </a:xfrm>
-          <a:prstGeom prst="rect">
-            <a:avLst/>
-          </a:prstGeom>
-          <a:noFill/>
-        </p:spPr>
-        <p:txBody>
-          <a:bodyPr wrap="square" anchor="ctr">
-            <a:spAutoFit/>
-          </a:bodyPr>
-          <a:lstStyle/>
-          <a:p>
-            <a:pPr algn="l">
-              <a:spcAft>
-                <a:spcPts val="0"/>
-              </a:spcAft>
-            </a:pPr>
-            <a:r>
-              <a:rPr sz="1200" b="0" i="0">
-                <a:solidFill>
-                  <a:srgbClr val="3A4A54"/>
-                </a:solidFill>
-                <a:latin typeface="Calibri"/>
-              </a:rPr>
-              <a:t>Team can maintain responsible advocacy channels</a:t>
-            </a:r>
-          </a:p>
-        </p:txBody>
-      </p:sp>
-      <p:sp>
-        <p:nvSpPr>
-          <p:cNvPr id="15" name="Rectangle 14"/>
+              <a:t>Linking SRH to livelihoods, education, and the demographic dividend</a:t>
+            </a:r>
+          </a:p>
+        </p:txBody>
+      </p:sp>
+      <p:sp>
+        <p:nvSpPr>
+          <p:cNvPr id="12" name="Rectangle 11"/>
           <p:cNvSpPr/>
           <p:nvPr/>
         </p:nvSpPr>
         <p:spPr>
           <a:xfrm>
-            <a:off x="411480" y="5132070"/>
-            <a:ext cx="11338560" cy="1223010"/>
+            <a:off x="457200" y="4297680"/>
+            <a:ext cx="11155680" cy="914400"/>
           </a:xfrm>
           <a:prstGeom prst="rect">
             <a:avLst/>
@@ -5585,12 +4754,11 @@
           <a:solidFill>
             <a:srgbClr val="FFFFFF"/>
           </a:solidFill>
-          <a:ln w="9525">
+          <a:ln>
             <a:solidFill>
               <a:srgbClr val="D0DCDC"/>
             </a:solidFill>
           </a:ln>
-          <a:effectLst/>
         </p:spPr>
         <p:style>
           <a:lnRef idx="1">
@@ -5616,14 +4784,14 @@
       </p:sp>
       <p:sp>
         <p:nvSpPr>
-          <p:cNvPr id="16" name="TextBox 15"/>
+          <p:cNvPr id="13" name="TextBox 12"/>
           <p:cNvSpPr txBox="1"/>
           <p:nvPr/>
         </p:nvSpPr>
         <p:spPr>
           <a:xfrm>
-            <a:off x="594360" y="5196078"/>
-            <a:ext cx="2926080" cy="1085850"/>
+            <a:off x="685800" y="4480560"/>
+            <a:ext cx="10515600" cy="548640"/>
           </a:xfrm>
           <a:prstGeom prst="rect">
             <a:avLst/>
@@ -5631,77 +4799,34 @@
           <a:noFill/>
         </p:spPr>
         <p:txBody>
-          <a:bodyPr wrap="square" anchor="ctr">
+          <a:bodyPr wrap="square">
             <a:spAutoFit/>
           </a:bodyPr>
           <a:lstStyle/>
           <a:p>
-            <a:pPr algn="l">
-              <a:spcAft>
-                <a:spcPts val="0"/>
-              </a:spcAft>
-            </a:pPr>
-            <a:r>
-              <a:rPr sz="1300" b="1" i="0">
+            <a:pPr algn="l"/>
+            <a:r>
+              <a:rPr sz="1500" b="0" i="0">
                 <a:solidFill>
-                  <a:srgbClr val="0D6E6E"/>
+                  <a:srgbClr val="1E2F38"/>
                 </a:solidFill>
                 <a:latin typeface="Calibri"/>
               </a:rPr>
-              <a:t>Voluntary service</a:t>
-            </a:r>
-          </a:p>
-        </p:txBody>
-      </p:sp>
-      <p:sp>
-        <p:nvSpPr>
-          <p:cNvPr id="17" name="TextBox 16"/>
-          <p:cNvSpPr txBox="1"/>
-          <p:nvPr/>
-        </p:nvSpPr>
-        <p:spPr>
-          <a:xfrm>
-            <a:off x="3657600" y="5196078"/>
-            <a:ext cx="7772400" cy="1085850"/>
-          </a:xfrm>
-          <a:prstGeom prst="rect">
-            <a:avLst/>
-          </a:prstGeom>
-          <a:noFill/>
-        </p:spPr>
-        <p:txBody>
-          <a:bodyPr wrap="square" anchor="ctr">
-            <a:spAutoFit/>
-          </a:bodyPr>
-          <a:lstStyle/>
-          <a:p>
-            <a:pPr algn="l">
-              <a:spcAft>
-                <a:spcPts val="0"/>
-              </a:spcAft>
-            </a:pPr>
-            <a:r>
-              <a:rPr sz="1200" b="0" i="0">
-                <a:solidFill>
-                  <a:srgbClr val="3A4A54"/>
-                </a:solidFill>
-                <a:latin typeface="Calibri"/>
-              </a:rPr>
-              <a:t>Clear understanding: recognition and training, not a salary</a:t>
-            </a:r>
-          </a:p>
-        </p:txBody>
-      </p:sp>
-      <p:sp>
-        <p:nvSpPr>
-          <p:cNvPr id="18" name="Rectangle 17"/>
+              <a:t>Amplifying AUDA-NEPAD frameworks through lived FairBanks field experience</a:t>
+            </a:r>
+          </a:p>
+        </p:txBody>
+      </p:sp>
+      <p:sp>
+        <p:nvSpPr>
+          <p:cNvPr id="14" name="Rectangle 13"/>
           <p:cNvSpPr/>
           <p:nvPr/>
         </p:nvSpPr>
         <p:spPr>
           <a:xfrm>
-            <a:off x="0" y="6565392"/>
-            <a:ext cx="12191695" cy="292608"/>
+            <a:off x="0" y="6583680"/>
+            <a:ext cx="12191695" cy="274320"/>
           </a:xfrm>
           <a:prstGeom prst="rect">
             <a:avLst/>
@@ -5712,7 +4837,6 @@
           <a:ln>
             <a:noFill/>
           </a:ln>
-          <a:effectLst/>
         </p:spPr>
         <p:style>
           <a:lnRef idx="1">
@@ -5738,14 +4862,14 @@
       </p:sp>
       <p:sp>
         <p:nvSpPr>
-          <p:cNvPr id="19" name="TextBox 18"/>
+          <p:cNvPr id="15" name="TextBox 14"/>
           <p:cNvSpPr txBox="1"/>
           <p:nvPr/>
         </p:nvSpPr>
         <p:spPr>
           <a:xfrm>
-            <a:off x="365760" y="6574536"/>
-            <a:ext cx="9144000" cy="274320"/>
+            <a:off x="365760" y="6592824"/>
+            <a:ext cx="9144000" cy="256032"/>
           </a:xfrm>
           <a:prstGeom prst="rect">
             <a:avLst/>
@@ -5753,16 +4877,12 @@
           <a:noFill/>
         </p:spPr>
         <p:txBody>
-          <a:bodyPr wrap="square" anchor="ctr">
+          <a:bodyPr wrap="square">
             <a:spAutoFit/>
           </a:bodyPr>
           <a:lstStyle/>
           <a:p>
-            <a:pPr algn="l">
-              <a:spcAft>
-                <a:spcPts val="0"/>
-              </a:spcAft>
-            </a:pPr>
+            <a:pPr algn="l"/>
             <a:r>
               <a:rPr sz="900" b="0" i="0">
                 <a:solidFill>
@@ -5770,21 +4890,21 @@
                 </a:solidFill>
                 <a:latin typeface="Calibri"/>
               </a:rPr>
-              <a:t>FairBanks FCHIP  |  AUDA-NEPAD Youth SRH Ambassadors Initiat  |  Your health, our mission.</a:t>
-            </a:r>
-          </a:p>
-        </p:txBody>
-      </p:sp>
-      <p:sp>
-        <p:nvSpPr>
-          <p:cNvPr id="20" name="TextBox 19"/>
+              <a:t>FairBanks | AUDA-NEPAD Youth SRH Ambassador | Your health, our mission.</a:t>
+            </a:r>
+          </a:p>
+        </p:txBody>
+      </p:sp>
+      <p:sp>
+        <p:nvSpPr>
+          <p:cNvPr id="16" name="TextBox 15"/>
           <p:cNvSpPr txBox="1"/>
           <p:nvPr/>
         </p:nvSpPr>
         <p:spPr>
           <a:xfrm>
-            <a:off x="11094415" y="6574536"/>
-            <a:ext cx="731520" cy="274320"/>
+            <a:off x="11460175" y="6592824"/>
+            <a:ext cx="457200" cy="256032"/>
           </a:xfrm>
           <a:prstGeom prst="rect">
             <a:avLst/>
@@ -5792,16 +4912,12 @@
           <a:noFill/>
         </p:spPr>
         <p:txBody>
-          <a:bodyPr wrap="square" anchor="ctr">
+          <a:bodyPr wrap="square">
             <a:spAutoFit/>
           </a:bodyPr>
           <a:lstStyle/>
           <a:p>
-            <a:pPr algn="r">
-              <a:spcAft>
-                <a:spcPts val="0"/>
-              </a:spcAft>
-            </a:pPr>
+            <a:pPr algn="r"/>
             <a:r>
               <a:rPr sz="900" b="0" i="0">
                 <a:solidFill>
@@ -5841,7 +4957,7 @@
         <p:spPr>
           <a:xfrm>
             <a:off x="0" y="0"/>
-            <a:ext cx="12191695" cy="960120"/>
+            <a:ext cx="12191695" cy="914400"/>
           </a:xfrm>
           <a:prstGeom prst="rect">
             <a:avLst/>
@@ -5852,7 +4968,6 @@
           <a:ln>
             <a:noFill/>
           </a:ln>
-          <a:effectLst/>
         </p:spPr>
         <p:style>
           <a:lnRef idx="1">
@@ -5885,7 +5000,7 @@
         <p:spPr>
           <a:xfrm>
             <a:off x="0" y="0"/>
-            <a:ext cx="164592" cy="960120"/>
+            <a:ext cx="137160" cy="914400"/>
           </a:xfrm>
           <a:prstGeom prst="rect">
             <a:avLst/>
@@ -5896,7 +5011,6 @@
           <a:ln>
             <a:noFill/>
           </a:ln>
-          <a:effectLst/>
         </p:spPr>
         <p:style>
           <a:lnRef idx="1">
@@ -5928,8 +5042,8 @@
         </p:nvSpPr>
         <p:spPr>
           <a:xfrm>
-            <a:off x="457200" y="109728"/>
-            <a:ext cx="10972800" cy="256032"/>
+            <a:off x="411480" y="91440"/>
+            <a:ext cx="10972800" cy="274320"/>
           </a:xfrm>
           <a:prstGeom prst="rect">
             <a:avLst/>
@@ -5937,16 +5051,12 @@
           <a:noFill/>
         </p:spPr>
         <p:txBody>
-          <a:bodyPr wrap="square" anchor="t">
+          <a:bodyPr wrap="square">
             <a:spAutoFit/>
           </a:bodyPr>
           <a:lstStyle/>
           <a:p>
-            <a:pPr algn="l">
-              <a:spcAft>
-                <a:spcPts val="0"/>
-              </a:spcAft>
-            </a:pPr>
+            <a:pPr algn="l"/>
             <a:r>
               <a:rPr sz="1100" b="1" i="0">
                 <a:solidFill>
@@ -5954,7 +5064,7 @@
                 </a:solidFill>
                 <a:latin typeface="Calibri"/>
               </a:rPr>
-              <a:t>WHY FAIRBANKS</a:t>
+              <a:t>IF SELECTED</a:t>
             </a:r>
           </a:p>
         </p:txBody>
@@ -5967,8 +5077,8 @@
         </p:nvSpPr>
         <p:spPr>
           <a:xfrm>
-            <a:off x="457200" y="384048"/>
-            <a:ext cx="11247120" cy="475488"/>
+            <a:off x="411480" y="384048"/>
+            <a:ext cx="10972800" cy="457200"/>
           </a:xfrm>
           <a:prstGeom prst="rect">
             <a:avLst/>
@@ -5976,31 +5086,27 @@
           <a:noFill/>
         </p:spPr>
         <p:txBody>
-          <a:bodyPr wrap="square" anchor="t">
+          <a:bodyPr wrap="square">
             <a:spAutoFit/>
           </a:bodyPr>
           <a:lstStyle/>
           <a:p>
-            <a:pPr algn="l">
-              <a:spcAft>
-                <a:spcPts val="0"/>
-              </a:spcAft>
-            </a:pPr>
-            <a:r>
-              <a:rPr sz="2200" b="1" i="0">
+            <a:pPr algn="l"/>
+            <a:r>
+              <a:rPr sz="2400" b="1" i="0">
                 <a:solidFill>
                   <a:srgbClr val="0A1F2E"/>
                 </a:solidFill>
                 <a:latin typeface="Calibri"/>
               </a:rPr>
-              <a:t>A live community health ecosystem</a:t>
+              <a:t>Ambassador commitments</a:t>
             </a:r>
           </a:p>
         </p:txBody>
       </p:sp>
       <p:pic>
         <p:nvPicPr>
-          <p:cNvPr id="6" name="Picture 5" descr="outreach_facilitator_canopy_01_opt.jpg"/>
+          <p:cNvPr id="6" name="Picture 5" descr="outreach_mobile_phone_demo_01_opt.jpg"/>
           <p:cNvPicPr>
             <a:picLocks noChangeAspect="1"/>
           </p:cNvPicPr>
@@ -6014,8 +5120,8 @@
         </p:blipFill>
         <p:spPr>
           <a:xfrm>
-            <a:off x="411480" y="1943753"/>
-            <a:ext cx="5486400" cy="3656293"/>
+            <a:off x="411480" y="2026920"/>
+            <a:ext cx="4754880" cy="3169920"/>
           </a:xfrm>
           <a:prstGeom prst="rect">
             <a:avLst/>
@@ -6030,8 +5136,8 @@
         </p:nvSpPr>
         <p:spPr>
           <a:xfrm>
-            <a:off x="6217920" y="1234440"/>
-            <a:ext cx="5486400" cy="5074920"/>
+            <a:off x="5486400" y="1097280"/>
+            <a:ext cx="6217920" cy="5029200"/>
           </a:xfrm>
           <a:prstGeom prst="rect">
             <a:avLst/>
@@ -6044,99 +5150,18 @@
           </a:bodyPr>
           <a:lstStyle/>
           <a:p>
-            <a:pPr>
-              <a:spcAft>
-                <a:spcPts val="800"/>
-              </a:spcAft>
-            </a:pPr>
-            <a:r>
-              <a:rPr sz="1400">
+            <a:pPr algn="l"/>
+            <a:r>
+              <a:rPr sz="1400" b="0" i="0">
                 <a:solidFill>
                   <a:srgbClr val="1E2F38"/>
                 </a:solidFill>
                 <a:latin typeface="Calibri"/>
               </a:rPr>
-              <a:t>•  Functioning FairBanks Medical Centre with clinic, pharmacy, and diagnostics</a:t>
-            </a:r>
-          </a:p>
-          <a:p>
-            <a:pPr>
-              <a:spcAft>
-                <a:spcPts val="800"/>
-              </a:spcAft>
-            </a:pPr>
-            <a:r>
-              <a:rPr sz="1400">
-                <a:solidFill>
-                  <a:srgbClr val="1E2F38"/>
-                </a:solidFill>
-                <a:latin typeface="Calibri"/>
-              </a:rPr>
-              <a:t>•  Active Community Reach outreach in Bukoto, Kyebando, Kisaasi, Kamwokya, Kikaaya</a:t>
-            </a:r>
-          </a:p>
-          <a:p>
-            <a:pPr>
-              <a:spcAft>
-                <a:spcPts val="800"/>
-              </a:spcAft>
-            </a:pPr>
-            <a:r>
-              <a:rPr sz="1400">
-                <a:solidFill>
-                  <a:srgbClr val="1E2F38"/>
-                </a:solidFill>
-                <a:latin typeface="Calibri"/>
-              </a:rPr>
-              <a:t>•  Trusted CHW and VHT relationships for household visits and referrals</a:t>
-            </a:r>
-          </a:p>
-          <a:p>
-            <a:pPr>
-              <a:spcAft>
-                <a:spcPts val="800"/>
-              </a:spcAft>
-            </a:pPr>
-            <a:r>
-              <a:rPr sz="1400">
-                <a:solidFill>
-                  <a:srgbClr val="1E2F38"/>
-                </a:solidFill>
-                <a:latin typeface="Calibri"/>
-              </a:rPr>
-              <a:t>•  Live programmes: maternal &amp; child health, Gericare, chronic-disease screening</a:t>
-            </a:r>
-          </a:p>
-          <a:p>
-            <a:pPr>
-              <a:spcAft>
-                <a:spcPts val="800"/>
-              </a:spcAft>
-            </a:pPr>
-            <a:r>
-              <a:rPr sz="1400">
-                <a:solidFill>
-                  <a:srgbClr val="1E2F38"/>
-                </a:solidFill>
-                <a:latin typeface="Calibri"/>
-              </a:rPr>
-              <a:t>•  Digital health records and outreach data ready to feed FCHIP</a:t>
-            </a:r>
-          </a:p>
-          <a:p>
-            <a:pPr>
-              <a:spcAft>
-                <a:spcPts val="800"/>
-              </a:spcAft>
-            </a:pPr>
-            <a:r>
-              <a:rPr sz="1400">
-                <a:solidFill>
-                  <a:srgbClr val="1E2F38"/>
-                </a:solidFill>
-                <a:latin typeface="Calibri"/>
-              </a:rPr>
-              <a:t>•  Research and partnership mindset for ethical, evidence-based scale</a:t>
+              <a:t>• Monthly advocacy content tied to outreach calendars and adolescent/maternal programmes
+• Report anonymised community insights upward — what youth actually ask in the field
+• Support A2DSRH and Energize Africa messaging with honest, local-language examples
+• Mentor younger peer advocates through FairBanks Community Reach volunteer pathways</a:t>
             </a:r>
           </a:p>
         </p:txBody>
@@ -6149,8 +5174,8 @@
         </p:nvSpPr>
         <p:spPr>
           <a:xfrm>
-            <a:off x="0" y="6565392"/>
-            <a:ext cx="12191695" cy="292608"/>
+            <a:off x="0" y="6583680"/>
+            <a:ext cx="12191695" cy="274320"/>
           </a:xfrm>
           <a:prstGeom prst="rect">
             <a:avLst/>
@@ -6161,7 +5186,6 @@
           <a:ln>
             <a:noFill/>
           </a:ln>
-          <a:effectLst/>
         </p:spPr>
         <p:style>
           <a:lnRef idx="1">
@@ -6193,8 +5217,8 @@
         </p:nvSpPr>
         <p:spPr>
           <a:xfrm>
-            <a:off x="365760" y="6574536"/>
-            <a:ext cx="9144000" cy="274320"/>
+            <a:off x="365760" y="6592824"/>
+            <a:ext cx="9144000" cy="256032"/>
           </a:xfrm>
           <a:prstGeom prst="rect">
             <a:avLst/>
@@ -6202,16 +5226,12 @@
           <a:noFill/>
         </p:spPr>
         <p:txBody>
-          <a:bodyPr wrap="square" anchor="ctr">
+          <a:bodyPr wrap="square">
             <a:spAutoFit/>
           </a:bodyPr>
           <a:lstStyle/>
           <a:p>
-            <a:pPr algn="l">
-              <a:spcAft>
-                <a:spcPts val="0"/>
-              </a:spcAft>
-            </a:pPr>
+            <a:pPr algn="l"/>
             <a:r>
               <a:rPr sz="900" b="0" i="0">
                 <a:solidFill>
@@ -6219,7 +5239,7 @@
                 </a:solidFill>
                 <a:latin typeface="Calibri"/>
               </a:rPr>
-              <a:t>FairBanks FCHIP  |  AUDA-NEPAD Youth SRH Ambassadors Initiat  |  Your health, our mission.</a:t>
+              <a:t>FairBanks | AUDA-NEPAD Youth SRH Ambassador | Your health, our mission.</a:t>
             </a:r>
           </a:p>
         </p:txBody>
@@ -6232,8 +5252,8 @@
         </p:nvSpPr>
         <p:spPr>
           <a:xfrm>
-            <a:off x="11094415" y="6574536"/>
-            <a:ext cx="731520" cy="274320"/>
+            <a:off x="11460175" y="6592824"/>
+            <a:ext cx="457200" cy="256032"/>
           </a:xfrm>
           <a:prstGeom prst="rect">
             <a:avLst/>
@@ -6241,16 +5261,12 @@
           <a:noFill/>
         </p:spPr>
         <p:txBody>
-          <a:bodyPr wrap="square" anchor="ctr">
+          <a:bodyPr wrap="square">
             <a:spAutoFit/>
           </a:bodyPr>
           <a:lstStyle/>
           <a:p>
-            <a:pPr algn="r">
-              <a:spcAft>
-                <a:spcPts val="0"/>
-              </a:spcAft>
-            </a:pPr>
+            <a:pPr algn="r"/>
             <a:r>
               <a:rPr sz="900" b="0" i="0">
                 <a:solidFill>
@@ -6290,7 +5306,7 @@
         <p:spPr>
           <a:xfrm>
             <a:off x="0" y="0"/>
-            <a:ext cx="12191695" cy="960120"/>
+            <a:ext cx="12191695" cy="914400"/>
           </a:xfrm>
           <a:prstGeom prst="rect">
             <a:avLst/>
@@ -6301,7 +5317,6 @@
           <a:ln>
             <a:noFill/>
           </a:ln>
-          <a:effectLst/>
         </p:spPr>
         <p:style>
           <a:lnRef idx="1">
@@ -6334,7 +5349,7 @@
         <p:spPr>
           <a:xfrm>
             <a:off x="0" y="0"/>
-            <a:ext cx="164592" cy="960120"/>
+            <a:ext cx="137160" cy="914400"/>
           </a:xfrm>
           <a:prstGeom prst="rect">
             <a:avLst/>
@@ -6345,7 +5360,6 @@
           <a:ln>
             <a:noFill/>
           </a:ln>
-          <a:effectLst/>
         </p:spPr>
         <p:style>
           <a:lnRef idx="1">
@@ -6377,8 +5391,8 @@
         </p:nvSpPr>
         <p:spPr>
           <a:xfrm>
-            <a:off x="457200" y="109728"/>
-            <a:ext cx="10972800" cy="256032"/>
+            <a:off x="411480" y="91440"/>
+            <a:ext cx="10972800" cy="274320"/>
           </a:xfrm>
           <a:prstGeom prst="rect">
             <a:avLst/>
@@ -6386,16 +5400,12 @@
           <a:noFill/>
         </p:spPr>
         <p:txBody>
-          <a:bodyPr wrap="square" anchor="t">
+          <a:bodyPr wrap="square">
             <a:spAutoFit/>
           </a:bodyPr>
           <a:lstStyle/>
           <a:p>
-            <a:pPr algn="l">
-              <a:spcAft>
-                <a:spcPts val="0"/>
-              </a:spcAft>
-            </a:pPr>
+            <a:pPr algn="l"/>
             <a:r>
               <a:rPr sz="1100" b="1" i="0">
                 <a:solidFill>
@@ -6403,7 +5413,7 @@
                 </a:solidFill>
                 <a:latin typeface="Calibri"/>
               </a:rPr>
-              <a:t>THE PLAN</a:t>
+              <a:t>AMPLIFICATION</a:t>
             </a:r>
           </a:p>
         </p:txBody>
@@ -6416,8 +5426,8 @@
         </p:nvSpPr>
         <p:spPr>
           <a:xfrm>
-            <a:off x="457200" y="384048"/>
-            <a:ext cx="11247120" cy="475488"/>
+            <a:off x="411480" y="384048"/>
+            <a:ext cx="10972800" cy="457200"/>
           </a:xfrm>
           <a:prstGeom prst="rect">
             <a:avLst/>
@@ -6425,24 +5435,20 @@
           <a:noFill/>
         </p:spPr>
         <p:txBody>
-          <a:bodyPr wrap="square" anchor="t">
+          <a:bodyPr wrap="square">
             <a:spAutoFit/>
           </a:bodyPr>
           <a:lstStyle/>
           <a:p>
-            <a:pPr algn="l">
-              <a:spcAft>
-                <a:spcPts val="0"/>
-              </a:spcAft>
-            </a:pPr>
-            <a:r>
-              <a:rPr sz="2200" b="1" i="0">
+            <a:pPr algn="l"/>
+            <a:r>
+              <a:rPr sz="2400" b="1" i="0">
                 <a:solidFill>
                   <a:srgbClr val="0A1F2E"/>
                 </a:solidFill>
                 <a:latin typeface="Calibri"/>
               </a:rPr>
-              <a:t>Ambassador activity plan</a:t>
+              <a:t>What the ambassador platform adds</a:t>
             </a:r>
           </a:p>
         </p:txBody>
@@ -6455,8 +5461,8 @@
         </p:nvSpPr>
         <p:spPr>
           <a:xfrm>
-            <a:off x="502920" y="1234440"/>
-            <a:ext cx="5760720" cy="5074920"/>
+            <a:off x="457200" y="1097280"/>
+            <a:ext cx="5303520" cy="5029200"/>
           </a:xfrm>
           <a:prstGeom prst="rect">
             <a:avLst/>
@@ -6469,74 +5475,25 @@
           </a:bodyPr>
           <a:lstStyle/>
           <a:p>
-            <a:pPr>
-              <a:spcAft>
-                <a:spcPts val="800"/>
-              </a:spcAft>
-            </a:pPr>
-            <a:r>
-              <a:rPr sz="1500">
+            <a:pPr algn="l"/>
+            <a:r>
+              <a:rPr sz="1600" b="0" i="0">
                 <a:solidFill>
                   <a:srgbClr val="1E2F38"/>
                 </a:solidFill>
                 <a:latin typeface="Calibri"/>
               </a:rPr>
-              <a:t>•  Complete ambassador onboarding and training requirements</a:t>
-            </a:r>
-          </a:p>
-          <a:p>
-            <a:pPr>
-              <a:spcAft>
-                <a:spcPts val="800"/>
-              </a:spcAft>
-            </a:pPr>
-            <a:r>
-              <a:rPr sz="1500">
-                <a:solidFill>
-                  <a:srgbClr val="1E2F38"/>
-                </a:solidFill>
-                <a:latin typeface="Calibri"/>
-              </a:rPr>
-              <a:t>•  Run quarterly SRH awareness moments inside FairBanks outreach calendars</a:t>
-            </a:r>
-          </a:p>
-          <a:p>
-            <a:pPr>
-              <a:spcAft>
-                <a:spcPts val="800"/>
-              </a:spcAft>
-            </a:pPr>
-            <a:r>
-              <a:rPr sz="1500">
-                <a:solidFill>
-                  <a:srgbClr val="1E2F38"/>
-                </a:solidFill>
-                <a:latin typeface="Calibri"/>
-              </a:rPr>
-              <a:t>•  Report activity and learning back to AUDA-NEPAD as required</a:t>
-            </a:r>
-          </a:p>
-          <a:p>
-            <a:pPr>
-              <a:spcAft>
-                <a:spcPts val="800"/>
-              </a:spcAft>
-            </a:pPr>
-            <a:r>
-              <a:rPr sz="1500">
-                <a:solidFill>
-                  <a:srgbClr val="1E2F38"/>
-                </a:solidFill>
-                <a:latin typeface="Calibri"/>
-              </a:rPr>
-              <a:t>•  Protect privacy and avoid sharing identifiable patient data in advocacy</a:t>
+              <a:t>• Official ambassador recognition and continental SRH platforms
+• Training, mentorship, and networking with policy and youth leaders
+• Visibility to translate Kampala outreach lessons into Africa-wide dialogue
+• Sponsored participation in selected AUDA-NEPAD engagements where appropriate</a:t>
             </a:r>
           </a:p>
         </p:txBody>
       </p:sp>
       <p:pic>
         <p:nvPicPr>
-          <p:cNvPr id="7" name="Picture 6" descr="indoor_training_staff_presenting_01_opt.jpg"/>
+          <p:cNvPr id="7" name="Picture 6" descr="outreach_audience_full_group_01_opt.jpg"/>
           <p:cNvPicPr>
             <a:picLocks noChangeAspect="1"/>
           </p:cNvPicPr>
@@ -6550,8 +5507,8 @@
         </p:blipFill>
         <p:spPr>
           <a:xfrm>
-            <a:off x="6492240" y="2035160"/>
-            <a:ext cx="5212080" cy="3473479"/>
+            <a:off x="6035040" y="1722795"/>
+            <a:ext cx="5669280" cy="3778170"/>
           </a:xfrm>
           <a:prstGeom prst="rect">
             <a:avLst/>
@@ -6566,8 +5523,8 @@
         </p:nvSpPr>
         <p:spPr>
           <a:xfrm>
-            <a:off x="0" y="6565392"/>
-            <a:ext cx="12191695" cy="292608"/>
+            <a:off x="0" y="6583680"/>
+            <a:ext cx="12191695" cy="274320"/>
           </a:xfrm>
           <a:prstGeom prst="rect">
             <a:avLst/>
@@ -6578,7 +5535,6 @@
           <a:ln>
             <a:noFill/>
           </a:ln>
-          <a:effectLst/>
         </p:spPr>
         <p:style>
           <a:lnRef idx="1">
@@ -6610,8 +5566,8 @@
         </p:nvSpPr>
         <p:spPr>
           <a:xfrm>
-            <a:off x="365760" y="6574536"/>
-            <a:ext cx="9144000" cy="274320"/>
+            <a:off x="365760" y="6592824"/>
+            <a:ext cx="9144000" cy="256032"/>
           </a:xfrm>
           <a:prstGeom prst="rect">
             <a:avLst/>
@@ -6619,16 +5575,12 @@
           <a:noFill/>
         </p:spPr>
         <p:txBody>
-          <a:bodyPr wrap="square" anchor="ctr">
+          <a:bodyPr wrap="square">
             <a:spAutoFit/>
           </a:bodyPr>
           <a:lstStyle/>
           <a:p>
-            <a:pPr algn="l">
-              <a:spcAft>
-                <a:spcPts val="0"/>
-              </a:spcAft>
-            </a:pPr>
+            <a:pPr algn="l"/>
             <a:r>
               <a:rPr sz="900" b="0" i="0">
                 <a:solidFill>
@@ -6636,7 +5588,7 @@
                 </a:solidFill>
                 <a:latin typeface="Calibri"/>
               </a:rPr>
-              <a:t>FairBanks FCHIP  |  AUDA-NEPAD Youth SRH Ambassadors Initiat  |  Your health, our mission.</a:t>
+              <a:t>FairBanks | AUDA-NEPAD Youth SRH Ambassador | Your health, our mission.</a:t>
             </a:r>
           </a:p>
         </p:txBody>
@@ -6649,8 +5601,8 @@
         </p:nvSpPr>
         <p:spPr>
           <a:xfrm>
-            <a:off x="11094415" y="6574536"/>
-            <a:ext cx="731520" cy="274320"/>
+            <a:off x="11460175" y="6592824"/>
+            <a:ext cx="457200" cy="256032"/>
           </a:xfrm>
           <a:prstGeom prst="rect">
             <a:avLst/>
@@ -6658,16 +5610,12 @@
           <a:noFill/>
         </p:spPr>
         <p:txBody>
-          <a:bodyPr wrap="square" anchor="ctr">
+          <a:bodyPr wrap="square">
             <a:spAutoFit/>
           </a:bodyPr>
           <a:lstStyle/>
           <a:p>
-            <a:pPr algn="r">
-              <a:spcAft>
-                <a:spcPts val="0"/>
-              </a:spcAft>
-            </a:pPr>
+            <a:pPr algn="r"/>
             <a:r>
               <a:rPr sz="900" b="0" i="0">
                 <a:solidFill>
@@ -6698,175 +5646,9 @@
         <p:nvPr/>
       </p:nvGrpSpPr>
       <p:grpSpPr/>
-      <p:sp>
-        <p:nvSpPr>
-          <p:cNvPr id="2" name="Rectangle 1"/>
-          <p:cNvSpPr/>
-          <p:nvPr/>
-        </p:nvSpPr>
-        <p:spPr>
-          <a:xfrm>
-            <a:off x="0" y="0"/>
-            <a:ext cx="12191695" cy="960120"/>
-          </a:xfrm>
-          <a:prstGeom prst="rect">
-            <a:avLst/>
-          </a:prstGeom>
-          <a:solidFill>
-            <a:srgbClr val="F7F5F0"/>
-          </a:solidFill>
-          <a:ln>
-            <a:noFill/>
-          </a:ln>
-          <a:effectLst/>
-        </p:spPr>
-        <p:style>
-          <a:lnRef idx="1">
-            <a:schemeClr val="accent1"/>
-          </a:lnRef>
-          <a:fillRef idx="3">
-            <a:schemeClr val="accent1"/>
-          </a:fillRef>
-          <a:effectRef idx="2">
-            <a:schemeClr val="accent1"/>
-          </a:effectRef>
-          <a:fontRef idx="minor">
-            <a:schemeClr val="lt1"/>
-          </a:fontRef>
-        </p:style>
-        <p:txBody>
-          <a:bodyPr rtlCol="0" anchor="ctr"/>
-          <a:lstStyle/>
-          <a:p>
-            <a:pPr algn="ctr"/>
-          </a:p>
-        </p:txBody>
-      </p:sp>
-      <p:sp>
-        <p:nvSpPr>
-          <p:cNvPr id="3" name="Rectangle 2"/>
-          <p:cNvSpPr/>
-          <p:nvPr/>
-        </p:nvSpPr>
-        <p:spPr>
-          <a:xfrm>
-            <a:off x="0" y="0"/>
-            <a:ext cx="164592" cy="960120"/>
-          </a:xfrm>
-          <a:prstGeom prst="rect">
-            <a:avLst/>
-          </a:prstGeom>
-          <a:solidFill>
-            <a:srgbClr val="0D6E6E"/>
-          </a:solidFill>
-          <a:ln>
-            <a:noFill/>
-          </a:ln>
-          <a:effectLst/>
-        </p:spPr>
-        <p:style>
-          <a:lnRef idx="1">
-            <a:schemeClr val="accent1"/>
-          </a:lnRef>
-          <a:fillRef idx="3">
-            <a:schemeClr val="accent1"/>
-          </a:fillRef>
-          <a:effectRef idx="2">
-            <a:schemeClr val="accent1"/>
-          </a:effectRef>
-          <a:fontRef idx="minor">
-            <a:schemeClr val="lt1"/>
-          </a:fontRef>
-        </p:style>
-        <p:txBody>
-          <a:bodyPr rtlCol="0" anchor="ctr"/>
-          <a:lstStyle/>
-          <a:p>
-            <a:pPr algn="ctr"/>
-          </a:p>
-        </p:txBody>
-      </p:sp>
-      <p:sp>
-        <p:nvSpPr>
-          <p:cNvPr id="4" name="TextBox 3"/>
-          <p:cNvSpPr txBox="1"/>
-          <p:nvPr/>
-        </p:nvSpPr>
-        <p:spPr>
-          <a:xfrm>
-            <a:off x="457200" y="109728"/>
-            <a:ext cx="10972800" cy="256032"/>
-          </a:xfrm>
-          <a:prstGeom prst="rect">
-            <a:avLst/>
-          </a:prstGeom>
-          <a:noFill/>
-        </p:spPr>
-        <p:txBody>
-          <a:bodyPr wrap="square" anchor="t">
-            <a:spAutoFit/>
-          </a:bodyPr>
-          <a:lstStyle/>
-          <a:p>
-            <a:pPr algn="l">
-              <a:spcAft>
-                <a:spcPts val="0"/>
-              </a:spcAft>
-            </a:pPr>
-            <a:r>
-              <a:rPr sz="1100" b="1" i="0">
-                <a:solidFill>
-                  <a:srgbClr val="C45C26"/>
-                </a:solidFill>
-                <a:latin typeface="Calibri"/>
-              </a:rPr>
-              <a:t>DEEP TECHNOLOGY</a:t>
-            </a:r>
-          </a:p>
-        </p:txBody>
-      </p:sp>
-      <p:sp>
-        <p:nvSpPr>
-          <p:cNvPr id="5" name="TextBox 4"/>
-          <p:cNvSpPr txBox="1"/>
-          <p:nvPr/>
-        </p:nvSpPr>
-        <p:spPr>
-          <a:xfrm>
-            <a:off x="457200" y="384048"/>
-            <a:ext cx="11247120" cy="475488"/>
-          </a:xfrm>
-          <a:prstGeom prst="rect">
-            <a:avLst/>
-          </a:prstGeom>
-          <a:noFill/>
-        </p:spPr>
-        <p:txBody>
-          <a:bodyPr wrap="square" anchor="t">
-            <a:spAutoFit/>
-          </a:bodyPr>
-          <a:lstStyle/>
-          <a:p>
-            <a:pPr algn="l">
-              <a:spcAft>
-                <a:spcPts val="0"/>
-              </a:spcAft>
-            </a:pPr>
-            <a:r>
-              <a:rPr sz="2200" b="1" i="0">
-                <a:solidFill>
-                  <a:srgbClr val="0A1F2E"/>
-                </a:solidFill>
-                <a:latin typeface="Calibri"/>
-              </a:rPr>
-              <a:t>Intelligence rooted in African community care</a:t>
-            </a:r>
-          </a:p>
-        </p:txBody>
-      </p:sp>
       <p:pic>
         <p:nvPicPr>
-          <p:cNvPr id="6" name="Picture 5" descr="deep_tech_collage_opt.jpg"/>
+          <p:cNvPr id="2" name="Picture 1" descr="outreach_hands_raised_01_opt.jpg"/>
           <p:cNvPicPr>
             <a:picLocks noChangeAspect="1"/>
           </p:cNvPicPr>
@@ -6880,8 +5662,8 @@
         </p:blipFill>
         <p:spPr>
           <a:xfrm>
-            <a:off x="411480" y="2065630"/>
-            <a:ext cx="5120640" cy="3412540"/>
+            <a:off x="0" y="0"/>
+            <a:ext cx="12191695" cy="6858000"/>
           </a:xfrm>
           <a:prstGeom prst="rect">
             <a:avLst/>
@@ -6890,758 +5672,14 @@
       </p:pic>
       <p:sp>
         <p:nvSpPr>
-          <p:cNvPr id="7" name="Rectangle 6"/>
+          <p:cNvPr id="3" name="Rectangle 2"/>
           <p:cNvSpPr/>
           <p:nvPr/>
         </p:nvSpPr>
         <p:spPr>
           <a:xfrm>
-            <a:off x="5852160" y="1197864"/>
-            <a:ext cx="5852160" cy="766572"/>
-          </a:xfrm>
-          <a:prstGeom prst="rect">
-            <a:avLst/>
-          </a:prstGeom>
-          <a:solidFill>
-            <a:srgbClr val="FFFFFF"/>
-          </a:solidFill>
-          <a:ln w="9525">
-            <a:solidFill>
-              <a:srgbClr val="D0DCDC"/>
-            </a:solidFill>
-          </a:ln>
-          <a:effectLst/>
-        </p:spPr>
-        <p:style>
-          <a:lnRef idx="1">
-            <a:schemeClr val="accent1"/>
-          </a:lnRef>
-          <a:fillRef idx="3">
-            <a:schemeClr val="accent1"/>
-          </a:fillRef>
-          <a:effectRef idx="2">
-            <a:schemeClr val="accent1"/>
-          </a:effectRef>
-          <a:fontRef idx="minor">
-            <a:schemeClr val="lt1"/>
-          </a:fontRef>
-        </p:style>
-        <p:txBody>
-          <a:bodyPr rtlCol="0" anchor="ctr"/>
-          <a:lstStyle/>
-          <a:p>
-            <a:pPr algn="ctr"/>
-          </a:p>
-        </p:txBody>
-      </p:sp>
-      <p:sp>
-        <p:nvSpPr>
-          <p:cNvPr id="8" name="TextBox 7"/>
-          <p:cNvSpPr txBox="1"/>
-          <p:nvPr/>
-        </p:nvSpPr>
-        <p:spPr>
-          <a:xfrm>
-            <a:off x="6035040" y="1252728"/>
-            <a:ext cx="5486400" cy="274320"/>
-          </a:xfrm>
-          <a:prstGeom prst="rect">
-            <a:avLst/>
-          </a:prstGeom>
-          <a:noFill/>
-        </p:spPr>
-        <p:txBody>
-          <a:bodyPr wrap="square" anchor="t">
-            <a:spAutoFit/>
-          </a:bodyPr>
-          <a:lstStyle/>
-          <a:p>
-            <a:pPr algn="l">
-              <a:spcAft>
-                <a:spcPts val="0"/>
-              </a:spcAft>
-            </a:pPr>
-            <a:r>
-              <a:rPr sz="1400" b="1" i="0">
-                <a:solidFill>
-                  <a:srgbClr val="0D6E6E"/>
-                </a:solidFill>
-                <a:latin typeface="Calibri"/>
-              </a:rPr>
-              <a:t>Artificial Intelligence</a:t>
-            </a:r>
-          </a:p>
-        </p:txBody>
-      </p:sp>
-      <p:sp>
-        <p:nvSpPr>
-          <p:cNvPr id="9" name="TextBox 8"/>
-          <p:cNvSpPr txBox="1"/>
-          <p:nvPr/>
-        </p:nvSpPr>
-        <p:spPr>
-          <a:xfrm>
-            <a:off x="6035040" y="1527048"/>
-            <a:ext cx="5486400" cy="365760"/>
-          </a:xfrm>
-          <a:prstGeom prst="rect">
-            <a:avLst/>
-          </a:prstGeom>
-          <a:noFill/>
-        </p:spPr>
-        <p:txBody>
-          <a:bodyPr wrap="square" anchor="t">
-            <a:spAutoFit/>
-          </a:bodyPr>
-          <a:lstStyle/>
-          <a:p>
-            <a:pPr algn="l">
-              <a:spcAft>
-                <a:spcPts val="0"/>
-              </a:spcAft>
-            </a:pPr>
-            <a:r>
-              <a:rPr sz="1200" b="0" i="0">
-                <a:solidFill>
-                  <a:srgbClr val="3A4A54"/>
-                </a:solidFill>
-                <a:latin typeface="Calibri"/>
-              </a:rPr>
-              <a:t>Outbreak early warning; maternal and NCD risk scoring</a:t>
-            </a:r>
-          </a:p>
-        </p:txBody>
-      </p:sp>
-      <p:sp>
-        <p:nvSpPr>
-          <p:cNvPr id="10" name="Rectangle 9"/>
-          <p:cNvSpPr/>
-          <p:nvPr/>
-        </p:nvSpPr>
-        <p:spPr>
-          <a:xfrm>
-            <a:off x="5852160" y="2074164"/>
-            <a:ext cx="5852160" cy="766572"/>
-          </a:xfrm>
-          <a:prstGeom prst="rect">
-            <a:avLst/>
-          </a:prstGeom>
-          <a:solidFill>
-            <a:srgbClr val="FFFFFF"/>
-          </a:solidFill>
-          <a:ln w="9525">
-            <a:solidFill>
-              <a:srgbClr val="D0DCDC"/>
-            </a:solidFill>
-          </a:ln>
-          <a:effectLst/>
-        </p:spPr>
-        <p:style>
-          <a:lnRef idx="1">
-            <a:schemeClr val="accent1"/>
-          </a:lnRef>
-          <a:fillRef idx="3">
-            <a:schemeClr val="accent1"/>
-          </a:fillRef>
-          <a:effectRef idx="2">
-            <a:schemeClr val="accent1"/>
-          </a:effectRef>
-          <a:fontRef idx="minor">
-            <a:schemeClr val="lt1"/>
-          </a:fontRef>
-        </p:style>
-        <p:txBody>
-          <a:bodyPr rtlCol="0" anchor="ctr"/>
-          <a:lstStyle/>
-          <a:p>
-            <a:pPr algn="ctr"/>
-          </a:p>
-        </p:txBody>
-      </p:sp>
-      <p:sp>
-        <p:nvSpPr>
-          <p:cNvPr id="11" name="TextBox 10"/>
-          <p:cNvSpPr txBox="1"/>
-          <p:nvPr/>
-        </p:nvSpPr>
-        <p:spPr>
-          <a:xfrm>
-            <a:off x="6035040" y="2129028"/>
-            <a:ext cx="5486400" cy="274320"/>
-          </a:xfrm>
-          <a:prstGeom prst="rect">
-            <a:avLst/>
-          </a:prstGeom>
-          <a:noFill/>
-        </p:spPr>
-        <p:txBody>
-          <a:bodyPr wrap="square" anchor="t">
-            <a:spAutoFit/>
-          </a:bodyPr>
-          <a:lstStyle/>
-          <a:p>
-            <a:pPr algn="l">
-              <a:spcAft>
-                <a:spcPts val="0"/>
-              </a:spcAft>
-            </a:pPr>
-            <a:r>
-              <a:rPr sz="1400" b="1" i="0">
-                <a:solidFill>
-                  <a:srgbClr val="0D6E6E"/>
-                </a:solidFill>
-                <a:latin typeface="Calibri"/>
-              </a:rPr>
-              <a:t>Machine Learning</a:t>
-            </a:r>
-          </a:p>
-        </p:txBody>
-      </p:sp>
-      <p:sp>
-        <p:nvSpPr>
-          <p:cNvPr id="12" name="TextBox 11"/>
-          <p:cNvSpPr txBox="1"/>
-          <p:nvPr/>
-        </p:nvSpPr>
-        <p:spPr>
-          <a:xfrm>
-            <a:off x="6035040" y="2403348"/>
-            <a:ext cx="5486400" cy="365760"/>
-          </a:xfrm>
-          <a:prstGeom prst="rect">
-            <a:avLst/>
-          </a:prstGeom>
-          <a:noFill/>
-        </p:spPr>
-        <p:txBody>
-          <a:bodyPr wrap="square" anchor="t">
-            <a:spAutoFit/>
-          </a:bodyPr>
-          <a:lstStyle/>
-          <a:p>
-            <a:pPr algn="l">
-              <a:spcAft>
-                <a:spcPts val="0"/>
-              </a:spcAft>
-            </a:pPr>
-            <a:r>
-              <a:rPr sz="1200" b="0" i="0">
-                <a:solidFill>
-                  <a:srgbClr val="3A4A54"/>
-                </a:solidFill>
-                <a:latin typeface="Calibri"/>
-              </a:rPr>
-              <a:t>Learn from community patterns, seasons, and outreach outcomes</a:t>
-            </a:r>
-          </a:p>
-        </p:txBody>
-      </p:sp>
-      <p:sp>
-        <p:nvSpPr>
-          <p:cNvPr id="13" name="Rectangle 12"/>
-          <p:cNvSpPr/>
-          <p:nvPr/>
-        </p:nvSpPr>
-        <p:spPr>
-          <a:xfrm>
-            <a:off x="5852160" y="2950464"/>
-            <a:ext cx="5852160" cy="766572"/>
-          </a:xfrm>
-          <a:prstGeom prst="rect">
-            <a:avLst/>
-          </a:prstGeom>
-          <a:solidFill>
-            <a:srgbClr val="FFFFFF"/>
-          </a:solidFill>
-          <a:ln w="9525">
-            <a:solidFill>
-              <a:srgbClr val="D0DCDC"/>
-            </a:solidFill>
-          </a:ln>
-          <a:effectLst/>
-        </p:spPr>
-        <p:style>
-          <a:lnRef idx="1">
-            <a:schemeClr val="accent1"/>
-          </a:lnRef>
-          <a:fillRef idx="3">
-            <a:schemeClr val="accent1"/>
-          </a:fillRef>
-          <a:effectRef idx="2">
-            <a:schemeClr val="accent1"/>
-          </a:effectRef>
-          <a:fontRef idx="minor">
-            <a:schemeClr val="lt1"/>
-          </a:fontRef>
-        </p:style>
-        <p:txBody>
-          <a:bodyPr rtlCol="0" anchor="ctr"/>
-          <a:lstStyle/>
-          <a:p>
-            <a:pPr algn="ctr"/>
-          </a:p>
-        </p:txBody>
-      </p:sp>
-      <p:sp>
-        <p:nvSpPr>
-          <p:cNvPr id="14" name="TextBox 13"/>
-          <p:cNvSpPr txBox="1"/>
-          <p:nvPr/>
-        </p:nvSpPr>
-        <p:spPr>
-          <a:xfrm>
-            <a:off x="6035040" y="3005328"/>
-            <a:ext cx="5486400" cy="274320"/>
-          </a:xfrm>
-          <a:prstGeom prst="rect">
-            <a:avLst/>
-          </a:prstGeom>
-          <a:noFill/>
-        </p:spPr>
-        <p:txBody>
-          <a:bodyPr wrap="square" anchor="t">
-            <a:spAutoFit/>
-          </a:bodyPr>
-          <a:lstStyle/>
-          <a:p>
-            <a:pPr algn="l">
-              <a:spcAft>
-                <a:spcPts val="0"/>
-              </a:spcAft>
-            </a:pPr>
-            <a:r>
-              <a:rPr sz="1400" b="1" i="0">
-                <a:solidFill>
-                  <a:srgbClr val="0D6E6E"/>
-                </a:solidFill>
-                <a:latin typeface="Calibri"/>
-              </a:rPr>
-              <a:t>GIS Mapping</a:t>
-            </a:r>
-          </a:p>
-        </p:txBody>
-      </p:sp>
-      <p:sp>
-        <p:nvSpPr>
-          <p:cNvPr id="15" name="TextBox 14"/>
-          <p:cNvSpPr txBox="1"/>
-          <p:nvPr/>
-        </p:nvSpPr>
-        <p:spPr>
-          <a:xfrm>
-            <a:off x="6035040" y="3279648"/>
-            <a:ext cx="5486400" cy="365760"/>
-          </a:xfrm>
-          <a:prstGeom prst="rect">
-            <a:avLst/>
-          </a:prstGeom>
-          <a:noFill/>
-        </p:spPr>
-        <p:txBody>
-          <a:bodyPr wrap="square" anchor="t">
-            <a:spAutoFit/>
-          </a:bodyPr>
-          <a:lstStyle/>
-          <a:p>
-            <a:pPr algn="l">
-              <a:spcAft>
-                <a:spcPts val="0"/>
-              </a:spcAft>
-            </a:pPr>
-            <a:r>
-              <a:rPr sz="1200" b="0" i="0">
-                <a:solidFill>
-                  <a:srgbClr val="3A4A54"/>
-                </a:solidFill>
-                <a:latin typeface="Calibri"/>
-              </a:rPr>
-              <a:t>Disease distribution, hotspots, and resource gaps</a:t>
-            </a:r>
-          </a:p>
-        </p:txBody>
-      </p:sp>
-      <p:sp>
-        <p:nvSpPr>
-          <p:cNvPr id="16" name="Rectangle 15"/>
-          <p:cNvSpPr/>
-          <p:nvPr/>
-        </p:nvSpPr>
-        <p:spPr>
-          <a:xfrm>
-            <a:off x="5852160" y="3826764"/>
-            <a:ext cx="5852160" cy="766572"/>
-          </a:xfrm>
-          <a:prstGeom prst="rect">
-            <a:avLst/>
-          </a:prstGeom>
-          <a:solidFill>
-            <a:srgbClr val="FFFFFF"/>
-          </a:solidFill>
-          <a:ln w="9525">
-            <a:solidFill>
-              <a:srgbClr val="D0DCDC"/>
-            </a:solidFill>
-          </a:ln>
-          <a:effectLst/>
-        </p:spPr>
-        <p:style>
-          <a:lnRef idx="1">
-            <a:schemeClr val="accent1"/>
-          </a:lnRef>
-          <a:fillRef idx="3">
-            <a:schemeClr val="accent1"/>
-          </a:fillRef>
-          <a:effectRef idx="2">
-            <a:schemeClr val="accent1"/>
-          </a:effectRef>
-          <a:fontRef idx="minor">
-            <a:schemeClr val="lt1"/>
-          </a:fontRef>
-        </p:style>
-        <p:txBody>
-          <a:bodyPr rtlCol="0" anchor="ctr"/>
-          <a:lstStyle/>
-          <a:p>
-            <a:pPr algn="ctr"/>
-          </a:p>
-        </p:txBody>
-      </p:sp>
-      <p:sp>
-        <p:nvSpPr>
-          <p:cNvPr id="17" name="TextBox 16"/>
-          <p:cNvSpPr txBox="1"/>
-          <p:nvPr/>
-        </p:nvSpPr>
-        <p:spPr>
-          <a:xfrm>
-            <a:off x="6035040" y="3881628"/>
-            <a:ext cx="5486400" cy="274320"/>
-          </a:xfrm>
-          <a:prstGeom prst="rect">
-            <a:avLst/>
-          </a:prstGeom>
-          <a:noFill/>
-        </p:spPr>
-        <p:txBody>
-          <a:bodyPr wrap="square" anchor="t">
-            <a:spAutoFit/>
-          </a:bodyPr>
-          <a:lstStyle/>
-          <a:p>
-            <a:pPr algn="l">
-              <a:spcAft>
-                <a:spcPts val="0"/>
-              </a:spcAft>
-            </a:pPr>
-            <a:r>
-              <a:rPr sz="1400" b="1" i="0">
-                <a:solidFill>
-                  <a:srgbClr val="0D6E6E"/>
-                </a:solidFill>
-                <a:latin typeface="Calibri"/>
-              </a:rPr>
-              <a:t>Mobile Data Collection</a:t>
-            </a:r>
-          </a:p>
-        </p:txBody>
-      </p:sp>
-      <p:sp>
-        <p:nvSpPr>
-          <p:cNvPr id="18" name="TextBox 17"/>
-          <p:cNvSpPr txBox="1"/>
-          <p:nvPr/>
-        </p:nvSpPr>
-        <p:spPr>
-          <a:xfrm>
-            <a:off x="6035040" y="4155948"/>
-            <a:ext cx="5486400" cy="365760"/>
-          </a:xfrm>
-          <a:prstGeom prst="rect">
-            <a:avLst/>
-          </a:prstGeom>
-          <a:noFill/>
-        </p:spPr>
-        <p:txBody>
-          <a:bodyPr wrap="square" anchor="t">
-            <a:spAutoFit/>
-          </a:bodyPr>
-          <a:lstStyle/>
-          <a:p>
-            <a:pPr algn="l">
-              <a:spcAft>
-                <a:spcPts val="0"/>
-              </a:spcAft>
-            </a:pPr>
-            <a:r>
-              <a:rPr sz="1200" b="0" i="0">
-                <a:solidFill>
-                  <a:srgbClr val="3A4A54"/>
-                </a:solidFill>
-                <a:latin typeface="Calibri"/>
-              </a:rPr>
-              <a:t>Offline-capable CHW/VHT capture at household level</a:t>
-            </a:r>
-          </a:p>
-        </p:txBody>
-      </p:sp>
-      <p:sp>
-        <p:nvSpPr>
-          <p:cNvPr id="19" name="Rectangle 18"/>
-          <p:cNvSpPr/>
-          <p:nvPr/>
-        </p:nvSpPr>
-        <p:spPr>
-          <a:xfrm>
-            <a:off x="5852160" y="4703064"/>
-            <a:ext cx="5852160" cy="766572"/>
-          </a:xfrm>
-          <a:prstGeom prst="rect">
-            <a:avLst/>
-          </a:prstGeom>
-          <a:solidFill>
-            <a:srgbClr val="FFFFFF"/>
-          </a:solidFill>
-          <a:ln w="9525">
-            <a:solidFill>
-              <a:srgbClr val="D0DCDC"/>
-            </a:solidFill>
-          </a:ln>
-          <a:effectLst/>
-        </p:spPr>
-        <p:style>
-          <a:lnRef idx="1">
-            <a:schemeClr val="accent1"/>
-          </a:lnRef>
-          <a:fillRef idx="3">
-            <a:schemeClr val="accent1"/>
-          </a:fillRef>
-          <a:effectRef idx="2">
-            <a:schemeClr val="accent1"/>
-          </a:effectRef>
-          <a:fontRef idx="minor">
-            <a:schemeClr val="lt1"/>
-          </a:fontRef>
-        </p:style>
-        <p:txBody>
-          <a:bodyPr rtlCol="0" anchor="ctr"/>
-          <a:lstStyle/>
-          <a:p>
-            <a:pPr algn="ctr"/>
-          </a:p>
-        </p:txBody>
-      </p:sp>
-      <p:sp>
-        <p:nvSpPr>
-          <p:cNvPr id="20" name="TextBox 19"/>
-          <p:cNvSpPr txBox="1"/>
-          <p:nvPr/>
-        </p:nvSpPr>
-        <p:spPr>
-          <a:xfrm>
-            <a:off x="6035040" y="4757928"/>
-            <a:ext cx="5486400" cy="274320"/>
-          </a:xfrm>
-          <a:prstGeom prst="rect">
-            <a:avLst/>
-          </a:prstGeom>
-          <a:noFill/>
-        </p:spPr>
-        <p:txBody>
-          <a:bodyPr wrap="square" anchor="t">
-            <a:spAutoFit/>
-          </a:bodyPr>
-          <a:lstStyle/>
-          <a:p>
-            <a:pPr algn="l">
-              <a:spcAft>
-                <a:spcPts val="0"/>
-              </a:spcAft>
-            </a:pPr>
-            <a:r>
-              <a:rPr sz="1400" b="1" i="0">
-                <a:solidFill>
-                  <a:srgbClr val="0D6E6E"/>
-                </a:solidFill>
-                <a:latin typeface="Calibri"/>
-              </a:rPr>
-              <a:t>Cloud Computing</a:t>
-            </a:r>
-          </a:p>
-        </p:txBody>
-      </p:sp>
-      <p:sp>
-        <p:nvSpPr>
-          <p:cNvPr id="21" name="TextBox 20"/>
-          <p:cNvSpPr txBox="1"/>
-          <p:nvPr/>
-        </p:nvSpPr>
-        <p:spPr>
-          <a:xfrm>
-            <a:off x="6035040" y="5032248"/>
-            <a:ext cx="5486400" cy="365760"/>
-          </a:xfrm>
-          <a:prstGeom prst="rect">
-            <a:avLst/>
-          </a:prstGeom>
-          <a:noFill/>
-        </p:spPr>
-        <p:txBody>
-          <a:bodyPr wrap="square" anchor="t">
-            <a:spAutoFit/>
-          </a:bodyPr>
-          <a:lstStyle/>
-          <a:p>
-            <a:pPr algn="l">
-              <a:spcAft>
-                <a:spcPts val="0"/>
-              </a:spcAft>
-            </a:pPr>
-            <a:r>
-              <a:rPr sz="1200" b="0" i="0">
-                <a:solidFill>
-                  <a:srgbClr val="3A4A54"/>
-                </a:solidFill>
-                <a:latin typeface="Calibri"/>
-              </a:rPr>
-              <a:t>Secure sync across facilities and partners</a:t>
-            </a:r>
-          </a:p>
-        </p:txBody>
-      </p:sp>
-      <p:sp>
-        <p:nvSpPr>
-          <p:cNvPr id="22" name="Rectangle 21"/>
-          <p:cNvSpPr/>
-          <p:nvPr/>
-        </p:nvSpPr>
-        <p:spPr>
-          <a:xfrm>
-            <a:off x="5852160" y="5579364"/>
-            <a:ext cx="5852160" cy="766572"/>
-          </a:xfrm>
-          <a:prstGeom prst="rect">
-            <a:avLst/>
-          </a:prstGeom>
-          <a:solidFill>
-            <a:srgbClr val="FFFFFF"/>
-          </a:solidFill>
-          <a:ln w="9525">
-            <a:solidFill>
-              <a:srgbClr val="D0DCDC"/>
-            </a:solidFill>
-          </a:ln>
-          <a:effectLst/>
-        </p:spPr>
-        <p:style>
-          <a:lnRef idx="1">
-            <a:schemeClr val="accent1"/>
-          </a:lnRef>
-          <a:fillRef idx="3">
-            <a:schemeClr val="accent1"/>
-          </a:fillRef>
-          <a:effectRef idx="2">
-            <a:schemeClr val="accent1"/>
-          </a:effectRef>
-          <a:fontRef idx="minor">
-            <a:schemeClr val="lt1"/>
-          </a:fontRef>
-        </p:style>
-        <p:txBody>
-          <a:bodyPr rtlCol="0" anchor="ctr"/>
-          <a:lstStyle/>
-          <a:p>
-            <a:pPr algn="ctr"/>
-          </a:p>
-        </p:txBody>
-      </p:sp>
-      <p:sp>
-        <p:nvSpPr>
-          <p:cNvPr id="23" name="TextBox 22"/>
-          <p:cNvSpPr txBox="1"/>
-          <p:nvPr/>
-        </p:nvSpPr>
-        <p:spPr>
-          <a:xfrm>
-            <a:off x="6035040" y="5634228"/>
-            <a:ext cx="5486400" cy="274320"/>
-          </a:xfrm>
-          <a:prstGeom prst="rect">
-            <a:avLst/>
-          </a:prstGeom>
-          <a:noFill/>
-        </p:spPr>
-        <p:txBody>
-          <a:bodyPr wrap="square" anchor="t">
-            <a:spAutoFit/>
-          </a:bodyPr>
-          <a:lstStyle/>
-          <a:p>
-            <a:pPr algn="l">
-              <a:spcAft>
-                <a:spcPts val="0"/>
-              </a:spcAft>
-            </a:pPr>
-            <a:r>
-              <a:rPr sz="1400" b="1" i="0">
-                <a:solidFill>
-                  <a:srgbClr val="0D6E6E"/>
-                </a:solidFill>
-                <a:latin typeface="Calibri"/>
-              </a:rPr>
-              <a:t>Analytics Dashboards</a:t>
-            </a:r>
-          </a:p>
-        </p:txBody>
-      </p:sp>
-      <p:sp>
-        <p:nvSpPr>
-          <p:cNvPr id="24" name="TextBox 23"/>
-          <p:cNvSpPr txBox="1"/>
-          <p:nvPr/>
-        </p:nvSpPr>
-        <p:spPr>
-          <a:xfrm>
-            <a:off x="6035040" y="5908548"/>
-            <a:ext cx="5486400" cy="365760"/>
-          </a:xfrm>
-          <a:prstGeom prst="rect">
-            <a:avLst/>
-          </a:prstGeom>
-          <a:noFill/>
-        </p:spPr>
-        <p:txBody>
-          <a:bodyPr wrap="square" anchor="t">
-            <a:spAutoFit/>
-          </a:bodyPr>
-          <a:lstStyle/>
-          <a:p>
-            <a:pPr algn="l">
-              <a:spcAft>
-                <a:spcPts val="0"/>
-              </a:spcAft>
-            </a:pPr>
-            <a:r>
-              <a:rPr sz="1200" b="0" i="0">
-                <a:solidFill>
-                  <a:srgbClr val="3A4A54"/>
-                </a:solidFill>
-                <a:latin typeface="Calibri"/>
-              </a:rPr>
-              <a:t>Real-time views for clinics, districts, and NGOs</a:t>
-            </a:r>
-          </a:p>
-        </p:txBody>
-      </p:sp>
-      <p:sp>
-        <p:nvSpPr>
-          <p:cNvPr id="25" name="Rectangle 24"/>
-          <p:cNvSpPr/>
-          <p:nvPr/>
-        </p:nvSpPr>
-        <p:spPr>
-          <a:xfrm>
-            <a:off x="0" y="6565392"/>
-            <a:ext cx="12191695" cy="292608"/>
+            <a:off x="0" y="4480560"/>
+            <a:ext cx="12191695" cy="2377440"/>
           </a:xfrm>
           <a:prstGeom prst="rect">
             <a:avLst/>
@@ -7652,7 +5690,6 @@
           <a:ln>
             <a:noFill/>
           </a:ln>
-          <a:effectLst/>
         </p:spPr>
         <p:style>
           <a:lnRef idx="1">
@@ -7678,14 +5715,14 @@
       </p:sp>
       <p:sp>
         <p:nvSpPr>
-          <p:cNvPr id="26" name="TextBox 25"/>
+          <p:cNvPr id="4" name="TextBox 3"/>
           <p:cNvSpPr txBox="1"/>
           <p:nvPr/>
         </p:nvSpPr>
         <p:spPr>
           <a:xfrm>
-            <a:off x="365760" y="6574536"/>
-            <a:ext cx="9144000" cy="274320"/>
+            <a:off x="548640" y="4846320"/>
+            <a:ext cx="10972800" cy="502920"/>
           </a:xfrm>
           <a:prstGeom prst="rect">
             <a:avLst/>
@@ -7693,38 +5730,34 @@
           <a:noFill/>
         </p:spPr>
         <p:txBody>
-          <a:bodyPr wrap="square" anchor="ctr">
+          <a:bodyPr wrap="square">
             <a:spAutoFit/>
           </a:bodyPr>
           <a:lstStyle/>
           <a:p>
-            <a:pPr algn="l">
-              <a:spcAft>
-                <a:spcPts val="0"/>
-              </a:spcAft>
-            </a:pPr>
-            <a:r>
-              <a:rPr sz="900" b="0" i="0">
+            <a:pPr algn="l"/>
+            <a:r>
+              <a:rPr sz="2200" b="1" i="0">
                 <a:solidFill>
                   <a:srgbClr val="FFFFFF"/>
                 </a:solidFill>
                 <a:latin typeface="Calibri"/>
               </a:rPr>
-              <a:t>FairBanks FCHIP  |  AUDA-NEPAD Youth SRH Ambassadors Initiat  |  Your health, our mission.</a:t>
-            </a:r>
-          </a:p>
-        </p:txBody>
-      </p:sp>
-      <p:sp>
-        <p:nvSpPr>
-          <p:cNvPr id="27" name="TextBox 26"/>
+              <a:t>Youth SRH advocacy rooted in community — ready to serve continentally.</a:t>
+            </a:r>
+          </a:p>
+        </p:txBody>
+      </p:sp>
+      <p:sp>
+        <p:nvSpPr>
+          <p:cNvPr id="5" name="TextBox 4"/>
           <p:cNvSpPr txBox="1"/>
           <p:nvPr/>
         </p:nvSpPr>
         <p:spPr>
           <a:xfrm>
-            <a:off x="11094415" y="6574536"/>
-            <a:ext cx="731520" cy="274320"/>
+            <a:off x="548640" y="5715000"/>
+            <a:ext cx="10972800" cy="320040"/>
           </a:xfrm>
           <a:prstGeom prst="rect">
             <a:avLst/>
@@ -7732,144 +5765,34 @@
           <a:noFill/>
         </p:spPr>
         <p:txBody>
-          <a:bodyPr wrap="square" anchor="ctr">
+          <a:bodyPr wrap="square">
             <a:spAutoFit/>
           </a:bodyPr>
           <a:lstStyle/>
           <a:p>
-            <a:pPr algn="r">
-              <a:spcAft>
-                <a:spcPts val="0"/>
-              </a:spcAft>
-            </a:pPr>
-            <a:r>
-              <a:rPr sz="900" b="0" i="0">
+            <a:pPr algn="l"/>
+            <a:r>
+              <a:rPr sz="1400" b="1" i="0">
                 <a:solidFill>
                   <a:srgbClr val="FFFFFF"/>
                 </a:solidFill>
                 <a:latin typeface="Calibri"/>
               </a:rPr>
-              <a:t>8</a:t>
-            </a:r>
-          </a:p>
-        </p:txBody>
-      </p:sp>
-    </p:spTree>
-  </p:cSld>
-  <p:clrMapOvr>
-    <a:masterClrMapping/>
-  </p:clrMapOvr>
-</p:sld>
-</file>
-
-<file path=ppt/slides/slide9.xml><?xml version="1.0" encoding="utf-8"?>
-<p:sld xmlns:a="http://schemas.openxmlformats.org/drawingml/2006/main" xmlns:p="http://schemas.openxmlformats.org/presentationml/2006/main" xmlns:r="http://schemas.openxmlformats.org/officeDocument/2006/relationships">
-  <p:cSld>
-    <p:spTree>
-      <p:nvGrpSpPr>
-        <p:cNvPr id="1" name=""/>
-        <p:cNvGrpSpPr/>
-        <p:nvPr/>
-      </p:nvGrpSpPr>
-      <p:grpSpPr/>
-      <p:sp>
-        <p:nvSpPr>
-          <p:cNvPr id="2" name="Rectangle 1"/>
-          <p:cNvSpPr/>
-          <p:nvPr/>
-        </p:nvSpPr>
-        <p:spPr>
-          <a:xfrm>
-            <a:off x="0" y="0"/>
-            <a:ext cx="12191695" cy="960120"/>
-          </a:xfrm>
-          <a:prstGeom prst="rect">
-            <a:avLst/>
-          </a:prstGeom>
-          <a:solidFill>
-            <a:srgbClr val="F7F5F0"/>
-          </a:solidFill>
-          <a:ln>
-            <a:noFill/>
-          </a:ln>
-          <a:effectLst/>
-        </p:spPr>
-        <p:style>
-          <a:lnRef idx="1">
-            <a:schemeClr val="accent1"/>
-          </a:lnRef>
-          <a:fillRef idx="3">
-            <a:schemeClr val="accent1"/>
-          </a:fillRef>
-          <a:effectRef idx="2">
-            <a:schemeClr val="accent1"/>
-          </a:effectRef>
-          <a:fontRef idx="minor">
-            <a:schemeClr val="lt1"/>
-          </a:fontRef>
-        </p:style>
-        <p:txBody>
-          <a:bodyPr rtlCol="0" anchor="ctr"/>
-          <a:lstStyle/>
-          <a:p>
-            <a:pPr algn="ctr"/>
-          </a:p>
-        </p:txBody>
-      </p:sp>
-      <p:sp>
-        <p:nvSpPr>
-          <p:cNvPr id="3" name="Rectangle 2"/>
-          <p:cNvSpPr/>
-          <p:nvPr/>
-        </p:nvSpPr>
-        <p:spPr>
-          <a:xfrm>
-            <a:off x="0" y="0"/>
-            <a:ext cx="164592" cy="960120"/>
-          </a:xfrm>
-          <a:prstGeom prst="rect">
-            <a:avLst/>
-          </a:prstGeom>
-          <a:solidFill>
-            <a:srgbClr val="0D6E6E"/>
-          </a:solidFill>
-          <a:ln>
-            <a:noFill/>
-          </a:ln>
-          <a:effectLst/>
-        </p:spPr>
-        <p:style>
-          <a:lnRef idx="1">
-            <a:schemeClr val="accent1"/>
-          </a:lnRef>
-          <a:fillRef idx="3">
-            <a:schemeClr val="accent1"/>
-          </a:fillRef>
-          <a:effectRef idx="2">
-            <a:schemeClr val="accent1"/>
-          </a:effectRef>
-          <a:fontRef idx="minor">
-            <a:schemeClr val="lt1"/>
-          </a:fontRef>
-        </p:style>
-        <p:txBody>
-          <a:bodyPr rtlCol="0" anchor="ctr"/>
-          <a:lstStyle/>
-          <a:p>
-            <a:pPr algn="ctr"/>
-          </a:p>
-        </p:txBody>
-      </p:sp>
-      <p:sp>
-        <p:nvSpPr>
-          <p:cNvPr id="4" name="TextBox 3"/>
+              <a:t>Your health, our mission.</a:t>
+            </a:r>
+          </a:p>
+        </p:txBody>
+      </p:sp>
+      <p:sp>
+        <p:nvSpPr>
+          <p:cNvPr id="6" name="TextBox 5"/>
           <p:cNvSpPr txBox="1"/>
           <p:nvPr/>
         </p:nvSpPr>
         <p:spPr>
           <a:xfrm>
-            <a:off x="457200" y="109728"/>
-            <a:ext cx="10972800" cy="256032"/>
+            <a:off x="548640" y="6172200"/>
+            <a:ext cx="10972800" cy="274320"/>
           </a:xfrm>
           <a:prstGeom prst="rect">
             <a:avLst/>
@@ -7877,328 +5800,20 @@
           <a:noFill/>
         </p:spPr>
         <p:txBody>
-          <a:bodyPr wrap="square" anchor="t">
+          <a:bodyPr wrap="square">
             <a:spAutoFit/>
           </a:bodyPr>
           <a:lstStyle/>
           <a:p>
-            <a:pPr algn="l">
-              <a:spcAft>
-                <a:spcPts val="0"/>
-              </a:spcAft>
-            </a:pPr>
-            <a:r>
-              <a:rPr sz="1100" b="1" i="0">
+            <a:pPr algn="l"/>
+            <a:r>
+              <a:rPr sz="1200" b="0" i="0">
                 <a:solidFill>
-                  <a:srgbClr val="C45C26"/>
+                  <a:srgbClr val="F2C79B"/>
                 </a:solidFill>
                 <a:latin typeface="Calibri"/>
               </a:rPr>
-              <a:t>OUR MODEL</a:t>
-            </a:r>
-          </a:p>
-        </p:txBody>
-      </p:sp>
-      <p:sp>
-        <p:nvSpPr>
-          <p:cNvPr id="5" name="TextBox 4"/>
-          <p:cNvSpPr txBox="1"/>
-          <p:nvPr/>
-        </p:nvSpPr>
-        <p:spPr>
-          <a:xfrm>
-            <a:off x="457200" y="384048"/>
-            <a:ext cx="11247120" cy="475488"/>
-          </a:xfrm>
-          <a:prstGeom prst="rect">
-            <a:avLst/>
-          </a:prstGeom>
-          <a:noFill/>
-        </p:spPr>
-        <p:txBody>
-          <a:bodyPr wrap="square" anchor="t">
-            <a:spAutoFit/>
-          </a:bodyPr>
-          <a:lstStyle/>
-          <a:p>
-            <a:pPr algn="l">
-              <a:spcAft>
-                <a:spcPts val="0"/>
-              </a:spcAft>
-            </a:pPr>
-            <a:r>
-              <a:rPr sz="2200" b="1" i="0">
-                <a:solidFill>
-                  <a:srgbClr val="0A1F2E"/>
-                </a:solidFill>
-                <a:latin typeface="Calibri"/>
-              </a:rPr>
-              <a:t>Communities first — intelligence that serves care</a:t>
-            </a:r>
-          </a:p>
-        </p:txBody>
-      </p:sp>
-      <p:sp>
-        <p:nvSpPr>
-          <p:cNvPr id="6" name="TextBox 5"/>
-          <p:cNvSpPr txBox="1"/>
-          <p:nvPr/>
-        </p:nvSpPr>
-        <p:spPr>
-          <a:xfrm>
-            <a:off x="502920" y="1234440"/>
-            <a:ext cx="5760720" cy="5074920"/>
-          </a:xfrm>
-          <a:prstGeom prst="rect">
-            <a:avLst/>
-          </a:prstGeom>
-          <a:noFill/>
-        </p:spPr>
-        <p:txBody>
-          <a:bodyPr wrap="square">
-            <a:spAutoFit/>
-          </a:bodyPr>
-          <a:lstStyle/>
-          <a:p>
-            <a:pPr>
-              <a:spcAft>
-                <a:spcPts val="800"/>
-              </a:spcAft>
-            </a:pPr>
-            <a:r>
-              <a:rPr sz="1400">
-                <a:solidFill>
-                  <a:srgbClr val="1E2F38"/>
-                </a:solidFill>
-                <a:latin typeface="Calibri"/>
-              </a:rPr>
-              <a:t>•  Community members identify needs and own solutions</a:t>
-            </a:r>
-          </a:p>
-          <a:p>
-            <a:pPr>
-              <a:spcAft>
-                <a:spcPts val="800"/>
-              </a:spcAft>
-            </a:pPr>
-            <a:r>
-              <a:rPr sz="1400">
-                <a:solidFill>
-                  <a:srgbClr val="1E2F38"/>
-                </a:solidFill>
-                <a:latin typeface="Calibri"/>
-              </a:rPr>
-              <a:t>•  CHWs / VHTs bridge homes to clinics</a:t>
-            </a:r>
-          </a:p>
-          <a:p>
-            <a:pPr>
-              <a:spcAft>
-                <a:spcPts val="800"/>
-              </a:spcAft>
-            </a:pPr>
-            <a:r>
-              <a:rPr sz="1400">
-                <a:solidFill>
-                  <a:srgbClr val="1E2F38"/>
-                </a:solidFill>
-                <a:latin typeface="Calibri"/>
-              </a:rPr>
-              <a:t>•  FairBanks Community Reach programmes deliver outreach</a:t>
-            </a:r>
-          </a:p>
-          <a:p>
-            <a:pPr>
-              <a:spcAft>
-                <a:spcPts val="800"/>
-              </a:spcAft>
-            </a:pPr>
-            <a:r>
-              <a:rPr sz="1400">
-                <a:solidFill>
-                  <a:srgbClr val="1E2F38"/>
-                </a:solidFill>
-                <a:latin typeface="Calibri"/>
-              </a:rPr>
-              <a:t>•  FairBanks Medical Centre provides clinical care</a:t>
-            </a:r>
-          </a:p>
-          <a:p>
-            <a:pPr>
-              <a:spcAft>
-                <a:spcPts val="800"/>
-              </a:spcAft>
-            </a:pPr>
-            <a:r>
-              <a:rPr sz="1400">
-                <a:solidFill>
-                  <a:srgbClr val="1E2F38"/>
-                </a:solidFill>
-                <a:latin typeface="Calibri"/>
-              </a:rPr>
-              <a:t>•  Research, partnerships, and skills strengthen the system</a:t>
-            </a:r>
-          </a:p>
-          <a:p>
-            <a:pPr>
-              <a:spcAft>
-                <a:spcPts val="800"/>
-              </a:spcAft>
-            </a:pPr>
-            <a:r>
-              <a:rPr sz="1400">
-                <a:solidFill>
-                  <a:srgbClr val="1E2F38"/>
-                </a:solidFill>
-                <a:latin typeface="Calibri"/>
-              </a:rPr>
-              <a:t>•  Livelihoods and empowerment make health gains last</a:t>
-            </a:r>
-          </a:p>
-        </p:txBody>
-      </p:sp>
-      <p:pic>
-        <p:nvPicPr>
-          <p:cNvPr id="7" name="Picture 6" descr="gis_hotspots_opt.jpg"/>
-          <p:cNvPicPr>
-            <a:picLocks noChangeAspect="1"/>
-          </p:cNvPicPr>
-          <p:nvPr/>
-        </p:nvPicPr>
-        <p:blipFill>
-          <a:blip r:embed="rId2"/>
-          <a:stretch>
-            <a:fillRect/>
-          </a:stretch>
-        </p:blipFill>
-        <p:spPr>
-          <a:xfrm>
-            <a:off x="6492240" y="2035160"/>
-            <a:ext cx="5212080" cy="3473479"/>
-          </a:xfrm>
-          <a:prstGeom prst="rect">
-            <a:avLst/>
-          </a:prstGeom>
-        </p:spPr>
-      </p:pic>
-      <p:sp>
-        <p:nvSpPr>
-          <p:cNvPr id="8" name="Rectangle 7"/>
-          <p:cNvSpPr/>
-          <p:nvPr/>
-        </p:nvSpPr>
-        <p:spPr>
-          <a:xfrm>
-            <a:off x="0" y="6565392"/>
-            <a:ext cx="12191695" cy="292608"/>
-          </a:xfrm>
-          <a:prstGeom prst="rect">
-            <a:avLst/>
-          </a:prstGeom>
-          <a:solidFill>
-            <a:srgbClr val="0A1F2E"/>
-          </a:solidFill>
-          <a:ln>
-            <a:noFill/>
-          </a:ln>
-          <a:effectLst/>
-        </p:spPr>
-        <p:style>
-          <a:lnRef idx="1">
-            <a:schemeClr val="accent1"/>
-          </a:lnRef>
-          <a:fillRef idx="3">
-            <a:schemeClr val="accent1"/>
-          </a:fillRef>
-          <a:effectRef idx="2">
-            <a:schemeClr val="accent1"/>
-          </a:effectRef>
-          <a:fontRef idx="minor">
-            <a:schemeClr val="lt1"/>
-          </a:fontRef>
-        </p:style>
-        <p:txBody>
-          <a:bodyPr rtlCol="0" anchor="ctr"/>
-          <a:lstStyle/>
-          <a:p>
-            <a:pPr algn="ctr"/>
-          </a:p>
-        </p:txBody>
-      </p:sp>
-      <p:sp>
-        <p:nvSpPr>
-          <p:cNvPr id="9" name="TextBox 8"/>
-          <p:cNvSpPr txBox="1"/>
-          <p:nvPr/>
-        </p:nvSpPr>
-        <p:spPr>
-          <a:xfrm>
-            <a:off x="365760" y="6574536"/>
-            <a:ext cx="9144000" cy="274320"/>
-          </a:xfrm>
-          <a:prstGeom prst="rect">
-            <a:avLst/>
-          </a:prstGeom>
-          <a:noFill/>
-        </p:spPr>
-        <p:txBody>
-          <a:bodyPr wrap="square" anchor="ctr">
-            <a:spAutoFit/>
-          </a:bodyPr>
-          <a:lstStyle/>
-          <a:p>
-            <a:pPr algn="l">
-              <a:spcAft>
-                <a:spcPts val="0"/>
-              </a:spcAft>
-            </a:pPr>
-            <a:r>
-              <a:rPr sz="900" b="0" i="0">
-                <a:solidFill>
-                  <a:srgbClr val="FFFFFF"/>
-                </a:solidFill>
-                <a:latin typeface="Calibri"/>
-              </a:rPr>
-              <a:t>FairBanks FCHIP  |  AUDA-NEPAD Youth SRH Ambassadors Initiat  |  Your health, our mission.</a:t>
-            </a:r>
-          </a:p>
-        </p:txBody>
-      </p:sp>
-      <p:sp>
-        <p:nvSpPr>
-          <p:cNvPr id="10" name="TextBox 9"/>
-          <p:cNvSpPr txBox="1"/>
-          <p:nvPr/>
-        </p:nvSpPr>
-        <p:spPr>
-          <a:xfrm>
-            <a:off x="11094415" y="6574536"/>
-            <a:ext cx="731520" cy="274320"/>
-          </a:xfrm>
-          <a:prstGeom prst="rect">
-            <a:avLst/>
-          </a:prstGeom>
-          <a:noFill/>
-        </p:spPr>
-        <p:txBody>
-          <a:bodyPr wrap="square" anchor="ctr">
-            <a:spAutoFit/>
-          </a:bodyPr>
-          <a:lstStyle/>
-          <a:p>
-            <a:pPr algn="r">
-              <a:spcAft>
-                <a:spcPts val="0"/>
-              </a:spcAft>
-            </a:pPr>
-            <a:r>
-              <a:rPr sz="900" b="0" i="0">
-                <a:solidFill>
-                  <a:srgbClr val="FFFFFF"/>
-                </a:solidFill>
-                <a:latin typeface="Calibri"/>
-              </a:rPr>
-              <a:t>9</a:t>
+              <a:t>Application deadline: 17 July 2026</a:t>
             </a:r>
           </a:p>
         </p:txBody>

--- a/applications/auda-srh/documents/auda-srh_ppt.pptx
+++ b/applications/auda-srh/documents/auda-srh_ppt.pptx
@@ -3206,7 +3206,7 @@
         <p:spPr>
           <a:xfrm>
             <a:off x="548640" y="4434840"/>
-            <a:ext cx="10972800" cy="548640"/>
+            <a:ext cx="10972800" cy="457200"/>
           </a:xfrm>
           <a:prstGeom prst="rect">
             <a:avLst/>
@@ -3221,7 +3221,7 @@
           <a:p>
             <a:pPr algn="l"/>
             <a:r>
-              <a:rPr sz="2400" b="1" i="0">
+              <a:rPr sz="2200" b="1" i="0">
                 <a:solidFill>
                   <a:srgbClr val="FFFFFF"/>
                 </a:solidFill>
@@ -3240,8 +3240,43 @@
         </p:nvSpPr>
         <p:spPr>
           <a:xfrm>
-            <a:off x="548640" y="5257800"/>
-            <a:ext cx="10972800" cy="320040"/>
+            <a:off x="548640" y="4937760"/>
+            <a:ext cx="10972800" cy="274320"/>
+          </a:xfrm>
+          <a:prstGeom prst="rect">
+            <a:avLst/>
+          </a:prstGeom>
+          <a:noFill/>
+        </p:spPr>
+        <p:txBody>
+          <a:bodyPr wrap="square">
+            <a:spAutoFit/>
+          </a:bodyPr>
+          <a:lstStyle/>
+          <a:p>
+            <a:pPr algn="l"/>
+            <a:r>
+              <a:rPr sz="1300" b="1" i="1">
+                <a:solidFill>
+                  <a:srgbClr val="F2C79B"/>
+                </a:solidFill>
+                <a:latin typeface="Calibri"/>
+              </a:rPr>
+              <a:t>FairBanks Community Health Intelligence Platform (FCHIP)</a:t>
+            </a:r>
+          </a:p>
+        </p:txBody>
+      </p:sp>
+      <p:sp>
+        <p:nvSpPr>
+          <p:cNvPr id="7" name="TextBox 6"/>
+          <p:cNvSpPr txBox="1"/>
+          <p:nvPr/>
+        </p:nvSpPr>
+        <p:spPr>
+          <a:xfrm>
+            <a:off x="548640" y="5349240"/>
+            <a:ext cx="10972800" cy="274320"/>
           </a:xfrm>
           <a:prstGeom prst="rect">
             <a:avLst/>
@@ -3269,7 +3304,7 @@
       </p:sp>
       <p:sp>
         <p:nvSpPr>
-          <p:cNvPr id="7" name="TextBox 6"/>
+          <p:cNvPr id="8" name="TextBox 7"/>
           <p:cNvSpPr txBox="1"/>
           <p:nvPr/>
         </p:nvSpPr>

--- a/applications/auda-srh/documents/auda-srh_ppt.pptx
+++ b/applications/auda-srh/documents/auda-srh_ppt.pptx
@@ -3184,7 +3184,17 @@
           </a:bodyPr>
           <a:lstStyle/>
           <a:p>
-            <a:pPr algn="l"/>
+            <a:pPr algn="l">
+              <a:lnSpc>
+                <a:spcPct val="115000"/>
+              </a:lnSpc>
+              <a:spcBef>
+                <a:spcPts val="0"/>
+              </a:spcBef>
+              <a:spcAft>
+                <a:spcPts val="200"/>
+              </a:spcAft>
+            </a:pPr>
             <a:r>
               <a:rPr sz="1300" b="1" i="0">
                 <a:solidFill>
@@ -3219,7 +3229,17 @@
           </a:bodyPr>
           <a:lstStyle/>
           <a:p>
-            <a:pPr algn="l"/>
+            <a:pPr algn="l">
+              <a:lnSpc>
+                <a:spcPct val="115000"/>
+              </a:lnSpc>
+              <a:spcBef>
+                <a:spcPts val="0"/>
+              </a:spcBef>
+              <a:spcAft>
+                <a:spcPts val="200"/>
+              </a:spcAft>
+            </a:pPr>
             <a:r>
               <a:rPr sz="2200" b="1" i="0">
                 <a:solidFill>
@@ -3254,7 +3274,17 @@
           </a:bodyPr>
           <a:lstStyle/>
           <a:p>
-            <a:pPr algn="l"/>
+            <a:pPr algn="l">
+              <a:lnSpc>
+                <a:spcPct val="115000"/>
+              </a:lnSpc>
+              <a:spcBef>
+                <a:spcPts val="0"/>
+              </a:spcBef>
+              <a:spcAft>
+                <a:spcPts val="200"/>
+              </a:spcAft>
+            </a:pPr>
             <a:r>
               <a:rPr sz="1300" b="1" i="1">
                 <a:solidFill>
@@ -3289,7 +3319,17 @@
           </a:bodyPr>
           <a:lstStyle/>
           <a:p>
-            <a:pPr algn="l"/>
+            <a:pPr algn="l">
+              <a:lnSpc>
+                <a:spcPct val="115000"/>
+              </a:lnSpc>
+              <a:spcBef>
+                <a:spcPts val="0"/>
+              </a:spcBef>
+              <a:spcAft>
+                <a:spcPts val="200"/>
+              </a:spcAft>
+            </a:pPr>
             <a:r>
               <a:rPr sz="1400" b="1" i="0">
                 <a:solidFill>
@@ -3324,7 +3364,17 @@
           </a:bodyPr>
           <a:lstStyle/>
           <a:p>
-            <a:pPr algn="l"/>
+            <a:pPr algn="l">
+              <a:lnSpc>
+                <a:spcPct val="115000"/>
+              </a:lnSpc>
+              <a:spcBef>
+                <a:spcPts val="0"/>
+              </a:spcBef>
+              <a:spcAft>
+                <a:spcPts val="200"/>
+              </a:spcAft>
+            </a:pPr>
             <a:r>
               <a:rPr sz="1200" b="1" i="0">
                 <a:solidFill>
@@ -3463,7 +3513,17 @@
           </a:bodyPr>
           <a:lstStyle/>
           <a:p>
-            <a:pPr algn="l"/>
+            <a:pPr algn="l">
+              <a:lnSpc>
+                <a:spcPct val="115000"/>
+              </a:lnSpc>
+              <a:spcBef>
+                <a:spcPts val="0"/>
+              </a:spcBef>
+              <a:spcAft>
+                <a:spcPts val="200"/>
+              </a:spcAft>
+            </a:pPr>
             <a:r>
               <a:rPr sz="1100" b="1" i="0">
                 <a:solidFill>
@@ -3498,7 +3558,17 @@
           </a:bodyPr>
           <a:lstStyle/>
           <a:p>
-            <a:pPr algn="l"/>
+            <a:pPr algn="l">
+              <a:lnSpc>
+                <a:spcPct val="115000"/>
+              </a:lnSpc>
+              <a:spcBef>
+                <a:spcPts val="0"/>
+              </a:spcBef>
+              <a:spcAft>
+                <a:spcPts val="200"/>
+              </a:spcAft>
+            </a:pPr>
             <a:r>
               <a:rPr sz="2400" b="1" i="0">
                 <a:solidFill>
@@ -3533,17 +3603,69 @@
           </a:bodyPr>
           <a:lstStyle/>
           <a:p>
-            <a:pPr algn="l"/>
-            <a:r>
-              <a:rPr sz="1800" b="0" i="0">
+            <a:pPr algn="l">
+              <a:lnSpc>
+                <a:spcPct val="128000"/>
+              </a:lnSpc>
+              <a:spcBef>
+                <a:spcPts val="0"/>
+              </a:spcBef>
+              <a:spcAft>
+                <a:spcPts val="1400"/>
+              </a:spcAft>
+            </a:pPr>
+            <a:r>
+              <a:rPr sz="2600" b="0" i="0">
                 <a:solidFill>
                   <a:srgbClr val="1E2F38"/>
                 </a:solidFill>
                 <a:latin typeface="Calibri"/>
               </a:rPr>
-              <a:t>FairBanks Community Reach runs maternal &amp; adolescent programmes with CHWs/VHTs.
-Ambassadors must connect field truth to policy — that is already my work.
-FCHIP adds evidence on where SRH gaps cluster.</a:t>
+              <a:t>FairBanks Community Reach runs maternal &amp; adolescent programmes with CHWs/VHTs.</a:t>
+            </a:r>
+          </a:p>
+          <a:p>
+            <a:pPr algn="l">
+              <a:lnSpc>
+                <a:spcPct val="128000"/>
+              </a:lnSpc>
+              <a:spcBef>
+                <a:spcPts val="0"/>
+              </a:spcBef>
+              <a:spcAft>
+                <a:spcPts val="1400"/>
+              </a:spcAft>
+            </a:pPr>
+            <a:r>
+              <a:rPr sz="2600" b="0" i="0">
+                <a:solidFill>
+                  <a:srgbClr val="1E2F38"/>
+                </a:solidFill>
+                <a:latin typeface="Calibri"/>
+              </a:rPr>
+              <a:t>Ambassadors must connect field truth to policy — that is already my work.</a:t>
+            </a:r>
+          </a:p>
+          <a:p>
+            <a:pPr algn="l">
+              <a:lnSpc>
+                <a:spcPct val="128000"/>
+              </a:lnSpc>
+              <a:spcBef>
+                <a:spcPts val="0"/>
+              </a:spcBef>
+              <a:spcAft>
+                <a:spcPts val="200"/>
+              </a:spcAft>
+            </a:pPr>
+            <a:r>
+              <a:rPr sz="2600" b="0" i="0">
+                <a:solidFill>
+                  <a:srgbClr val="1E2F38"/>
+                </a:solidFill>
+                <a:latin typeface="Calibri"/>
+              </a:rPr>
+              <a:t>FCHIP adds evidence on where SRH gaps cluster.</a:t>
             </a:r>
           </a:p>
         </p:txBody>
@@ -3613,7 +3735,17 @@
           </a:bodyPr>
           <a:lstStyle/>
           <a:p>
-            <a:pPr algn="l"/>
+            <a:pPr algn="l">
+              <a:lnSpc>
+                <a:spcPct val="115000"/>
+              </a:lnSpc>
+              <a:spcBef>
+                <a:spcPts val="0"/>
+              </a:spcBef>
+              <a:spcAft>
+                <a:spcPts val="200"/>
+              </a:spcAft>
+            </a:pPr>
             <a:r>
               <a:rPr sz="900" b="0" i="0">
                 <a:solidFill>
@@ -3648,7 +3780,17 @@
           </a:bodyPr>
           <a:lstStyle/>
           <a:p>
-            <a:pPr algn="r"/>
+            <a:pPr algn="r">
+              <a:lnSpc>
+                <a:spcPct val="115000"/>
+              </a:lnSpc>
+              <a:spcBef>
+                <a:spcPts val="0"/>
+              </a:spcBef>
+              <a:spcAft>
+                <a:spcPts val="200"/>
+              </a:spcAft>
+            </a:pPr>
             <a:r>
               <a:rPr sz="900" b="0" i="0">
                 <a:solidFill>
@@ -3787,7 +3929,17 @@
           </a:bodyPr>
           <a:lstStyle/>
           <a:p>
-            <a:pPr algn="l"/>
+            <a:pPr algn="l">
+              <a:lnSpc>
+                <a:spcPct val="115000"/>
+              </a:lnSpc>
+              <a:spcBef>
+                <a:spcPts val="0"/>
+              </a:spcBef>
+              <a:spcAft>
+                <a:spcPts val="200"/>
+              </a:spcAft>
+            </a:pPr>
             <a:r>
               <a:rPr sz="1100" b="1" i="0">
                 <a:solidFill>
@@ -3822,7 +3974,17 @@
           </a:bodyPr>
           <a:lstStyle/>
           <a:p>
-            <a:pPr algn="l"/>
+            <a:pPr algn="l">
+              <a:lnSpc>
+                <a:spcPct val="115000"/>
+              </a:lnSpc>
+              <a:spcBef>
+                <a:spcPts val="0"/>
+              </a:spcBef>
+              <a:spcAft>
+                <a:spcPts val="200"/>
+              </a:spcAft>
+            </a:pPr>
             <a:r>
               <a:rPr sz="2400" b="1" i="0">
                 <a:solidFill>
@@ -3881,18 +4043,91 @@
           </a:bodyPr>
           <a:lstStyle/>
           <a:p>
-            <a:pPr algn="l"/>
-            <a:r>
-              <a:rPr sz="1500" b="0" i="0">
+            <a:pPr algn="l">
+              <a:lnSpc>
+                <a:spcPct val="128000"/>
+              </a:lnSpc>
+              <a:spcBef>
+                <a:spcPts val="0"/>
+              </a:spcBef>
+              <a:spcAft>
+                <a:spcPts val="1300"/>
+              </a:spcAft>
+            </a:pPr>
+            <a:r>
+              <a:rPr sz="2400" b="0" i="0">
                 <a:solidFill>
                   <a:srgbClr val="1E2F38"/>
                 </a:solidFill>
                 <a:latin typeface="Calibri"/>
               </a:rPr>
-              <a:t>• School and community dialogues on adolescent SRH through FairBanks outreach
-• Maternal health education linking ANC uptake, safe pregnancy, and partner involvement
-• Digital content that meets young people where they are — without shame or jargon
-• Peer mobilisation through CHWs/VHTs who already hold community trust</a:t>
+              <a:t>• School and community dialogues on adolescent SRH through FairBanks outreach</a:t>
+            </a:r>
+          </a:p>
+          <a:p>
+            <a:pPr algn="l">
+              <a:lnSpc>
+                <a:spcPct val="128000"/>
+              </a:lnSpc>
+              <a:spcBef>
+                <a:spcPts val="0"/>
+              </a:spcBef>
+              <a:spcAft>
+                <a:spcPts val="1300"/>
+              </a:spcAft>
+            </a:pPr>
+            <a:r>
+              <a:rPr sz="2400" b="0" i="0">
+                <a:solidFill>
+                  <a:srgbClr val="1E2F38"/>
+                </a:solidFill>
+                <a:latin typeface="Calibri"/>
+              </a:rPr>
+              <a:t>• Maternal health education linking ANC uptake, safe pregnancy, and partner involvement</a:t>
+            </a:r>
+          </a:p>
+          <a:p>
+            <a:pPr algn="l">
+              <a:lnSpc>
+                <a:spcPct val="128000"/>
+              </a:lnSpc>
+              <a:spcBef>
+                <a:spcPts val="0"/>
+              </a:spcBef>
+              <a:spcAft>
+                <a:spcPts val="1300"/>
+              </a:spcAft>
+            </a:pPr>
+            <a:r>
+              <a:rPr sz="2400" b="0" i="0">
+                <a:solidFill>
+                  <a:srgbClr val="1E2F38"/>
+                </a:solidFill>
+                <a:latin typeface="Calibri"/>
+              </a:rPr>
+              <a:t>• Digital content that meets young people where they are — without shame or jargon</a:t>
+            </a:r>
+          </a:p>
+          <a:p>
+            <a:pPr algn="l">
+              <a:lnSpc>
+                <a:spcPct val="128000"/>
+              </a:lnSpc>
+              <a:spcBef>
+                <a:spcPts val="0"/>
+              </a:spcBef>
+              <a:spcAft>
+                <a:spcPts val="200"/>
+              </a:spcAft>
+            </a:pPr>
+            <a:r>
+              <a:rPr sz="2400" b="0" i="0">
+                <a:solidFill>
+                  <a:srgbClr val="1E2F38"/>
+                </a:solidFill>
+                <a:latin typeface="Calibri"/>
+              </a:rPr>
+              <a:t>• Peer mobilisation through CHWs/VHTs who already hold community trust</a:t>
             </a:r>
           </a:p>
         </p:txBody>
@@ -3962,7 +4197,17 @@
           </a:bodyPr>
           <a:lstStyle/>
           <a:p>
-            <a:pPr algn="l"/>
+            <a:pPr algn="l">
+              <a:lnSpc>
+                <a:spcPct val="115000"/>
+              </a:lnSpc>
+              <a:spcBef>
+                <a:spcPts val="0"/>
+              </a:spcBef>
+              <a:spcAft>
+                <a:spcPts val="200"/>
+              </a:spcAft>
+            </a:pPr>
             <a:r>
               <a:rPr sz="900" b="0" i="0">
                 <a:solidFill>
@@ -3997,7 +4242,17 @@
           </a:bodyPr>
           <a:lstStyle/>
           <a:p>
-            <a:pPr algn="r"/>
+            <a:pPr algn="r">
+              <a:lnSpc>
+                <a:spcPct val="115000"/>
+              </a:lnSpc>
+              <a:spcBef>
+                <a:spcPts val="0"/>
+              </a:spcBef>
+              <a:spcAft>
+                <a:spcPts val="200"/>
+              </a:spcAft>
+            </a:pPr>
             <a:r>
               <a:rPr sz="900" b="0" i="0">
                 <a:solidFill>
@@ -4136,7 +4391,17 @@
           </a:bodyPr>
           <a:lstStyle/>
           <a:p>
-            <a:pPr algn="l"/>
+            <a:pPr algn="l">
+              <a:lnSpc>
+                <a:spcPct val="115000"/>
+              </a:lnSpc>
+              <a:spcBef>
+                <a:spcPts val="0"/>
+              </a:spcBef>
+              <a:spcAft>
+                <a:spcPts val="200"/>
+              </a:spcAft>
+            </a:pPr>
             <a:r>
               <a:rPr sz="1100" b="1" i="0">
                 <a:solidFill>
@@ -4171,7 +4436,17 @@
           </a:bodyPr>
           <a:lstStyle/>
           <a:p>
-            <a:pPr algn="l"/>
+            <a:pPr algn="l">
+              <a:lnSpc>
+                <a:spcPct val="115000"/>
+              </a:lnSpc>
+              <a:spcBef>
+                <a:spcPts val="0"/>
+              </a:spcBef>
+              <a:spcAft>
+                <a:spcPts val="200"/>
+              </a:spcAft>
+            </a:pPr>
             <a:r>
               <a:rPr sz="2400" b="1" i="0">
                 <a:solidFill>
@@ -4230,17 +4505,69 @@
           </a:bodyPr>
           <a:lstStyle/>
           <a:p>
-            <a:pPr algn="l"/>
-            <a:r>
-              <a:rPr sz="1600" b="0" i="0">
+            <a:pPr algn="l">
+              <a:lnSpc>
+                <a:spcPct val="128000"/>
+              </a:lnSpc>
+              <a:spcBef>
+                <a:spcPts val="0"/>
+              </a:spcBef>
+              <a:spcAft>
+                <a:spcPts val="1400"/>
+              </a:spcAft>
+            </a:pPr>
+            <a:r>
+              <a:rPr sz="2600" b="0" i="0">
                 <a:solidFill>
                   <a:srgbClr val="3A4A54"/>
                 </a:solidFill>
                 <a:latin typeface="Calibri"/>
               </a:rPr>
-              <a:t>Bukoto · Kyebando · Kisaasi · Kamwokya · Kikaaya
-CHWs translate SRH into trusted local action
-Digital + in-person — no shame, no jargon</a:t>
+              <a:t>Bukoto · Kyebando · Kisaasi · Kamwokya · Kikaaya</a:t>
+            </a:r>
+          </a:p>
+          <a:p>
+            <a:pPr algn="l">
+              <a:lnSpc>
+                <a:spcPct val="128000"/>
+              </a:lnSpc>
+              <a:spcBef>
+                <a:spcPts val="0"/>
+              </a:spcBef>
+              <a:spcAft>
+                <a:spcPts val="1400"/>
+              </a:spcAft>
+            </a:pPr>
+            <a:r>
+              <a:rPr sz="2600" b="0" i="0">
+                <a:solidFill>
+                  <a:srgbClr val="3A4A54"/>
+                </a:solidFill>
+                <a:latin typeface="Calibri"/>
+              </a:rPr>
+              <a:t>CHWs translate SRH into trusted local action</a:t>
+            </a:r>
+          </a:p>
+          <a:p>
+            <a:pPr algn="l">
+              <a:lnSpc>
+                <a:spcPct val="128000"/>
+              </a:lnSpc>
+              <a:spcBef>
+                <a:spcPts val="0"/>
+              </a:spcBef>
+              <a:spcAft>
+                <a:spcPts val="200"/>
+              </a:spcAft>
+            </a:pPr>
+            <a:r>
+              <a:rPr sz="2600" b="0" i="0">
+                <a:solidFill>
+                  <a:srgbClr val="3A4A54"/>
+                </a:solidFill>
+                <a:latin typeface="Calibri"/>
+              </a:rPr>
+              <a:t>Digital + in-person — no shame, no jargon</a:t>
             </a:r>
           </a:p>
         </p:txBody>
@@ -4310,7 +4637,17 @@
           </a:bodyPr>
           <a:lstStyle/>
           <a:p>
-            <a:pPr algn="l"/>
+            <a:pPr algn="l">
+              <a:lnSpc>
+                <a:spcPct val="115000"/>
+              </a:lnSpc>
+              <a:spcBef>
+                <a:spcPts val="0"/>
+              </a:spcBef>
+              <a:spcAft>
+                <a:spcPts val="200"/>
+              </a:spcAft>
+            </a:pPr>
             <a:r>
               <a:rPr sz="900" b="0" i="0">
                 <a:solidFill>
@@ -4345,7 +4682,17 @@
           </a:bodyPr>
           <a:lstStyle/>
           <a:p>
-            <a:pPr algn="r"/>
+            <a:pPr algn="r">
+              <a:lnSpc>
+                <a:spcPct val="115000"/>
+              </a:lnSpc>
+              <a:spcBef>
+                <a:spcPts val="0"/>
+              </a:spcBef>
+              <a:spcAft>
+                <a:spcPts val="200"/>
+              </a:spcAft>
+            </a:pPr>
             <a:r>
               <a:rPr sz="900" b="0" i="0">
                 <a:solidFill>
@@ -4484,7 +4831,17 @@
           </a:bodyPr>
           <a:lstStyle/>
           <a:p>
-            <a:pPr algn="l"/>
+            <a:pPr algn="l">
+              <a:lnSpc>
+                <a:spcPct val="115000"/>
+              </a:lnSpc>
+              <a:spcBef>
+                <a:spcPts val="0"/>
+              </a:spcBef>
+              <a:spcAft>
+                <a:spcPts val="200"/>
+              </a:spcAft>
+            </a:pPr>
             <a:r>
               <a:rPr sz="1100" b="1" i="0">
                 <a:solidFill>
@@ -4519,7 +4876,17 @@
           </a:bodyPr>
           <a:lstStyle/>
           <a:p>
-            <a:pPr algn="l"/>
+            <a:pPr algn="l">
+              <a:lnSpc>
+                <a:spcPct val="115000"/>
+              </a:lnSpc>
+              <a:spcBef>
+                <a:spcPts val="0"/>
+              </a:spcBef>
+              <a:spcAft>
+                <a:spcPts val="200"/>
+              </a:spcAft>
+            </a:pPr>
             <a:r>
               <a:rPr sz="2400" b="1" i="0">
                 <a:solidFill>
@@ -4599,9 +4966,19 @@
           </a:bodyPr>
           <a:lstStyle/>
           <a:p>
-            <a:pPr algn="l"/>
-            <a:r>
-              <a:rPr sz="1500" b="0" i="0">
+            <a:pPr algn="l">
+              <a:lnSpc>
+                <a:spcPct val="115000"/>
+              </a:lnSpc>
+              <a:spcBef>
+                <a:spcPts val="0"/>
+              </a:spcBef>
+              <a:spcAft>
+                <a:spcPts val="200"/>
+              </a:spcAft>
+            </a:pPr>
+            <a:r>
+              <a:rPr sz="1900" b="0" i="0">
                 <a:solidFill>
                   <a:srgbClr val="1E2F38"/>
                 </a:solidFill>
@@ -4679,9 +5056,19 @@
           </a:bodyPr>
           <a:lstStyle/>
           <a:p>
-            <a:pPr algn="l"/>
-            <a:r>
-              <a:rPr sz="1500" b="0" i="0">
+            <a:pPr algn="l">
+              <a:lnSpc>
+                <a:spcPct val="115000"/>
+              </a:lnSpc>
+              <a:spcBef>
+                <a:spcPts val="0"/>
+              </a:spcBef>
+              <a:spcAft>
+                <a:spcPts val="200"/>
+              </a:spcAft>
+            </a:pPr>
+            <a:r>
+              <a:rPr sz="1900" b="0" i="0">
                 <a:solidFill>
                   <a:srgbClr val="1E2F38"/>
                 </a:solidFill>
@@ -4759,9 +5146,19 @@
           </a:bodyPr>
           <a:lstStyle/>
           <a:p>
-            <a:pPr algn="l"/>
-            <a:r>
-              <a:rPr sz="1500" b="0" i="0">
+            <a:pPr algn="l">
+              <a:lnSpc>
+                <a:spcPct val="115000"/>
+              </a:lnSpc>
+              <a:spcBef>
+                <a:spcPts val="0"/>
+              </a:spcBef>
+              <a:spcAft>
+                <a:spcPts val="200"/>
+              </a:spcAft>
+            </a:pPr>
+            <a:r>
+              <a:rPr sz="1900" b="0" i="0">
                 <a:solidFill>
                   <a:srgbClr val="1E2F38"/>
                 </a:solidFill>
@@ -4839,9 +5236,19 @@
           </a:bodyPr>
           <a:lstStyle/>
           <a:p>
-            <a:pPr algn="l"/>
-            <a:r>
-              <a:rPr sz="1500" b="0" i="0">
+            <a:pPr algn="l">
+              <a:lnSpc>
+                <a:spcPct val="115000"/>
+              </a:lnSpc>
+              <a:spcBef>
+                <a:spcPts val="0"/>
+              </a:spcBef>
+              <a:spcAft>
+                <a:spcPts val="200"/>
+              </a:spcAft>
+            </a:pPr>
+            <a:r>
+              <a:rPr sz="1900" b="0" i="0">
                 <a:solidFill>
                   <a:srgbClr val="1E2F38"/>
                 </a:solidFill>
@@ -4917,7 +5324,17 @@
           </a:bodyPr>
           <a:lstStyle/>
           <a:p>
-            <a:pPr algn="l"/>
+            <a:pPr algn="l">
+              <a:lnSpc>
+                <a:spcPct val="115000"/>
+              </a:lnSpc>
+              <a:spcBef>
+                <a:spcPts val="0"/>
+              </a:spcBef>
+              <a:spcAft>
+                <a:spcPts val="200"/>
+              </a:spcAft>
+            </a:pPr>
             <a:r>
               <a:rPr sz="900" b="0" i="0">
                 <a:solidFill>
@@ -4952,7 +5369,17 @@
           </a:bodyPr>
           <a:lstStyle/>
           <a:p>
-            <a:pPr algn="r"/>
+            <a:pPr algn="r">
+              <a:lnSpc>
+                <a:spcPct val="115000"/>
+              </a:lnSpc>
+              <a:spcBef>
+                <a:spcPts val="0"/>
+              </a:spcBef>
+              <a:spcAft>
+                <a:spcPts val="200"/>
+              </a:spcAft>
+            </a:pPr>
             <a:r>
               <a:rPr sz="900" b="0" i="0">
                 <a:solidFill>
@@ -5091,7 +5518,17 @@
           </a:bodyPr>
           <a:lstStyle/>
           <a:p>
-            <a:pPr algn="l"/>
+            <a:pPr algn="l">
+              <a:lnSpc>
+                <a:spcPct val="115000"/>
+              </a:lnSpc>
+              <a:spcBef>
+                <a:spcPts val="0"/>
+              </a:spcBef>
+              <a:spcAft>
+                <a:spcPts val="200"/>
+              </a:spcAft>
+            </a:pPr>
             <a:r>
               <a:rPr sz="1100" b="1" i="0">
                 <a:solidFill>
@@ -5126,7 +5563,17 @@
           </a:bodyPr>
           <a:lstStyle/>
           <a:p>
-            <a:pPr algn="l"/>
+            <a:pPr algn="l">
+              <a:lnSpc>
+                <a:spcPct val="115000"/>
+              </a:lnSpc>
+              <a:spcBef>
+                <a:spcPts val="0"/>
+              </a:spcBef>
+              <a:spcAft>
+                <a:spcPts val="200"/>
+              </a:spcAft>
+            </a:pPr>
             <a:r>
               <a:rPr sz="2400" b="1" i="0">
                 <a:solidFill>
@@ -5185,18 +5632,91 @@
           </a:bodyPr>
           <a:lstStyle/>
           <a:p>
-            <a:pPr algn="l"/>
-            <a:r>
-              <a:rPr sz="1400" b="0" i="0">
+            <a:pPr algn="l">
+              <a:lnSpc>
+                <a:spcPct val="128000"/>
+              </a:lnSpc>
+              <a:spcBef>
+                <a:spcPts val="0"/>
+              </a:spcBef>
+              <a:spcAft>
+                <a:spcPts val="1400"/>
+              </a:spcAft>
+            </a:pPr>
+            <a:r>
+              <a:rPr sz="2600" b="0" i="0">
                 <a:solidFill>
                   <a:srgbClr val="1E2F38"/>
                 </a:solidFill>
                 <a:latin typeface="Calibri"/>
               </a:rPr>
-              <a:t>• Monthly advocacy content tied to outreach calendars and adolescent/maternal programmes
-• Report anonymised community insights upward — what youth actually ask in the field
-• Support A2DSRH and Energize Africa messaging with honest, local-language examples
-• Mentor younger peer advocates through FairBanks Community Reach volunteer pathways</a:t>
+              <a:t>• Monthly advocacy content tied to outreach calendars and adolescent/maternal programmes</a:t>
+            </a:r>
+          </a:p>
+          <a:p>
+            <a:pPr algn="l">
+              <a:lnSpc>
+                <a:spcPct val="128000"/>
+              </a:lnSpc>
+              <a:spcBef>
+                <a:spcPts val="0"/>
+              </a:spcBef>
+              <a:spcAft>
+                <a:spcPts val="1400"/>
+              </a:spcAft>
+            </a:pPr>
+            <a:r>
+              <a:rPr sz="2600" b="0" i="0">
+                <a:solidFill>
+                  <a:srgbClr val="1E2F38"/>
+                </a:solidFill>
+                <a:latin typeface="Calibri"/>
+              </a:rPr>
+              <a:t>• Report anonymised community insights upward — what youth actually ask in the field</a:t>
+            </a:r>
+          </a:p>
+          <a:p>
+            <a:pPr algn="l">
+              <a:lnSpc>
+                <a:spcPct val="128000"/>
+              </a:lnSpc>
+              <a:spcBef>
+                <a:spcPts val="0"/>
+              </a:spcBef>
+              <a:spcAft>
+                <a:spcPts val="1400"/>
+              </a:spcAft>
+            </a:pPr>
+            <a:r>
+              <a:rPr sz="2600" b="0" i="0">
+                <a:solidFill>
+                  <a:srgbClr val="1E2F38"/>
+                </a:solidFill>
+                <a:latin typeface="Calibri"/>
+              </a:rPr>
+              <a:t>• Support A2DSRH and Energize Africa messaging with honest, local-language examples</a:t>
+            </a:r>
+          </a:p>
+          <a:p>
+            <a:pPr algn="l">
+              <a:lnSpc>
+                <a:spcPct val="128000"/>
+              </a:lnSpc>
+              <a:spcBef>
+                <a:spcPts val="0"/>
+              </a:spcBef>
+              <a:spcAft>
+                <a:spcPts val="200"/>
+              </a:spcAft>
+            </a:pPr>
+            <a:r>
+              <a:rPr sz="2600" b="0" i="0">
+                <a:solidFill>
+                  <a:srgbClr val="1E2F38"/>
+                </a:solidFill>
+                <a:latin typeface="Calibri"/>
+              </a:rPr>
+              <a:t>• Mentor younger peer advocates through FairBanks Community Reach volunteer pathways</a:t>
             </a:r>
           </a:p>
         </p:txBody>
@@ -5266,7 +5786,17 @@
           </a:bodyPr>
           <a:lstStyle/>
           <a:p>
-            <a:pPr algn="l"/>
+            <a:pPr algn="l">
+              <a:lnSpc>
+                <a:spcPct val="115000"/>
+              </a:lnSpc>
+              <a:spcBef>
+                <a:spcPts val="0"/>
+              </a:spcBef>
+              <a:spcAft>
+                <a:spcPts val="200"/>
+              </a:spcAft>
+            </a:pPr>
             <a:r>
               <a:rPr sz="900" b="0" i="0">
                 <a:solidFill>
@@ -5301,7 +5831,17 @@
           </a:bodyPr>
           <a:lstStyle/>
           <a:p>
-            <a:pPr algn="r"/>
+            <a:pPr algn="r">
+              <a:lnSpc>
+                <a:spcPct val="115000"/>
+              </a:lnSpc>
+              <a:spcBef>
+                <a:spcPts val="0"/>
+              </a:spcBef>
+              <a:spcAft>
+                <a:spcPts val="200"/>
+              </a:spcAft>
+            </a:pPr>
             <a:r>
               <a:rPr sz="900" b="0" i="0">
                 <a:solidFill>
@@ -5440,7 +5980,17 @@
           </a:bodyPr>
           <a:lstStyle/>
           <a:p>
-            <a:pPr algn="l"/>
+            <a:pPr algn="l">
+              <a:lnSpc>
+                <a:spcPct val="115000"/>
+              </a:lnSpc>
+              <a:spcBef>
+                <a:spcPts val="0"/>
+              </a:spcBef>
+              <a:spcAft>
+                <a:spcPts val="200"/>
+              </a:spcAft>
+            </a:pPr>
             <a:r>
               <a:rPr sz="1100" b="1" i="0">
                 <a:solidFill>
@@ -5475,7 +6025,17 @@
           </a:bodyPr>
           <a:lstStyle/>
           <a:p>
-            <a:pPr algn="l"/>
+            <a:pPr algn="l">
+              <a:lnSpc>
+                <a:spcPct val="115000"/>
+              </a:lnSpc>
+              <a:spcBef>
+                <a:spcPts val="0"/>
+              </a:spcBef>
+              <a:spcAft>
+                <a:spcPts val="200"/>
+              </a:spcAft>
+            </a:pPr>
             <a:r>
               <a:rPr sz="2400" b="1" i="0">
                 <a:solidFill>
@@ -5510,18 +6070,91 @@
           </a:bodyPr>
           <a:lstStyle/>
           <a:p>
-            <a:pPr algn="l"/>
-            <a:r>
-              <a:rPr sz="1600" b="0" i="0">
+            <a:pPr algn="l">
+              <a:lnSpc>
+                <a:spcPct val="128000"/>
+              </a:lnSpc>
+              <a:spcBef>
+                <a:spcPts val="0"/>
+              </a:spcBef>
+              <a:spcAft>
+                <a:spcPts val="1300"/>
+              </a:spcAft>
+            </a:pPr>
+            <a:r>
+              <a:rPr sz="2400" b="0" i="0">
                 <a:solidFill>
                   <a:srgbClr val="1E2F38"/>
                 </a:solidFill>
                 <a:latin typeface="Calibri"/>
               </a:rPr>
-              <a:t>• Official ambassador recognition and continental SRH platforms
-• Training, mentorship, and networking with policy and youth leaders
-• Visibility to translate Kampala outreach lessons into Africa-wide dialogue
-• Sponsored participation in selected AUDA-NEPAD engagements where appropriate</a:t>
+              <a:t>• Official ambassador recognition and continental SRH platforms</a:t>
+            </a:r>
+          </a:p>
+          <a:p>
+            <a:pPr algn="l">
+              <a:lnSpc>
+                <a:spcPct val="128000"/>
+              </a:lnSpc>
+              <a:spcBef>
+                <a:spcPts val="0"/>
+              </a:spcBef>
+              <a:spcAft>
+                <a:spcPts val="1300"/>
+              </a:spcAft>
+            </a:pPr>
+            <a:r>
+              <a:rPr sz="2400" b="0" i="0">
+                <a:solidFill>
+                  <a:srgbClr val="1E2F38"/>
+                </a:solidFill>
+                <a:latin typeface="Calibri"/>
+              </a:rPr>
+              <a:t>• Training, mentorship, and networking with policy and youth leaders</a:t>
+            </a:r>
+          </a:p>
+          <a:p>
+            <a:pPr algn="l">
+              <a:lnSpc>
+                <a:spcPct val="128000"/>
+              </a:lnSpc>
+              <a:spcBef>
+                <a:spcPts val="0"/>
+              </a:spcBef>
+              <a:spcAft>
+                <a:spcPts val="1300"/>
+              </a:spcAft>
+            </a:pPr>
+            <a:r>
+              <a:rPr sz="2400" b="0" i="0">
+                <a:solidFill>
+                  <a:srgbClr val="1E2F38"/>
+                </a:solidFill>
+                <a:latin typeface="Calibri"/>
+              </a:rPr>
+              <a:t>• Visibility to translate Kampala outreach lessons into Africa-wide dialogue</a:t>
+            </a:r>
+          </a:p>
+          <a:p>
+            <a:pPr algn="l">
+              <a:lnSpc>
+                <a:spcPct val="128000"/>
+              </a:lnSpc>
+              <a:spcBef>
+                <a:spcPts val="0"/>
+              </a:spcBef>
+              <a:spcAft>
+                <a:spcPts val="200"/>
+              </a:spcAft>
+            </a:pPr>
+            <a:r>
+              <a:rPr sz="2400" b="0" i="0">
+                <a:solidFill>
+                  <a:srgbClr val="1E2F38"/>
+                </a:solidFill>
+                <a:latin typeface="Calibri"/>
+              </a:rPr>
+              <a:t>• Sponsored participation in selected AUDA-NEPAD engagements where appropriate</a:t>
             </a:r>
           </a:p>
         </p:txBody>
@@ -5615,7 +6248,17 @@
           </a:bodyPr>
           <a:lstStyle/>
           <a:p>
-            <a:pPr algn="l"/>
+            <a:pPr algn="l">
+              <a:lnSpc>
+                <a:spcPct val="115000"/>
+              </a:lnSpc>
+              <a:spcBef>
+                <a:spcPts val="0"/>
+              </a:spcBef>
+              <a:spcAft>
+                <a:spcPts val="200"/>
+              </a:spcAft>
+            </a:pPr>
             <a:r>
               <a:rPr sz="900" b="0" i="0">
                 <a:solidFill>
@@ -5650,7 +6293,17 @@
           </a:bodyPr>
           <a:lstStyle/>
           <a:p>
-            <a:pPr algn="r"/>
+            <a:pPr algn="r">
+              <a:lnSpc>
+                <a:spcPct val="115000"/>
+              </a:lnSpc>
+              <a:spcBef>
+                <a:spcPts val="0"/>
+              </a:spcBef>
+              <a:spcAft>
+                <a:spcPts val="200"/>
+              </a:spcAft>
+            </a:pPr>
             <a:r>
               <a:rPr sz="900" b="0" i="0">
                 <a:solidFill>
@@ -5770,7 +6423,17 @@
           </a:bodyPr>
           <a:lstStyle/>
           <a:p>
-            <a:pPr algn="l"/>
+            <a:pPr algn="l">
+              <a:lnSpc>
+                <a:spcPct val="115000"/>
+              </a:lnSpc>
+              <a:spcBef>
+                <a:spcPts val="0"/>
+              </a:spcBef>
+              <a:spcAft>
+                <a:spcPts val="200"/>
+              </a:spcAft>
+            </a:pPr>
             <a:r>
               <a:rPr sz="2200" b="1" i="0">
                 <a:solidFill>
@@ -5805,7 +6468,17 @@
           </a:bodyPr>
           <a:lstStyle/>
           <a:p>
-            <a:pPr algn="l"/>
+            <a:pPr algn="l">
+              <a:lnSpc>
+                <a:spcPct val="115000"/>
+              </a:lnSpc>
+              <a:spcBef>
+                <a:spcPts val="0"/>
+              </a:spcBef>
+              <a:spcAft>
+                <a:spcPts val="200"/>
+              </a:spcAft>
+            </a:pPr>
             <a:r>
               <a:rPr sz="1400" b="1" i="0">
                 <a:solidFill>
@@ -5840,7 +6513,17 @@
           </a:bodyPr>
           <a:lstStyle/>
           <a:p>
-            <a:pPr algn="l"/>
+            <a:pPr algn="l">
+              <a:lnSpc>
+                <a:spcPct val="115000"/>
+              </a:lnSpc>
+              <a:spcBef>
+                <a:spcPts val="0"/>
+              </a:spcBef>
+              <a:spcAft>
+                <a:spcPts val="200"/>
+              </a:spcAft>
+            </a:pPr>
             <a:r>
               <a:rPr sz="1200" b="0" i="0">
                 <a:solidFill>

--- a/applications/auda-srh/documents/auda-srh_ppt.pptx
+++ b/applications/auda-srh/documents/auda-srh_ppt.pptx
@@ -3392,6 +3392,96 @@
   <p:clrMapOvr>
     <a:masterClrMapping/>
   </p:clrMapOvr>
+  <p:timing>
+    <p:tnLst>
+      <p:par>
+        <p:cTn id="1" dur="indefinite" restart="never" nodeType="tmRoot">
+          <p:childTnLst>
+            <p:seq concurrent="true" nextAc="seek">
+              <p:cTn id="2" dur="indefinite" nodeType="mainSeq">
+                <p:childTnLst>
+                  <p:par>
+                    <p:cTn id="9" fill="hold">
+                      <p:stCondLst>
+                        <p:cond delay="0"/>
+                      </p:stCondLst>
+                      <p:childTnLst>
+                        <p:par>
+                          <p:cTn id="3" presetID="10" presetClass="entr" presetSubtype="0" fill="hold" nodeType="withEffect">
+                            <p:stCondLst>
+                              <p:cond delay="0"/>
+                            </p:stCondLst>
+                            <p:childTnLst>
+                              <p:animEffect transition="in" filter="fade">
+                                <p:cBhvr>
+                                  <p:cTn id="4" dur="450"/>
+                                  <p:tgtEl>
+                                    <p:spTgt spid="2"/>
+                                  </p:tgtEl>
+                                </p:cBhvr>
+                              </p:animEffect>
+                            </p:childTnLst>
+                          </p:cTn>
+                        </p:par>
+                        <p:par>
+                          <p:cTn id="5" presetID="10" presetClass="entr" presetSubtype="0" fill="hold" nodeType="withEffect">
+                            <p:stCondLst>
+                              <p:cond delay="200"/>
+                            </p:stCondLst>
+                            <p:childTnLst>
+                              <p:animEffect transition="in" filter="fade">
+                                <p:cBhvr>
+                                  <p:cTn id="6" dur="450"/>
+                                  <p:tgtEl>
+                                    <p:spTgt spid="3"/>
+                                  </p:tgtEl>
+                                </p:cBhvr>
+                              </p:animEffect>
+                            </p:childTnLst>
+                          </p:cTn>
+                        </p:par>
+                        <p:par>
+                          <p:cTn id="7" presetID="10" presetClass="entr" presetSubtype="0" fill="hold" nodeType="withEffect">
+                            <p:stCondLst>
+                              <p:cond delay="200"/>
+                            </p:stCondLst>
+                            <p:childTnLst>
+                              <p:animEffect transition="in" filter="fade">
+                                <p:cBhvr>
+                                  <p:cTn id="8" dur="450"/>
+                                  <p:tgtEl>
+                                    <p:spTgt spid="4"/>
+                                  </p:tgtEl>
+                                </p:cBhvr>
+                              </p:animEffect>
+                            </p:childTnLst>
+                          </p:cTn>
+                        </p:par>
+                      </p:childTnLst>
+                    </p:cTn>
+                  </p:par>
+                </p:childTnLst>
+              </p:cTn>
+              <p:prevCondLst>
+                <p:cond evt="onPrev" delay="0">
+                  <p:tgtEl>
+                    <p:sldTgt/>
+                  </p:tgtEl>
+                </p:cond>
+              </p:prevCondLst>
+              <p:nextCondLst>
+                <p:cond evt="onNext" delay="0">
+                  <p:tgtEl>
+                    <p:sldTgt/>
+                  </p:tgtEl>
+                </p:cond>
+              </p:nextCondLst>
+            </p:seq>
+          </p:childTnLst>
+        </p:cTn>
+      </p:par>
+    </p:tnLst>
+  </p:timing>
 </p:sld>
 </file>
 
@@ -3808,6 +3898,96 @@
   <p:clrMapOvr>
     <a:masterClrMapping/>
   </p:clrMapOvr>
+  <p:timing>
+    <p:tnLst>
+      <p:par>
+        <p:cTn id="1" dur="indefinite" restart="never" nodeType="tmRoot">
+          <p:childTnLst>
+            <p:seq concurrent="true" nextAc="seek">
+              <p:cTn id="2" dur="indefinite" nodeType="mainSeq">
+                <p:childTnLst>
+                  <p:par>
+                    <p:cTn id="9" fill="hold">
+                      <p:stCondLst>
+                        <p:cond delay="0"/>
+                      </p:stCondLst>
+                      <p:childTnLst>
+                        <p:par>
+                          <p:cTn id="3" presetID="10" presetClass="entr" presetSubtype="0" fill="hold" nodeType="withEffect">
+                            <p:stCondLst>
+                              <p:cond delay="0"/>
+                            </p:stCondLst>
+                            <p:childTnLst>
+                              <p:animEffect transition="in" filter="fade">
+                                <p:cBhvr>
+                                  <p:cTn id="4" dur="450"/>
+                                  <p:tgtEl>
+                                    <p:spTgt spid="2"/>
+                                  </p:tgtEl>
+                                </p:cBhvr>
+                              </p:animEffect>
+                            </p:childTnLst>
+                          </p:cTn>
+                        </p:par>
+                        <p:par>
+                          <p:cTn id="5" presetID="10" presetClass="entr" presetSubtype="0" fill="hold" nodeType="withEffect">
+                            <p:stCondLst>
+                              <p:cond delay="200"/>
+                            </p:stCondLst>
+                            <p:childTnLst>
+                              <p:animEffect transition="in" filter="fade">
+                                <p:cBhvr>
+                                  <p:cTn id="6" dur="450"/>
+                                  <p:tgtEl>
+                                    <p:spTgt spid="3"/>
+                                  </p:tgtEl>
+                                </p:cBhvr>
+                              </p:animEffect>
+                            </p:childTnLst>
+                          </p:cTn>
+                        </p:par>
+                        <p:par>
+                          <p:cTn id="7" presetID="10" presetClass="entr" presetSubtype="0" fill="hold" nodeType="withEffect">
+                            <p:stCondLst>
+                              <p:cond delay="200"/>
+                            </p:stCondLst>
+                            <p:childTnLst>
+                              <p:animEffect transition="in" filter="fade">
+                                <p:cBhvr>
+                                  <p:cTn id="8" dur="450"/>
+                                  <p:tgtEl>
+                                    <p:spTgt spid="4"/>
+                                  </p:tgtEl>
+                                </p:cBhvr>
+                              </p:animEffect>
+                            </p:childTnLst>
+                          </p:cTn>
+                        </p:par>
+                      </p:childTnLst>
+                    </p:cTn>
+                  </p:par>
+                </p:childTnLst>
+              </p:cTn>
+              <p:prevCondLst>
+                <p:cond evt="onPrev" delay="0">
+                  <p:tgtEl>
+                    <p:sldTgt/>
+                  </p:tgtEl>
+                </p:cond>
+              </p:prevCondLst>
+              <p:nextCondLst>
+                <p:cond evt="onNext" delay="0">
+                  <p:tgtEl>
+                    <p:sldTgt/>
+                  </p:tgtEl>
+                </p:cond>
+              </p:nextCondLst>
+            </p:seq>
+          </p:childTnLst>
+        </p:cTn>
+      </p:par>
+    </p:tnLst>
+  </p:timing>
 </p:sld>
 </file>
 
@@ -4270,6 +4450,96 @@
   <p:clrMapOvr>
     <a:masterClrMapping/>
   </p:clrMapOvr>
+  <p:timing>
+    <p:tnLst>
+      <p:par>
+        <p:cTn id="1" dur="indefinite" restart="never" nodeType="tmRoot">
+          <p:childTnLst>
+            <p:seq concurrent="true" nextAc="seek">
+              <p:cTn id="2" dur="indefinite" nodeType="mainSeq">
+                <p:childTnLst>
+                  <p:par>
+                    <p:cTn id="9" fill="hold">
+                      <p:stCondLst>
+                        <p:cond delay="0"/>
+                      </p:stCondLst>
+                      <p:childTnLst>
+                        <p:par>
+                          <p:cTn id="3" presetID="10" presetClass="entr" presetSubtype="0" fill="hold" nodeType="withEffect">
+                            <p:stCondLst>
+                              <p:cond delay="0"/>
+                            </p:stCondLst>
+                            <p:childTnLst>
+                              <p:animEffect transition="in" filter="fade">
+                                <p:cBhvr>
+                                  <p:cTn id="4" dur="450"/>
+                                  <p:tgtEl>
+                                    <p:spTgt spid="2"/>
+                                  </p:tgtEl>
+                                </p:cBhvr>
+                              </p:animEffect>
+                            </p:childTnLst>
+                          </p:cTn>
+                        </p:par>
+                        <p:par>
+                          <p:cTn id="5" presetID="10" presetClass="entr" presetSubtype="0" fill="hold" nodeType="withEffect">
+                            <p:stCondLst>
+                              <p:cond delay="200"/>
+                            </p:stCondLst>
+                            <p:childTnLst>
+                              <p:animEffect transition="in" filter="fade">
+                                <p:cBhvr>
+                                  <p:cTn id="6" dur="450"/>
+                                  <p:tgtEl>
+                                    <p:spTgt spid="3"/>
+                                  </p:tgtEl>
+                                </p:cBhvr>
+                              </p:animEffect>
+                            </p:childTnLst>
+                          </p:cTn>
+                        </p:par>
+                        <p:par>
+                          <p:cTn id="7" presetID="10" presetClass="entr" presetSubtype="0" fill="hold" nodeType="withEffect">
+                            <p:stCondLst>
+                              <p:cond delay="200"/>
+                            </p:stCondLst>
+                            <p:childTnLst>
+                              <p:animEffect transition="in" filter="fade">
+                                <p:cBhvr>
+                                  <p:cTn id="8" dur="450"/>
+                                  <p:tgtEl>
+                                    <p:spTgt spid="4"/>
+                                  </p:tgtEl>
+                                </p:cBhvr>
+                              </p:animEffect>
+                            </p:childTnLst>
+                          </p:cTn>
+                        </p:par>
+                      </p:childTnLst>
+                    </p:cTn>
+                  </p:par>
+                </p:childTnLst>
+              </p:cTn>
+              <p:prevCondLst>
+                <p:cond evt="onPrev" delay="0">
+                  <p:tgtEl>
+                    <p:sldTgt/>
+                  </p:tgtEl>
+                </p:cond>
+              </p:prevCondLst>
+              <p:nextCondLst>
+                <p:cond evt="onNext" delay="0">
+                  <p:tgtEl>
+                    <p:sldTgt/>
+                  </p:tgtEl>
+                </p:cond>
+              </p:nextCondLst>
+            </p:seq>
+          </p:childTnLst>
+        </p:cTn>
+      </p:par>
+    </p:tnLst>
+  </p:timing>
 </p:sld>
 </file>
 
@@ -4710,6 +4980,96 @@
   <p:clrMapOvr>
     <a:masterClrMapping/>
   </p:clrMapOvr>
+  <p:timing>
+    <p:tnLst>
+      <p:par>
+        <p:cTn id="1" dur="indefinite" restart="never" nodeType="tmRoot">
+          <p:childTnLst>
+            <p:seq concurrent="true" nextAc="seek">
+              <p:cTn id="2" dur="indefinite" nodeType="mainSeq">
+                <p:childTnLst>
+                  <p:par>
+                    <p:cTn id="9" fill="hold">
+                      <p:stCondLst>
+                        <p:cond delay="0"/>
+                      </p:stCondLst>
+                      <p:childTnLst>
+                        <p:par>
+                          <p:cTn id="3" presetID="10" presetClass="entr" presetSubtype="0" fill="hold" nodeType="withEffect">
+                            <p:stCondLst>
+                              <p:cond delay="0"/>
+                            </p:stCondLst>
+                            <p:childTnLst>
+                              <p:animEffect transition="in" filter="fade">
+                                <p:cBhvr>
+                                  <p:cTn id="4" dur="450"/>
+                                  <p:tgtEl>
+                                    <p:spTgt spid="2"/>
+                                  </p:tgtEl>
+                                </p:cBhvr>
+                              </p:animEffect>
+                            </p:childTnLst>
+                          </p:cTn>
+                        </p:par>
+                        <p:par>
+                          <p:cTn id="5" presetID="10" presetClass="entr" presetSubtype="0" fill="hold" nodeType="withEffect">
+                            <p:stCondLst>
+                              <p:cond delay="200"/>
+                            </p:stCondLst>
+                            <p:childTnLst>
+                              <p:animEffect transition="in" filter="fade">
+                                <p:cBhvr>
+                                  <p:cTn id="6" dur="450"/>
+                                  <p:tgtEl>
+                                    <p:spTgt spid="3"/>
+                                  </p:tgtEl>
+                                </p:cBhvr>
+                              </p:animEffect>
+                            </p:childTnLst>
+                          </p:cTn>
+                        </p:par>
+                        <p:par>
+                          <p:cTn id="7" presetID="10" presetClass="entr" presetSubtype="0" fill="hold" nodeType="withEffect">
+                            <p:stCondLst>
+                              <p:cond delay="200"/>
+                            </p:stCondLst>
+                            <p:childTnLst>
+                              <p:animEffect transition="in" filter="fade">
+                                <p:cBhvr>
+                                  <p:cTn id="8" dur="450"/>
+                                  <p:tgtEl>
+                                    <p:spTgt spid="4"/>
+                                  </p:tgtEl>
+                                </p:cBhvr>
+                              </p:animEffect>
+                            </p:childTnLst>
+                          </p:cTn>
+                        </p:par>
+                      </p:childTnLst>
+                    </p:cTn>
+                  </p:par>
+                </p:childTnLst>
+              </p:cTn>
+              <p:prevCondLst>
+                <p:cond evt="onPrev" delay="0">
+                  <p:tgtEl>
+                    <p:sldTgt/>
+                  </p:tgtEl>
+                </p:cond>
+              </p:prevCondLst>
+              <p:nextCondLst>
+                <p:cond evt="onNext" delay="0">
+                  <p:tgtEl>
+                    <p:sldTgt/>
+                  </p:tgtEl>
+                </p:cond>
+              </p:nextCondLst>
+            </p:seq>
+          </p:childTnLst>
+        </p:cTn>
+      </p:par>
+    </p:tnLst>
+  </p:timing>
 </p:sld>
 </file>
 
@@ -5397,6 +5757,96 @@
   <p:clrMapOvr>
     <a:masterClrMapping/>
   </p:clrMapOvr>
+  <p:timing>
+    <p:tnLst>
+      <p:par>
+        <p:cTn id="1" dur="indefinite" restart="never" nodeType="tmRoot">
+          <p:childTnLst>
+            <p:seq concurrent="true" nextAc="seek">
+              <p:cTn id="2" dur="indefinite" nodeType="mainSeq">
+                <p:childTnLst>
+                  <p:par>
+                    <p:cTn id="9" fill="hold">
+                      <p:stCondLst>
+                        <p:cond delay="0"/>
+                      </p:stCondLst>
+                      <p:childTnLst>
+                        <p:par>
+                          <p:cTn id="3" presetID="10" presetClass="entr" presetSubtype="0" fill="hold" nodeType="withEffect">
+                            <p:stCondLst>
+                              <p:cond delay="0"/>
+                            </p:stCondLst>
+                            <p:childTnLst>
+                              <p:animEffect transition="in" filter="fade">
+                                <p:cBhvr>
+                                  <p:cTn id="4" dur="450"/>
+                                  <p:tgtEl>
+                                    <p:spTgt spid="2"/>
+                                  </p:tgtEl>
+                                </p:cBhvr>
+                              </p:animEffect>
+                            </p:childTnLst>
+                          </p:cTn>
+                        </p:par>
+                        <p:par>
+                          <p:cTn id="5" presetID="10" presetClass="entr" presetSubtype="0" fill="hold" nodeType="withEffect">
+                            <p:stCondLst>
+                              <p:cond delay="200"/>
+                            </p:stCondLst>
+                            <p:childTnLst>
+                              <p:animEffect transition="in" filter="fade">
+                                <p:cBhvr>
+                                  <p:cTn id="6" dur="450"/>
+                                  <p:tgtEl>
+                                    <p:spTgt spid="3"/>
+                                  </p:tgtEl>
+                                </p:cBhvr>
+                              </p:animEffect>
+                            </p:childTnLst>
+                          </p:cTn>
+                        </p:par>
+                        <p:par>
+                          <p:cTn id="7" presetID="10" presetClass="entr" presetSubtype="0" fill="hold" nodeType="withEffect">
+                            <p:stCondLst>
+                              <p:cond delay="200"/>
+                            </p:stCondLst>
+                            <p:childTnLst>
+                              <p:animEffect transition="in" filter="fade">
+                                <p:cBhvr>
+                                  <p:cTn id="8" dur="450"/>
+                                  <p:tgtEl>
+                                    <p:spTgt spid="4"/>
+                                  </p:tgtEl>
+                                </p:cBhvr>
+                              </p:animEffect>
+                            </p:childTnLst>
+                          </p:cTn>
+                        </p:par>
+                      </p:childTnLst>
+                    </p:cTn>
+                  </p:par>
+                </p:childTnLst>
+              </p:cTn>
+              <p:prevCondLst>
+                <p:cond evt="onPrev" delay="0">
+                  <p:tgtEl>
+                    <p:sldTgt/>
+                  </p:tgtEl>
+                </p:cond>
+              </p:prevCondLst>
+              <p:nextCondLst>
+                <p:cond evt="onNext" delay="0">
+                  <p:tgtEl>
+                    <p:sldTgt/>
+                  </p:tgtEl>
+                </p:cond>
+              </p:nextCondLst>
+            </p:seq>
+          </p:childTnLst>
+        </p:cTn>
+      </p:par>
+    </p:tnLst>
+  </p:timing>
 </p:sld>
 </file>
 
@@ -5859,6 +6309,96 @@
   <p:clrMapOvr>
     <a:masterClrMapping/>
   </p:clrMapOvr>
+  <p:timing>
+    <p:tnLst>
+      <p:par>
+        <p:cTn id="1" dur="indefinite" restart="never" nodeType="tmRoot">
+          <p:childTnLst>
+            <p:seq concurrent="true" nextAc="seek">
+              <p:cTn id="2" dur="indefinite" nodeType="mainSeq">
+                <p:childTnLst>
+                  <p:par>
+                    <p:cTn id="9" fill="hold">
+                      <p:stCondLst>
+                        <p:cond delay="0"/>
+                      </p:stCondLst>
+                      <p:childTnLst>
+                        <p:par>
+                          <p:cTn id="3" presetID="10" presetClass="entr" presetSubtype="0" fill="hold" nodeType="withEffect">
+                            <p:stCondLst>
+                              <p:cond delay="0"/>
+                            </p:stCondLst>
+                            <p:childTnLst>
+                              <p:animEffect transition="in" filter="fade">
+                                <p:cBhvr>
+                                  <p:cTn id="4" dur="450"/>
+                                  <p:tgtEl>
+                                    <p:spTgt spid="2"/>
+                                  </p:tgtEl>
+                                </p:cBhvr>
+                              </p:animEffect>
+                            </p:childTnLst>
+                          </p:cTn>
+                        </p:par>
+                        <p:par>
+                          <p:cTn id="5" presetID="10" presetClass="entr" presetSubtype="0" fill="hold" nodeType="withEffect">
+                            <p:stCondLst>
+                              <p:cond delay="200"/>
+                            </p:stCondLst>
+                            <p:childTnLst>
+                              <p:animEffect transition="in" filter="fade">
+                                <p:cBhvr>
+                                  <p:cTn id="6" dur="450"/>
+                                  <p:tgtEl>
+                                    <p:spTgt spid="3"/>
+                                  </p:tgtEl>
+                                </p:cBhvr>
+                              </p:animEffect>
+                            </p:childTnLst>
+                          </p:cTn>
+                        </p:par>
+                        <p:par>
+                          <p:cTn id="7" presetID="10" presetClass="entr" presetSubtype="0" fill="hold" nodeType="withEffect">
+                            <p:stCondLst>
+                              <p:cond delay="200"/>
+                            </p:stCondLst>
+                            <p:childTnLst>
+                              <p:animEffect transition="in" filter="fade">
+                                <p:cBhvr>
+                                  <p:cTn id="8" dur="450"/>
+                                  <p:tgtEl>
+                                    <p:spTgt spid="4"/>
+                                  </p:tgtEl>
+                                </p:cBhvr>
+                              </p:animEffect>
+                            </p:childTnLst>
+                          </p:cTn>
+                        </p:par>
+                      </p:childTnLst>
+                    </p:cTn>
+                  </p:par>
+                </p:childTnLst>
+              </p:cTn>
+              <p:prevCondLst>
+                <p:cond evt="onPrev" delay="0">
+                  <p:tgtEl>
+                    <p:sldTgt/>
+                  </p:tgtEl>
+                </p:cond>
+              </p:prevCondLst>
+              <p:nextCondLst>
+                <p:cond evt="onNext" delay="0">
+                  <p:tgtEl>
+                    <p:sldTgt/>
+                  </p:tgtEl>
+                </p:cond>
+              </p:nextCondLst>
+            </p:seq>
+          </p:childTnLst>
+        </p:cTn>
+      </p:par>
+    </p:tnLst>
+  </p:timing>
 </p:sld>
 </file>
 
@@ -6321,6 +6861,96 @@
   <p:clrMapOvr>
     <a:masterClrMapping/>
   </p:clrMapOvr>
+  <p:timing>
+    <p:tnLst>
+      <p:par>
+        <p:cTn id="1" dur="indefinite" restart="never" nodeType="tmRoot">
+          <p:childTnLst>
+            <p:seq concurrent="true" nextAc="seek">
+              <p:cTn id="2" dur="indefinite" nodeType="mainSeq">
+                <p:childTnLst>
+                  <p:par>
+                    <p:cTn id="9" fill="hold">
+                      <p:stCondLst>
+                        <p:cond delay="0"/>
+                      </p:stCondLst>
+                      <p:childTnLst>
+                        <p:par>
+                          <p:cTn id="3" presetID="10" presetClass="entr" presetSubtype="0" fill="hold" nodeType="withEffect">
+                            <p:stCondLst>
+                              <p:cond delay="0"/>
+                            </p:stCondLst>
+                            <p:childTnLst>
+                              <p:animEffect transition="in" filter="fade">
+                                <p:cBhvr>
+                                  <p:cTn id="4" dur="450"/>
+                                  <p:tgtEl>
+                                    <p:spTgt spid="2"/>
+                                  </p:tgtEl>
+                                </p:cBhvr>
+                              </p:animEffect>
+                            </p:childTnLst>
+                          </p:cTn>
+                        </p:par>
+                        <p:par>
+                          <p:cTn id="5" presetID="10" presetClass="entr" presetSubtype="0" fill="hold" nodeType="withEffect">
+                            <p:stCondLst>
+                              <p:cond delay="200"/>
+                            </p:stCondLst>
+                            <p:childTnLst>
+                              <p:animEffect transition="in" filter="fade">
+                                <p:cBhvr>
+                                  <p:cTn id="6" dur="450"/>
+                                  <p:tgtEl>
+                                    <p:spTgt spid="3"/>
+                                  </p:tgtEl>
+                                </p:cBhvr>
+                              </p:animEffect>
+                            </p:childTnLst>
+                          </p:cTn>
+                        </p:par>
+                        <p:par>
+                          <p:cTn id="7" presetID="10" presetClass="entr" presetSubtype="0" fill="hold" nodeType="withEffect">
+                            <p:stCondLst>
+                              <p:cond delay="200"/>
+                            </p:stCondLst>
+                            <p:childTnLst>
+                              <p:animEffect transition="in" filter="fade">
+                                <p:cBhvr>
+                                  <p:cTn id="8" dur="450"/>
+                                  <p:tgtEl>
+                                    <p:spTgt spid="4"/>
+                                  </p:tgtEl>
+                                </p:cBhvr>
+                              </p:animEffect>
+                            </p:childTnLst>
+                          </p:cTn>
+                        </p:par>
+                      </p:childTnLst>
+                    </p:cTn>
+                  </p:par>
+                </p:childTnLst>
+              </p:cTn>
+              <p:prevCondLst>
+                <p:cond evt="onPrev" delay="0">
+                  <p:tgtEl>
+                    <p:sldTgt/>
+                  </p:tgtEl>
+                </p:cond>
+              </p:prevCondLst>
+              <p:nextCondLst>
+                <p:cond evt="onNext" delay="0">
+                  <p:tgtEl>
+                    <p:sldTgt/>
+                  </p:tgtEl>
+                </p:cond>
+              </p:nextCondLst>
+            </p:seq>
+          </p:childTnLst>
+        </p:cTn>
+      </p:par>
+    </p:tnLst>
+  </p:timing>
 </p:sld>
 </file>
 
@@ -6541,6 +7171,96 @@
   <p:clrMapOvr>
     <a:masterClrMapping/>
   </p:clrMapOvr>
+  <p:timing>
+    <p:tnLst>
+      <p:par>
+        <p:cTn id="1" dur="indefinite" restart="never" nodeType="tmRoot">
+          <p:childTnLst>
+            <p:seq concurrent="true" nextAc="seek">
+              <p:cTn id="2" dur="indefinite" nodeType="mainSeq">
+                <p:childTnLst>
+                  <p:par>
+                    <p:cTn id="9" fill="hold">
+                      <p:stCondLst>
+                        <p:cond delay="0"/>
+                      </p:stCondLst>
+                      <p:childTnLst>
+                        <p:par>
+                          <p:cTn id="3" presetID="10" presetClass="entr" presetSubtype="0" fill="hold" nodeType="withEffect">
+                            <p:stCondLst>
+                              <p:cond delay="0"/>
+                            </p:stCondLst>
+                            <p:childTnLst>
+                              <p:animEffect transition="in" filter="fade">
+                                <p:cBhvr>
+                                  <p:cTn id="4" dur="450"/>
+                                  <p:tgtEl>
+                                    <p:spTgt spid="2"/>
+                                  </p:tgtEl>
+                                </p:cBhvr>
+                              </p:animEffect>
+                            </p:childTnLst>
+                          </p:cTn>
+                        </p:par>
+                        <p:par>
+                          <p:cTn id="5" presetID="10" presetClass="entr" presetSubtype="0" fill="hold" nodeType="withEffect">
+                            <p:stCondLst>
+                              <p:cond delay="200"/>
+                            </p:stCondLst>
+                            <p:childTnLst>
+                              <p:animEffect transition="in" filter="fade">
+                                <p:cBhvr>
+                                  <p:cTn id="6" dur="450"/>
+                                  <p:tgtEl>
+                                    <p:spTgt spid="3"/>
+                                  </p:tgtEl>
+                                </p:cBhvr>
+                              </p:animEffect>
+                            </p:childTnLst>
+                          </p:cTn>
+                        </p:par>
+                        <p:par>
+                          <p:cTn id="7" presetID="10" presetClass="entr" presetSubtype="0" fill="hold" nodeType="withEffect">
+                            <p:stCondLst>
+                              <p:cond delay="200"/>
+                            </p:stCondLst>
+                            <p:childTnLst>
+                              <p:animEffect transition="in" filter="fade">
+                                <p:cBhvr>
+                                  <p:cTn id="8" dur="450"/>
+                                  <p:tgtEl>
+                                    <p:spTgt spid="4"/>
+                                  </p:tgtEl>
+                                </p:cBhvr>
+                              </p:animEffect>
+                            </p:childTnLst>
+                          </p:cTn>
+                        </p:par>
+                      </p:childTnLst>
+                    </p:cTn>
+                  </p:par>
+                </p:childTnLst>
+              </p:cTn>
+              <p:prevCondLst>
+                <p:cond evt="onPrev" delay="0">
+                  <p:tgtEl>
+                    <p:sldTgt/>
+                  </p:tgtEl>
+                </p:cond>
+              </p:prevCondLst>
+              <p:nextCondLst>
+                <p:cond evt="onNext" delay="0">
+                  <p:tgtEl>
+                    <p:sldTgt/>
+                  </p:tgtEl>
+                </p:cond>
+              </p:nextCondLst>
+            </p:seq>
+          </p:childTnLst>
+        </p:cTn>
+      </p:par>
+    </p:tnLst>
+  </p:timing>
 </p:sld>
 </file>
 
